--- a/DriveSafeAI_Presentacion.pptx
+++ b/DriveSafeAI_Presentacion.pptx
@@ -4,6 +4,9 @@
   <p:sldMasterIdLst>
     <p:sldMasterId id="2147483648" r:id="rId1"/>
   </p:sldMasterIdLst>
+  <p:notesMasterIdLst>
+    <p:notesMasterId r:id="rId19"/>
+  </p:notesMasterIdLst>
   <p:sldIdLst>
     <p:sldId id="256" r:id="rId2"/>
     <p:sldId id="257" r:id="rId3"/>
@@ -23,9 +26,6 @@
     <p:sldId id="271" r:id="rId17"/>
     <p:sldId id="272" r:id="rId18"/>
   </p:sldIdLst>
-  <p:notesMasterIdLst>
-    <p:notesMasterId r:id="rId19"/>
-  </p:notesMasterIdLst>
   <p:sldSz cx="12192000" cy="6858000"/>
   <p:notesSz cx="6858000" cy="12192000"/>
   <p:defaultTextStyle>
@@ -120,6 +120,11 @@
       </a:defRPr>
     </a:lvl9pPr>
   </p:defaultTextStyle>
+  <p:extLst>
+    <p:ext uri="{EFAFB233-063F-42B5-8137-9DF3F51BA10A}">
+      <p15:sldGuideLst xmlns:p15="http://schemas.microsoft.com/office/powerpoint/2012/main"/>
+    </p:ext>
+  </p:extLst>
 </p:presentation>
 </file>
 
@@ -145,234 +150,10 @@
           <a:chExt cx="0" cy="0"/>
         </a:xfrm>
       </p:grpSpPr>
-      <p:sp>
-        <p:nvSpPr>
-          <p:cNvPr id="2" name="Header Placeholder 1"/>
-          <p:cNvSpPr>
-            <a:spLocks noGrp="1"/>
-          </p:cNvSpPr>
-          <p:nvPr>
-            <p:ph type="hdr" sz="quarter"/>
-          </p:nvPr>
-        </p:nvSpPr>
-        <p:spPr>
-          <a:xfrm>
-            <a:off x="0" y="0"/>
-            <a:ext cx="2971800" cy="458788"/>
-          </a:xfrm>
-          <a:prstGeom prst="rect">
-            <a:avLst/>
-          </a:prstGeom>
-        </p:spPr>
-        <p:txBody>
-          <a:bodyPr vert="horz" lIns="91440" tIns="45720" rIns="91440" bIns="45720" rtlCol="0"/>
-          <a:lstStyle>
-            <a:lvl1pPr algn="l">
-              <a:defRPr sz="1200"/>
-            </a:lvl1pPr>
-          </a:lstStyle>
-          <a:p>
-            <a:endParaRPr lang="en-US"/>
-          </a:p>
-        </p:txBody>
-      </p:sp>
-      <p:sp>
-        <p:nvSpPr>
-          <p:cNvPr id="3" name="Date Placeholder 2"/>
-          <p:cNvSpPr>
-            <a:spLocks noGrp="1"/>
-          </p:cNvSpPr>
-          <p:nvPr>
-            <p:ph type="dt" idx="1"/>
-          </p:nvPr>
-        </p:nvSpPr>
-        <p:spPr>
-          <a:xfrm>
-            <a:off x="3884613" y="0"/>
-            <a:ext cx="2971800" cy="458788"/>
-          </a:xfrm>
-          <a:prstGeom prst="rect">
-            <a:avLst/>
-          </a:prstGeom>
-        </p:spPr>
-        <p:txBody>
-          <a:bodyPr vert="horz" lIns="91440" tIns="45720" rIns="91440" bIns="45720" rtlCol="0"/>
-          <a:lstStyle>
-            <a:lvl1pPr algn="r">
-              <a:defRPr sz="1200"/>
-            </a:lvl1pPr>
-          </a:lstStyle>
-          <a:p>
-            <a:fld id="{5282F153-3F37-0F45-9E97-73ACFA13230C}" type="datetimeFigureOut">
-              <a:rPr lang="en-US"/>
-              <a:t>7/23/19</a:t>
-            </a:fld>
-            <a:endParaRPr lang="en-US"/>
-          </a:p>
-        </p:txBody>
-      </p:sp>
-      <p:sp>
-        <p:nvSpPr>
-          <p:cNvPr id="4" name="Slide Image Placeholder 3"/>
-          <p:cNvSpPr>
-            <a:spLocks noGrp="1" noRot="1" noChangeAspect="1"/>
-          </p:cNvSpPr>
-          <p:nvPr>
-            <p:ph type="sldImg" idx="2"/>
-          </p:nvPr>
-        </p:nvSpPr>
-        <p:spPr>
-          <a:xfrm>
-            <a:off x="685800" y="1143000"/>
-            <a:ext cx="5486400" cy="3086100"/>
-          </a:xfrm>
-          <a:prstGeom prst="rect">
-            <a:avLst/>
-          </a:prstGeom>
-          <a:noFill/>
-          <a:ln w="12700">
-            <a:solidFill>
-              <a:prstClr val="black"/>
-            </a:solidFill>
-          </a:ln>
-        </p:spPr>
-        <p:txBody>
-          <a:bodyPr vert="horz" lIns="91440" tIns="45720" rIns="91440" bIns="45720" rtlCol="0" anchor="ctr"/>
-          <a:lstStyle/>
-          <a:p>
-            <a:endParaRPr lang="en-US"/>
-          </a:p>
-        </p:txBody>
-      </p:sp>
-      <p:sp>
-        <p:nvSpPr>
-          <p:cNvPr id="5" name="Notes Placeholder 4"/>
-          <p:cNvSpPr>
-            <a:spLocks noGrp="1"/>
-          </p:cNvSpPr>
-          <p:nvPr>
-            <p:ph type="body" sz="quarter" idx="3"/>
-          </p:nvPr>
-        </p:nvSpPr>
-        <p:spPr>
-          <a:xfrm>
-            <a:off x="685800" y="4400550"/>
-            <a:ext cx="5486400" cy="3600450"/>
-          </a:xfrm>
-          <a:prstGeom prst="rect">
-            <a:avLst/>
-          </a:prstGeom>
-        </p:spPr>
-        <p:txBody>
-          <a:bodyPr vert="horz" lIns="91440" tIns="45720" rIns="91440" bIns="45720" rtlCol="0"/>
-          <a:lstStyle/>
-          <a:p>
-            <a:pPr lvl="0"/>
-            <a:r>
-              <a:rPr lang="en-US"/>
-              <a:t>Click to edit Master text styles</a:t>
-            </a:r>
-          </a:p>
-          <a:p>
-            <a:pPr lvl="1"/>
-            <a:r>
-              <a:rPr lang="en-US"/>
-              <a:t>Second level</a:t>
-            </a:r>
-          </a:p>
-          <a:p>
-            <a:pPr lvl="2"/>
-            <a:r>
-              <a:rPr lang="en-US"/>
-              <a:t>Third level</a:t>
-            </a:r>
-          </a:p>
-          <a:p>
-            <a:pPr lvl="3"/>
-            <a:r>
-              <a:rPr lang="en-US"/>
-              <a:t>Fourth level</a:t>
-            </a:r>
-          </a:p>
-          <a:p>
-            <a:pPr lvl="4"/>
-            <a:r>
-              <a:rPr lang="en-US"/>
-              <a:t>Fifth level</a:t>
-            </a:r>
-          </a:p>
-        </p:txBody>
-      </p:sp>
-      <p:sp>
-        <p:nvSpPr>
-          <p:cNvPr id="6" name="Footer Placeholder 5"/>
-          <p:cNvSpPr>
-            <a:spLocks noGrp="1"/>
-          </p:cNvSpPr>
-          <p:nvPr>
-            <p:ph type="ftr" sz="quarter" idx="4"/>
-          </p:nvPr>
-        </p:nvSpPr>
-        <p:spPr>
-          <a:xfrm>
-            <a:off x="0" y="8685213"/>
-            <a:ext cx="2971800" cy="458787"/>
-          </a:xfrm>
-          <a:prstGeom prst="rect">
-            <a:avLst/>
-          </a:prstGeom>
-        </p:spPr>
-        <p:txBody>
-          <a:bodyPr vert="horz" lIns="91440" tIns="45720" rIns="91440" bIns="45720" rtlCol="0" anchor="b"/>
-          <a:lstStyle>
-            <a:lvl1pPr algn="l">
-              <a:defRPr sz="1200"/>
-            </a:lvl1pPr>
-          </a:lstStyle>
-          <a:p>
-            <a:endParaRPr lang="en-US"/>
-          </a:p>
-        </p:txBody>
-      </p:sp>
-      <p:sp>
-        <p:nvSpPr>
-          <p:cNvPr id="7" name="Slide Number Placeholder 6"/>
-          <p:cNvSpPr>
-            <a:spLocks noGrp="1"/>
-          </p:cNvSpPr>
-          <p:nvPr>
-            <p:ph type="sldNum" sz="quarter" idx="5"/>
-          </p:nvPr>
-        </p:nvSpPr>
-        <p:spPr>
-          <a:xfrm>
-            <a:off x="3884613" y="8685213"/>
-            <a:ext cx="2971800" cy="458787"/>
-          </a:xfrm>
-          <a:prstGeom prst="rect">
-            <a:avLst/>
-          </a:prstGeom>
-        </p:spPr>
-        <p:txBody>
-          <a:bodyPr vert="horz" lIns="91440" tIns="45720" rIns="91440" bIns="45720" rtlCol="0" anchor="b"/>
-          <a:lstStyle>
-            <a:lvl1pPr algn="r">
-              <a:defRPr sz="1200"/>
-            </a:lvl1pPr>
-          </a:lstStyle>
-          <a:p>
-            <a:fld id="{CE5E9CC1-C706-0F49-92D6-E571CC5EEA8F}" type="slidenum">
-              <a:rPr lang="en-US"/>
-              <a:t>‹#›</a:t>
-            </a:fld>
-            <a:endParaRPr lang="en-US"/>
-          </a:p>
-        </p:txBody>
-      </p:sp>
     </p:spTree>
     <p:extLst>
       <p:ext uri="{BB962C8B-B14F-4D97-AF65-F5344CB8AC3E}">
-        <p14:creationId xmlns:p14="http://schemas.microsoft.com/office/powerpoint/2010/main" val="1024086991"/>
+        <p14:creationId xmlns:p14="http://schemas.microsoft.com/office/powerpoint/2010/main" val="1185656909"/>
       </p:ext>
     </p:extLst>
   </p:cSld>
@@ -516,10 +297,6 @@
           <a:bodyPr/>
           <a:lstStyle/>
           <a:p>
-            <a:r>
-              <a:rPr lang="en-US" dirty="0"/>
-              <a:t/>
-            </a:r>
             <a:endParaRPr lang="en-US" dirty="0"/>
           </a:p>
         </p:txBody>
@@ -604,10 +381,6 @@
           <a:bodyPr/>
           <a:lstStyle/>
           <a:p>
-            <a:r>
-              <a:rPr lang="en-US" dirty="0"/>
-              <a:t/>
-            </a:r>
             <a:endParaRPr lang="en-US" dirty="0"/>
           </a:p>
         </p:txBody>
@@ -692,10 +465,6 @@
           <a:bodyPr/>
           <a:lstStyle/>
           <a:p>
-            <a:r>
-              <a:rPr lang="en-US" dirty="0"/>
-              <a:t/>
-            </a:r>
             <a:endParaRPr lang="en-US" dirty="0"/>
           </a:p>
         </p:txBody>
@@ -780,10 +549,6 @@
           <a:bodyPr/>
           <a:lstStyle/>
           <a:p>
-            <a:r>
-              <a:rPr lang="en-US" dirty="0"/>
-              <a:t/>
-            </a:r>
             <a:endParaRPr lang="en-US" dirty="0"/>
           </a:p>
         </p:txBody>
@@ -868,10 +633,6 @@
           <a:bodyPr/>
           <a:lstStyle/>
           <a:p>
-            <a:r>
-              <a:rPr lang="en-US" dirty="0"/>
-              <a:t/>
-            </a:r>
             <a:endParaRPr lang="en-US" dirty="0"/>
           </a:p>
         </p:txBody>
@@ -956,10 +717,6 @@
           <a:bodyPr/>
           <a:lstStyle/>
           <a:p>
-            <a:r>
-              <a:rPr lang="en-US" dirty="0"/>
-              <a:t/>
-            </a:r>
             <a:endParaRPr lang="en-US" dirty="0"/>
           </a:p>
         </p:txBody>
@@ -1044,10 +801,6 @@
           <a:bodyPr/>
           <a:lstStyle/>
           <a:p>
-            <a:r>
-              <a:rPr lang="en-US" dirty="0"/>
-              <a:t/>
-            </a:r>
             <a:endParaRPr lang="en-US" dirty="0"/>
           </a:p>
         </p:txBody>
@@ -1132,10 +885,6 @@
           <a:bodyPr/>
           <a:lstStyle/>
           <a:p>
-            <a:r>
-              <a:rPr lang="en-US" dirty="0"/>
-              <a:t/>
-            </a:r>
             <a:endParaRPr lang="en-US" dirty="0"/>
           </a:p>
         </p:txBody>
@@ -1220,10 +969,6 @@
           <a:bodyPr/>
           <a:lstStyle/>
           <a:p>
-            <a:r>
-              <a:rPr lang="en-US" dirty="0"/>
-              <a:t/>
-            </a:r>
             <a:endParaRPr lang="en-US" dirty="0"/>
           </a:p>
         </p:txBody>
@@ -1308,10 +1053,6 @@
           <a:bodyPr/>
           <a:lstStyle/>
           <a:p>
-            <a:r>
-              <a:rPr lang="en-US" dirty="0"/>
-              <a:t/>
-            </a:r>
             <a:endParaRPr lang="en-US" dirty="0"/>
           </a:p>
         </p:txBody>
@@ -1396,10 +1137,6 @@
           <a:bodyPr/>
           <a:lstStyle/>
           <a:p>
-            <a:r>
-              <a:rPr lang="en-US" dirty="0"/>
-              <a:t/>
-            </a:r>
             <a:endParaRPr lang="en-US" dirty="0"/>
           </a:p>
         </p:txBody>
@@ -1484,10 +1221,6 @@
           <a:bodyPr/>
           <a:lstStyle/>
           <a:p>
-            <a:r>
-              <a:rPr lang="en-US" dirty="0"/>
-              <a:t/>
-            </a:r>
             <a:endParaRPr lang="en-US" dirty="0"/>
           </a:p>
         </p:txBody>
@@ -1572,10 +1305,6 @@
           <a:bodyPr/>
           <a:lstStyle/>
           <a:p>
-            <a:r>
-              <a:rPr lang="en-US" dirty="0"/>
-              <a:t/>
-            </a:r>
             <a:endParaRPr lang="en-US" dirty="0"/>
           </a:p>
         </p:txBody>
@@ -1660,10 +1389,6 @@
           <a:bodyPr/>
           <a:lstStyle/>
           <a:p>
-            <a:r>
-              <a:rPr lang="en-US" dirty="0"/>
-              <a:t/>
-            </a:r>
             <a:endParaRPr lang="en-US" dirty="0"/>
           </a:p>
         </p:txBody>
@@ -1748,10 +1473,6 @@
           <a:bodyPr/>
           <a:lstStyle/>
           <a:p>
-            <a:r>
-              <a:rPr lang="en-US" dirty="0"/>
-              <a:t/>
-            </a:r>
             <a:endParaRPr lang="en-US" dirty="0"/>
           </a:p>
         </p:txBody>
@@ -1836,10 +1557,6 @@
           <a:bodyPr/>
           <a:lstStyle/>
           <a:p>
-            <a:r>
-              <a:rPr lang="en-US" dirty="0"/>
-              <a:t/>
-            </a:r>
             <a:endParaRPr lang="en-US" dirty="0"/>
           </a:p>
         </p:txBody>
@@ -1924,10 +1641,6 @@
           <a:bodyPr/>
           <a:lstStyle/>
           <a:p>
-            <a:r>
-              <a:rPr lang="en-US" dirty="0"/>
-              <a:t/>
-            </a:r>
             <a:endParaRPr lang="en-US" dirty="0"/>
           </a:p>
         </p:txBody>
@@ -2001,6 +1714,11 @@
 <file path=ppt/slideMasters/slideMaster1.xml><?xml version="1.0" encoding="utf-8"?>
 <p:sldMaster xmlns:a="http://schemas.openxmlformats.org/drawingml/2006/main" xmlns:r="http://schemas.openxmlformats.org/officeDocument/2006/relationships" xmlns:p="http://schemas.openxmlformats.org/presentationml/2006/main">
   <p:cSld>
+    <p:bg>
+      <p:bgRef idx="1001">
+        <a:schemeClr val="bg1"/>
+      </p:bgRef>
+    </p:bg>
     <p:spTree>
       <p:nvGrpSpPr>
         <p:cNvPr id="1" name=""/>
@@ -2283,6 +2001,7 @@
         <a:solidFill>
           <a:srgbClr val="0F1B3C"/>
         </a:solidFill>
+        <a:effectLst/>
       </p:bgPr>
     </p:bg>
     <p:spTree>
@@ -2364,11 +2083,11 @@
           <a:bodyPr wrap="square" rtlCol="0" anchor="ctr"/>
           <a:lstStyle/>
           <a:p>
-            <a:pPr indent="0" marL="0">
-              <a:buNone/>
-            </a:pPr>
-            <a:r>
-              <a:rPr lang="en-US" sz="1200" spc="200" kern="0" dirty="0">
+            <a:pPr marL="0" indent="0">
+              <a:buNone/>
+            </a:pPr>
+            <a:r>
+              <a:rPr lang="en-US" kern="0" spc="200" dirty="0">
                 <a:solidFill>
                   <a:srgbClr val="9AA5C4"/>
                 </a:solidFill>
@@ -2378,7 +2097,7 @@
               </a:rPr>
               <a:t>UNIVERSIDAD MAYOR DE SAN ANDRÉS</a:t>
             </a:r>
-            <a:endParaRPr lang="en-US" sz="1200" dirty="0"/>
+            <a:endParaRPr lang="en-US" dirty="0"/>
           </a:p>
         </p:txBody>
       </p:sp>
@@ -2403,11 +2122,11 @@
           <a:bodyPr wrap="square" rtlCol="0" anchor="ctr"/>
           <a:lstStyle/>
           <a:p>
-            <a:pPr indent="0" marL="0">
-              <a:buNone/>
-            </a:pPr>
-            <a:r>
-              <a:rPr lang="en-US" sz="1200" dirty="0">
+            <a:pPr marL="0" indent="0">
+              <a:buNone/>
+            </a:pPr>
+            <a:r>
+              <a:rPr lang="en-US" dirty="0">
                 <a:solidFill>
                   <a:srgbClr val="9AA5C4"/>
                 </a:solidFill>
@@ -2417,7 +2136,7 @@
               </a:rPr>
               <a:t>Facultad de Ciencias Puras y Naturales  ·  Carrera de Informática</a:t>
             </a:r>
-            <a:endParaRPr lang="en-US" sz="1200" dirty="0"/>
+            <a:endParaRPr lang="en-US" dirty="0"/>
           </a:p>
         </p:txBody>
       </p:sp>
@@ -2429,7 +2148,7 @@
         </p:nvSpPr>
         <p:spPr>
           <a:xfrm>
-            <a:off x="731520" y="2286000"/>
+            <a:off x="731520" y="1481328"/>
             <a:ext cx="9144000" cy="1188720"/>
           </a:xfrm>
           <a:prstGeom prst="rect">
@@ -2442,11 +2161,11 @@
           <a:bodyPr wrap="square" rtlCol="0" anchor="ctr"/>
           <a:lstStyle/>
           <a:p>
-            <a:pPr indent="0" marL="0">
-              <a:buNone/>
-            </a:pPr>
-            <a:r>
-              <a:rPr lang="en-US" sz="6000" b="1" dirty="0">
+            <a:pPr marL="0" indent="0">
+              <a:buNone/>
+            </a:pPr>
+            <a:r>
+              <a:rPr lang="en-US" sz="8000" b="1" dirty="0">
                 <a:solidFill>
                   <a:srgbClr val="FFFFFF"/>
                 </a:solidFill>
@@ -2456,7 +2175,7 @@
               </a:rPr>
               <a:t>DriveSafe AI</a:t>
             </a:r>
-            <a:endParaRPr lang="en-US" sz="6000" dirty="0"/>
+            <a:endParaRPr lang="en-US" sz="8000" dirty="0"/>
           </a:p>
         </p:txBody>
       </p:sp>
@@ -2468,7 +2187,7 @@
         </p:nvSpPr>
         <p:spPr>
           <a:xfrm>
-            <a:off x="731520" y="3429000"/>
+            <a:off x="731520" y="2555748"/>
             <a:ext cx="9601200" cy="502920"/>
           </a:xfrm>
           <a:prstGeom prst="rect">
@@ -2481,11 +2200,11 @@
           <a:bodyPr wrap="square" rtlCol="0" anchor="ctr"/>
           <a:lstStyle/>
           <a:p>
-            <a:pPr indent="0" marL="0">
-              <a:buNone/>
-            </a:pPr>
-            <a:r>
-              <a:rPr lang="en-US" sz="2000" dirty="0">
+            <a:pPr marL="0" indent="0">
+              <a:buNone/>
+            </a:pPr>
+            <a:r>
+              <a:rPr lang="en-US" sz="3200" dirty="0">
                 <a:solidFill>
                   <a:srgbClr val="5FBDB0"/>
                 </a:solidFill>
@@ -2495,58 +2214,58 @@
               </a:rPr>
               <a:t>Sistema Inteligente de Detección de Somnolencia</a:t>
             </a:r>
+            <a:endParaRPr lang="en-US" sz="3200" dirty="0"/>
+          </a:p>
+        </p:txBody>
+      </p:sp>
+      <p:sp>
+        <p:nvSpPr>
+          <p:cNvPr id="8" name="Text 6"/>
+          <p:cNvSpPr/>
+          <p:nvPr/>
+        </p:nvSpPr>
+        <p:spPr>
+          <a:xfrm>
+            <a:off x="731520" y="2967228"/>
+            <a:ext cx="9601200" cy="457200"/>
+          </a:xfrm>
+          <a:prstGeom prst="rect">
+            <a:avLst/>
+          </a:prstGeom>
+          <a:noFill/>
+          <a:ln/>
+        </p:spPr>
+        <p:txBody>
+          <a:bodyPr wrap="square" rtlCol="0" anchor="ctr"/>
+          <a:lstStyle/>
+          <a:p>
+            <a:pPr marL="0" indent="0">
+              <a:buNone/>
+            </a:pPr>
+            <a:r>
+              <a:rPr lang="en-US" sz="2000" i="1" dirty="0">
+                <a:solidFill>
+                  <a:srgbClr val="C7CEE6"/>
+                </a:solidFill>
+                <a:latin typeface="Calibri" pitchFamily="34" charset="0"/>
+                <a:ea typeface="Calibri" pitchFamily="34" charset="-122"/>
+                <a:cs typeface="Calibri" pitchFamily="34" charset="-120"/>
+              </a:rPr>
+              <a:t>para transporte interdepartamental y vehículos particulares</a:t>
+            </a:r>
             <a:endParaRPr lang="en-US" sz="2000" dirty="0"/>
           </a:p>
         </p:txBody>
       </p:sp>
       <p:sp>
         <p:nvSpPr>
-          <p:cNvPr id="8" name="Text 6"/>
-          <p:cNvSpPr/>
-          <p:nvPr/>
-        </p:nvSpPr>
-        <p:spPr>
-          <a:xfrm>
-            <a:off x="731520" y="3840480"/>
-            <a:ext cx="9601200" cy="457200"/>
-          </a:xfrm>
-          <a:prstGeom prst="rect">
-            <a:avLst/>
-          </a:prstGeom>
-          <a:noFill/>
-          <a:ln/>
-        </p:spPr>
-        <p:txBody>
-          <a:bodyPr wrap="square" rtlCol="0" anchor="ctr"/>
-          <a:lstStyle/>
-          <a:p>
-            <a:pPr indent="0" marL="0">
-              <a:buNone/>
-            </a:pPr>
-            <a:r>
-              <a:rPr lang="en-US" sz="1500" i="1" dirty="0">
-                <a:solidFill>
-                  <a:srgbClr val="C7CEE6"/>
-                </a:solidFill>
-                <a:latin typeface="Calibri" pitchFamily="34" charset="0"/>
-                <a:ea typeface="Calibri" pitchFamily="34" charset="-122"/>
-                <a:cs typeface="Calibri" pitchFamily="34" charset="-120"/>
-              </a:rPr>
-              <a:t>para transporte interdepartamental y vehículos particulares</a:t>
-            </a:r>
-            <a:endParaRPr lang="en-US" sz="1500" dirty="0"/>
-          </a:p>
-        </p:txBody>
-      </p:sp>
-      <p:sp>
-        <p:nvSpPr>
           <p:cNvPr id="9" name="Shape 7"/>
           <p:cNvSpPr/>
           <p:nvPr/>
         </p:nvSpPr>
         <p:spPr>
           <a:xfrm>
-            <a:off x="731520" y="4526280"/>
+            <a:off x="731520" y="3653028"/>
             <a:ext cx="1463040" cy="36576"/>
           </a:xfrm>
           <a:prstGeom prst="rect">
@@ -2566,24 +2285,24 @@
         </p:nvSpPr>
         <p:spPr>
           <a:xfrm>
-            <a:off x="731520" y="4892040"/>
-            <a:ext cx="10515600" cy="365760"/>
-          </a:xfrm>
-          <a:prstGeom prst="rect">
-            <a:avLst/>
-          </a:prstGeom>
-          <a:noFill/>
-          <a:ln/>
-        </p:spPr>
-        <p:txBody>
-          <a:bodyPr wrap="square" rtlCol="0" anchor="ctr"/>
-          <a:lstStyle/>
-          <a:p>
-            <a:pPr indent="0" marL="0">
-              <a:buNone/>
-            </a:pPr>
-            <a:r>
-              <a:rPr lang="en-US" sz="1200" b="1" dirty="0">
+            <a:off x="731520" y="3918204"/>
+            <a:ext cx="4626864" cy="1465326"/>
+          </a:xfrm>
+          <a:prstGeom prst="rect">
+            <a:avLst/>
+          </a:prstGeom>
+          <a:noFill/>
+          <a:ln/>
+        </p:spPr>
+        <p:txBody>
+          <a:bodyPr wrap="square" rtlCol="0" anchor="ctr"/>
+          <a:lstStyle/>
+          <a:p>
+            <a:pPr marL="0" indent="0">
+              <a:buNone/>
+            </a:pPr>
+            <a:r>
+              <a:rPr lang="en-US" sz="2400" b="1" dirty="0">
                 <a:solidFill>
                   <a:srgbClr val="FFFFFF"/>
                 </a:solidFill>
@@ -2593,11 +2312,14 @@
               </a:rPr>
               <a:t>Integrantes:  </a:t>
             </a:r>
-            <a:pPr indent="0" marL="0">
-              <a:buNone/>
-            </a:pPr>
-            <a:r>
-              <a:rPr lang="en-US" sz="1200" dirty="0">
+          </a:p>
+          <a:p>
+            <a:pPr marL="285750" indent="-285750">
+              <a:buFont typeface="Arial" panose="020B0604020202020204" pitchFamily="34" charset="0"/>
+              <a:buChar char="•"/>
+            </a:pPr>
+            <a:r>
+              <a:rPr lang="en-US" sz="2400" dirty="0">
                 <a:solidFill>
                   <a:srgbClr val="C7CEE6"/>
                 </a:solidFill>
@@ -2605,9 +2327,82 @@
                 <a:ea typeface="Calibri" pitchFamily="34" charset="-122"/>
                 <a:cs typeface="Calibri" pitchFamily="34" charset="-120"/>
               </a:rPr>
-              <a:t>López Ticona Angela · Mendoza Caspa Ronald · Usnayo Velasco Nathalie · Zapata Nina Harol</a:t>
-            </a:r>
-            <a:endParaRPr lang="en-US" sz="1200" dirty="0"/>
+              <a:t>López Ticona Angela </a:t>
+            </a:r>
+          </a:p>
+          <a:p>
+            <a:pPr marL="285750" indent="-285750">
+              <a:buFont typeface="Arial" panose="020B0604020202020204" pitchFamily="34" charset="0"/>
+              <a:buChar char="•"/>
+            </a:pPr>
+            <a:r>
+              <a:rPr lang="en-US" sz="2400" dirty="0">
+                <a:solidFill>
+                  <a:srgbClr val="C7CEE6"/>
+                </a:solidFill>
+                <a:latin typeface="Calibri" pitchFamily="34" charset="0"/>
+                <a:ea typeface="Calibri" pitchFamily="34" charset="-122"/>
+                <a:cs typeface="Calibri" pitchFamily="34" charset="-120"/>
+              </a:rPr>
+              <a:t>Mendoza </a:t>
+            </a:r>
+            <a:r>
+              <a:rPr lang="en-US" sz="2400" dirty="0" err="1">
+                <a:solidFill>
+                  <a:srgbClr val="C7CEE6"/>
+                </a:solidFill>
+                <a:latin typeface="Calibri" pitchFamily="34" charset="0"/>
+                <a:ea typeface="Calibri" pitchFamily="34" charset="-122"/>
+                <a:cs typeface="Calibri" pitchFamily="34" charset="-120"/>
+              </a:rPr>
+              <a:t>Caspa</a:t>
+            </a:r>
+            <a:r>
+              <a:rPr lang="en-US" sz="2400" dirty="0">
+                <a:solidFill>
+                  <a:srgbClr val="C7CEE6"/>
+                </a:solidFill>
+                <a:latin typeface="Calibri" pitchFamily="34" charset="0"/>
+                <a:ea typeface="Calibri" pitchFamily="34" charset="-122"/>
+                <a:cs typeface="Calibri" pitchFamily="34" charset="-120"/>
+              </a:rPr>
+              <a:t> Ronald </a:t>
+            </a:r>
+          </a:p>
+          <a:p>
+            <a:pPr marL="285750" indent="-285750">
+              <a:buFont typeface="Arial" panose="020B0604020202020204" pitchFamily="34" charset="0"/>
+              <a:buChar char="•"/>
+            </a:pPr>
+            <a:r>
+              <a:rPr lang="en-US" sz="2400" dirty="0">
+                <a:solidFill>
+                  <a:srgbClr val="C7CEE6"/>
+                </a:solidFill>
+                <a:latin typeface="Calibri" pitchFamily="34" charset="0"/>
+                <a:ea typeface="Calibri" pitchFamily="34" charset="-122"/>
+                <a:cs typeface="Calibri" pitchFamily="34" charset="-120"/>
+              </a:rPr>
+              <a:t>Usnayo Velasco Nathalie </a:t>
+            </a:r>
+          </a:p>
+          <a:p>
+            <a:pPr marL="285750" indent="-285750">
+              <a:buFont typeface="Arial" panose="020B0604020202020204" pitchFamily="34" charset="0"/>
+              <a:buChar char="•"/>
+            </a:pPr>
+            <a:r>
+              <a:rPr lang="en-US" sz="2400" dirty="0">
+                <a:solidFill>
+                  <a:srgbClr val="C7CEE6"/>
+                </a:solidFill>
+                <a:latin typeface="Calibri" pitchFamily="34" charset="0"/>
+                <a:ea typeface="Calibri" pitchFamily="34" charset="-122"/>
+                <a:cs typeface="Calibri" pitchFamily="34" charset="-120"/>
+              </a:rPr>
+              <a:t>Zapata Nina Harol</a:t>
+            </a:r>
+            <a:endParaRPr lang="en-US" sz="2400" dirty="0"/>
           </a:p>
         </p:txBody>
       </p:sp>
@@ -2619,7 +2414,7 @@
         </p:nvSpPr>
         <p:spPr>
           <a:xfrm>
-            <a:off x="731520" y="5257800"/>
+            <a:off x="731520" y="5952744"/>
             <a:ext cx="10698480" cy="365760"/>
           </a:xfrm>
           <a:prstGeom prst="rect">
@@ -2632,11 +2427,11 @@
           <a:bodyPr wrap="square" rtlCol="0" anchor="ctr"/>
           <a:lstStyle/>
           <a:p>
-            <a:pPr indent="0" marL="0">
-              <a:buNone/>
-            </a:pPr>
-            <a:r>
-              <a:rPr lang="en-US" sz="1200" b="1" dirty="0">
+            <a:pPr marL="0" indent="0">
+              <a:buNone/>
+            </a:pPr>
+            <a:r>
+              <a:rPr lang="en-US" sz="2400" b="1" dirty="0">
                 <a:solidFill>
                   <a:srgbClr val="FFFFFF"/>
                 </a:solidFill>
@@ -2646,11 +2441,8 @@
               </a:rPr>
               <a:t>Docente:  </a:t>
             </a:r>
-            <a:pPr indent="0" marL="0">
-              <a:buNone/>
-            </a:pPr>
-            <a:r>
-              <a:rPr lang="en-US" sz="1200" dirty="0">
+            <a:r>
+              <a:rPr lang="en-US" sz="2400" dirty="0">
                 <a:solidFill>
                   <a:srgbClr val="C7CEE6"/>
                 </a:solidFill>
@@ -2660,11 +2452,8 @@
               </a:rPr>
               <a:t>Lic. Huayna Magne Andrea Belen      </a:t>
             </a:r>
-            <a:pPr indent="0" marL="0">
-              <a:buNone/>
-            </a:pPr>
-            <a:r>
-              <a:rPr lang="en-US" sz="1200" b="1" dirty="0">
+            <a:r>
+              <a:rPr lang="en-US" sz="2400" b="1" dirty="0">
                 <a:solidFill>
                   <a:srgbClr val="FFFFFF"/>
                 </a:solidFill>
@@ -2674,11 +2463,8 @@
               </a:rPr>
               <a:t>|   Materia:  </a:t>
             </a:r>
-            <a:pPr indent="0" marL="0">
-              <a:buNone/>
-            </a:pPr>
-            <a:r>
-              <a:rPr lang="en-US" sz="1200" dirty="0">
+            <a:r>
+              <a:rPr lang="en-US" sz="2400" dirty="0">
                 <a:solidFill>
                   <a:srgbClr val="C7CEE6"/>
                 </a:solidFill>
@@ -2686,23 +2472,9 @@
                 <a:ea typeface="Calibri" pitchFamily="34" charset="-122"/>
                 <a:cs typeface="Calibri" pitchFamily="34" charset="-120"/>
               </a:rPr>
-              <a:t>Inteligencia Artificial      </a:t>
-            </a:r>
-            <a:pPr indent="0" marL="0">
-              <a:buNone/>
-            </a:pPr>
-            <a:r>
-              <a:rPr lang="en-US" sz="1200" dirty="0">
-                <a:solidFill>
-                  <a:srgbClr val="C7CEE6"/>
-                </a:solidFill>
-                <a:latin typeface="Calibri" pitchFamily="34" charset="0"/>
-                <a:ea typeface="Calibri" pitchFamily="34" charset="-122"/>
-                <a:cs typeface="Calibri" pitchFamily="34" charset="-120"/>
-              </a:rPr>
-              <a:t>|   La Paz, Bolivia — Julio 2026</a:t>
-            </a:r>
-            <a:endParaRPr lang="en-US" sz="1200" dirty="0"/>
+              <a:t>Inteligencia Artificial      |   La Paz, Bolivia — Julio 2026</a:t>
+            </a:r>
+            <a:endParaRPr lang="en-US" sz="2400" dirty="0"/>
           </a:p>
         </p:txBody>
       </p:sp>
@@ -2722,6 +2494,7 @@
         <a:solidFill>
           <a:srgbClr val="0F1B3C"/>
         </a:solidFill>
+        <a:effectLst/>
       </p:bgPr>
     </p:bg>
     <p:spTree>
@@ -2759,11 +2532,11 @@
           <a:bodyPr wrap="square" rtlCol="0" anchor="ctr"/>
           <a:lstStyle/>
           <a:p>
-            <a:pPr indent="0" marL="0">
-              <a:buNone/>
-            </a:pPr>
-            <a:r>
-              <a:rPr lang="en-US" sz="1300" b="1" spc="200" kern="0" dirty="0">
+            <a:pPr marL="0" indent="0">
+              <a:buNone/>
+            </a:pPr>
+            <a:r>
+              <a:rPr lang="en-US" sz="2000" b="1" kern="0" spc="200" dirty="0">
                 <a:solidFill>
                   <a:srgbClr val="5FBDB0"/>
                 </a:solidFill>
@@ -2773,7 +2546,7 @@
               </a:rPr>
               <a:t>05 · ARQUITECTURA DEL SISTEMA</a:t>
             </a:r>
-            <a:endParaRPr lang="en-US" sz="1300" dirty="0"/>
+            <a:endParaRPr lang="en-US" sz="2000" dirty="0"/>
           </a:p>
         </p:txBody>
       </p:sp>
@@ -2798,11 +2571,11 @@
           <a:bodyPr wrap="square" rtlCol="0" anchor="ctr"/>
           <a:lstStyle/>
           <a:p>
-            <a:pPr indent="0" marL="0">
-              <a:buNone/>
-            </a:pPr>
-            <a:r>
-              <a:rPr lang="en-US" sz="2800" b="1" dirty="0">
+            <a:pPr marL="0" indent="0">
+              <a:buNone/>
+            </a:pPr>
+            <a:r>
+              <a:rPr lang="en-US" sz="4400" b="1" dirty="0">
                 <a:solidFill>
                   <a:srgbClr val="FFFFFF"/>
                 </a:solidFill>
@@ -2812,7 +2585,7 @@
               </a:rPr>
               <a:t>Arquitectura modular de DriveSafe AI</a:t>
             </a:r>
-            <a:endParaRPr lang="en-US" sz="2800" dirty="0"/>
+            <a:endParaRPr lang="en-US" sz="4400" dirty="0"/>
           </a:p>
         </p:txBody>
       </p:sp>
@@ -2879,11 +2652,11 @@
           <a:bodyPr wrap="square" rtlCol="0" anchor="ctr"/>
           <a:lstStyle/>
           <a:p>
-            <a:pPr indent="0" marL="0">
-              <a:buNone/>
-            </a:pPr>
-            <a:r>
-              <a:rPr lang="en-US" sz="1550" b="1" dirty="0">
+            <a:pPr marL="0" indent="0">
+              <a:buNone/>
+            </a:pPr>
+            <a:r>
+              <a:rPr lang="en-US" sz="2400" b="1" dirty="0">
                 <a:solidFill>
                   <a:srgbClr val="FFFFFF"/>
                 </a:solidFill>
@@ -2893,7 +2666,7 @@
               </a:rPr>
               <a:t>Frontend Web</a:t>
             </a:r>
-            <a:endParaRPr lang="en-US" sz="1550" dirty="0"/>
+            <a:endParaRPr lang="en-US" sz="2400" dirty="0"/>
           </a:p>
         </p:txBody>
       </p:sp>
@@ -2918,11 +2691,11 @@
           <a:bodyPr wrap="square" rtlCol="0" anchor="ctr"/>
           <a:lstStyle/>
           <a:p>
-            <a:pPr indent="0" marL="0">
-              <a:buNone/>
-            </a:pPr>
-            <a:r>
-              <a:rPr lang="en-US" sz="1000" dirty="0">
+            <a:pPr marL="0" indent="0">
+              <a:buNone/>
+            </a:pPr>
+            <a:r>
+              <a:rPr lang="en-US" sz="1400" dirty="0">
                 <a:solidFill>
                   <a:srgbClr val="1C7293"/>
                 </a:solidFill>
@@ -2932,7 +2705,7 @@
               </a:rPr>
               <a:t>PHP · HTML · CSS · JS</a:t>
             </a:r>
-            <a:endParaRPr lang="en-US" sz="1000" dirty="0"/>
+            <a:endParaRPr lang="en-US" sz="1400" dirty="0"/>
           </a:p>
         </p:txBody>
       </p:sp>
@@ -2957,11 +2730,11 @@
           <a:bodyPr wrap="square" rtlCol="0" anchor="ctr"/>
           <a:lstStyle/>
           <a:p>
-            <a:pPr indent="0" marL="0">
-              <a:buNone/>
-            </a:pPr>
-            <a:r>
-              <a:rPr lang="en-US" sz="1100" dirty="0">
+            <a:pPr marL="0" indent="0">
+              <a:buNone/>
+            </a:pPr>
+            <a:r>
+              <a:rPr lang="en-US" dirty="0">
                 <a:solidFill>
                   <a:srgbClr val="C7CEE6"/>
                 </a:solidFill>
@@ -2971,7 +2744,7 @@
               </a:rPr>
               <a:t>Captura de cámara y GPS; interacción con el usuario</a:t>
             </a:r>
-            <a:endParaRPr lang="en-US" sz="1100" dirty="0"/>
+            <a:endParaRPr lang="en-US" dirty="0"/>
           </a:p>
         </p:txBody>
       </p:sp>
@@ -3038,11 +2811,11 @@
           <a:bodyPr wrap="square" rtlCol="0" anchor="ctr"/>
           <a:lstStyle/>
           <a:p>
-            <a:pPr indent="0" marL="0">
-              <a:buNone/>
-            </a:pPr>
-            <a:r>
-              <a:rPr lang="en-US" sz="1550" b="1" dirty="0">
+            <a:pPr marL="0" indent="0">
+              <a:buNone/>
+            </a:pPr>
+            <a:r>
+              <a:rPr lang="en-US" sz="2400" b="1" dirty="0">
                 <a:solidFill>
                   <a:srgbClr val="FFFFFF"/>
                 </a:solidFill>
@@ -3052,7 +2825,7 @@
               </a:rPr>
               <a:t>Backend PHP</a:t>
             </a:r>
-            <a:endParaRPr lang="en-US" sz="1550" dirty="0"/>
+            <a:endParaRPr lang="en-US" sz="2400" dirty="0"/>
           </a:p>
         </p:txBody>
       </p:sp>
@@ -3077,11 +2850,11 @@
           <a:bodyPr wrap="square" rtlCol="0" anchor="ctr"/>
           <a:lstStyle/>
           <a:p>
-            <a:pPr indent="0" marL="0">
-              <a:buNone/>
-            </a:pPr>
-            <a:r>
-              <a:rPr lang="en-US" sz="1000" dirty="0">
+            <a:pPr marL="0" indent="0">
+              <a:buNone/>
+            </a:pPr>
+            <a:r>
+              <a:rPr lang="en-US" sz="1400" dirty="0">
                 <a:solidFill>
                   <a:srgbClr val="5FBDB0"/>
                 </a:solidFill>
@@ -3091,7 +2864,7 @@
               </a:rPr>
               <a:t>api_alerts.php · ml_admin.php</a:t>
             </a:r>
-            <a:endParaRPr lang="en-US" sz="1000" dirty="0"/>
+            <a:endParaRPr lang="en-US" sz="1400" dirty="0"/>
           </a:p>
         </p:txBody>
       </p:sp>
@@ -3116,11 +2889,11 @@
           <a:bodyPr wrap="square" rtlCol="0" anchor="ctr"/>
           <a:lstStyle/>
           <a:p>
-            <a:pPr indent="0" marL="0">
-              <a:buNone/>
-            </a:pPr>
-            <a:r>
-              <a:rPr lang="en-US" sz="1100" dirty="0">
+            <a:pPr marL="0" indent="0">
+              <a:buNone/>
+            </a:pPr>
+            <a:r>
+              <a:rPr lang="en-US" dirty="0">
                 <a:solidFill>
                   <a:srgbClr val="C7CEE6"/>
                 </a:solidFill>
@@ -3130,7 +2903,7 @@
               </a:rPr>
               <a:t>Procesa solicitudes, usuarios, rutas y alertas</a:t>
             </a:r>
-            <a:endParaRPr lang="en-US" sz="1100" dirty="0"/>
+            <a:endParaRPr lang="en-US" dirty="0"/>
           </a:p>
         </p:txBody>
       </p:sp>
@@ -3197,11 +2970,11 @@
           <a:bodyPr wrap="square" rtlCol="0" anchor="ctr"/>
           <a:lstStyle/>
           <a:p>
-            <a:pPr indent="0" marL="0">
-              <a:buNone/>
-            </a:pPr>
-            <a:r>
-              <a:rPr lang="en-US" sz="1550" b="1" dirty="0">
+            <a:pPr marL="0" indent="0">
+              <a:buNone/>
+            </a:pPr>
+            <a:r>
+              <a:rPr lang="en-US" sz="2400" b="1" dirty="0">
                 <a:solidFill>
                   <a:srgbClr val="FFFFFF"/>
                 </a:solidFill>
@@ -3211,7 +2984,7 @@
               </a:rPr>
               <a:t>Servicio de IA</a:t>
             </a:r>
-            <a:endParaRPr lang="en-US" sz="1550" dirty="0"/>
+            <a:endParaRPr lang="en-US" sz="2400" dirty="0"/>
           </a:p>
         </p:txBody>
       </p:sp>
@@ -3236,11 +3009,11 @@
           <a:bodyPr wrap="square" rtlCol="0" anchor="ctr"/>
           <a:lstStyle/>
           <a:p>
-            <a:pPr indent="0" marL="0">
-              <a:buNone/>
-            </a:pPr>
-            <a:r>
-              <a:rPr lang="en-US" sz="1000" dirty="0">
+            <a:pPr marL="0" indent="0">
+              <a:buNone/>
+            </a:pPr>
+            <a:r>
+              <a:rPr lang="en-US" sz="1400" dirty="0">
                 <a:solidFill>
                   <a:srgbClr val="F2A541"/>
                 </a:solidFill>
@@ -3250,7 +3023,7 @@
               </a:rPr>
               <a:t>FastAPI · Scikit-Learn</a:t>
             </a:r>
-            <a:endParaRPr lang="en-US" sz="1000" dirty="0"/>
+            <a:endParaRPr lang="en-US" sz="1400" dirty="0"/>
           </a:p>
         </p:txBody>
       </p:sp>
@@ -3275,11 +3048,11 @@
           <a:bodyPr wrap="square" rtlCol="0" anchor="ctr"/>
           <a:lstStyle/>
           <a:p>
-            <a:pPr indent="0" marL="0">
-              <a:buNone/>
-            </a:pPr>
-            <a:r>
-              <a:rPr lang="en-US" sz="1100" dirty="0">
+            <a:pPr marL="0" indent="0">
+              <a:buNone/>
+            </a:pPr>
+            <a:r>
+              <a:rPr lang="en-US" dirty="0">
                 <a:solidFill>
                   <a:srgbClr val="C7CEE6"/>
                 </a:solidFill>
@@ -3289,7 +3062,7 @@
               </a:rPr>
               <a:t>Predice el nivel de fatiga con Random Forest</a:t>
             </a:r>
-            <a:endParaRPr lang="en-US" sz="1100" dirty="0"/>
+            <a:endParaRPr lang="en-US" dirty="0"/>
           </a:p>
         </p:txBody>
       </p:sp>
@@ -3356,11 +3129,11 @@
           <a:bodyPr wrap="square" rtlCol="0" anchor="ctr"/>
           <a:lstStyle/>
           <a:p>
-            <a:pPr indent="0" marL="0">
-              <a:buNone/>
-            </a:pPr>
-            <a:r>
-              <a:rPr lang="en-US" sz="1550" b="1" dirty="0">
+            <a:pPr marL="0" indent="0">
+              <a:buNone/>
+            </a:pPr>
+            <a:r>
+              <a:rPr lang="en-US" sz="2400" b="1" dirty="0">
                 <a:solidFill>
                   <a:srgbClr val="FFFFFF"/>
                 </a:solidFill>
@@ -3370,7 +3143,7 @@
               </a:rPr>
               <a:t>Base de Datos</a:t>
             </a:r>
-            <a:endParaRPr lang="en-US" sz="1550" dirty="0"/>
+            <a:endParaRPr lang="en-US" sz="2400" dirty="0"/>
           </a:p>
         </p:txBody>
       </p:sp>
@@ -3395,11 +3168,11 @@
           <a:bodyPr wrap="square" rtlCol="0" anchor="ctr"/>
           <a:lstStyle/>
           <a:p>
-            <a:pPr indent="0" marL="0">
-              <a:buNone/>
-            </a:pPr>
-            <a:r>
-              <a:rPr lang="en-US" sz="1000" dirty="0">
+            <a:pPr marL="0" indent="0">
+              <a:buNone/>
+            </a:pPr>
+            <a:r>
+              <a:rPr lang="en-US" sz="1400" dirty="0">
                 <a:solidFill>
                   <a:srgbClr val="E8505B"/>
                 </a:solidFill>
@@ -3409,7 +3182,7 @@
               </a:rPr>
               <a:t>MySQL</a:t>
             </a:r>
-            <a:endParaRPr lang="en-US" sz="1000" dirty="0"/>
+            <a:endParaRPr lang="en-US" sz="1400" dirty="0"/>
           </a:p>
         </p:txBody>
       </p:sp>
@@ -3434,11 +3207,11 @@
           <a:bodyPr wrap="square" rtlCol="0" anchor="ctr"/>
           <a:lstStyle/>
           <a:p>
-            <a:pPr indent="0" marL="0">
-              <a:buNone/>
-            </a:pPr>
-            <a:r>
-              <a:rPr lang="en-US" sz="1100" dirty="0">
+            <a:pPr marL="0" indent="0">
+              <a:buNone/>
+            </a:pPr>
+            <a:r>
+              <a:rPr lang="en-US" dirty="0">
                 <a:solidFill>
                   <a:srgbClr val="C7CEE6"/>
                 </a:solidFill>
@@ -3448,7 +3221,7 @@
               </a:rPr>
               <a:t>Usuarios, vehículos, rutas, alertas y ml_samples</a:t>
             </a:r>
-            <a:endParaRPr lang="en-US" sz="1100" dirty="0"/>
+            <a:endParaRPr lang="en-US" dirty="0"/>
           </a:p>
         </p:txBody>
       </p:sp>
@@ -3473,11 +3246,11 @@
           <a:bodyPr wrap="square" rtlCol="0" anchor="ctr"/>
           <a:lstStyle/>
           <a:p>
-            <a:pPr indent="0" marL="0">
-              <a:buNone/>
-            </a:pPr>
-            <a:r>
-              <a:rPr lang="en-US" sz="1200" i="1" dirty="0">
+            <a:pPr marL="0" indent="0">
+              <a:buNone/>
+            </a:pPr>
+            <a:r>
+              <a:rPr lang="en-US" sz="2000" i="1" dirty="0">
                 <a:solidFill>
                   <a:srgbClr val="9AA5C4"/>
                 </a:solidFill>
@@ -3487,7 +3260,7 @@
               </a:rPr>
               <a:t>Flujo: el navegador captura las características faciales → el backend consulta el servicio de IA → el resultado se guarda en la base de datos y se muestra al usuario.</a:t>
             </a:r>
-            <a:endParaRPr lang="en-US" sz="1200" dirty="0"/>
+            <a:endParaRPr lang="en-US" sz="2000" dirty="0"/>
           </a:p>
         </p:txBody>
       </p:sp>
@@ -3512,11 +3285,11 @@
           <a:bodyPr wrap="square" rtlCol="0" anchor="ctr"/>
           <a:lstStyle/>
           <a:p>
-            <a:pPr indent="0" marL="0">
-              <a:buNone/>
-            </a:pPr>
-            <a:r>
-              <a:rPr lang="en-US" sz="900" dirty="0">
+            <a:pPr marL="0" indent="0">
+              <a:buNone/>
+            </a:pPr>
+            <a:r>
+              <a:rPr lang="en-US" sz="1200" dirty="0">
                 <a:solidFill>
                   <a:srgbClr val="9AA5C4"/>
                 </a:solidFill>
@@ -3526,7 +3299,7 @@
               </a:rPr>
               <a:t>DriveSafe AI  |  Detección de somnolencia con Machine Learning</a:t>
             </a:r>
-            <a:endParaRPr lang="en-US" sz="900" dirty="0"/>
+            <a:endParaRPr lang="en-US" sz="1200" dirty="0"/>
           </a:p>
         </p:txBody>
       </p:sp>
@@ -3551,11 +3324,11 @@
           <a:bodyPr wrap="square" rtlCol="0" anchor="ctr"/>
           <a:lstStyle/>
           <a:p>
-            <a:pPr algn="r" indent="0" marL="0">
-              <a:buNone/>
-            </a:pPr>
-            <a:r>
-              <a:rPr lang="en-US" sz="900" dirty="0">
+            <a:pPr marL="0" indent="0" algn="r">
+              <a:buNone/>
+            </a:pPr>
+            <a:r>
+              <a:rPr lang="en-US" sz="1200" dirty="0">
                 <a:solidFill>
                   <a:srgbClr val="9AA5C4"/>
                 </a:solidFill>
@@ -3565,7 +3338,7 @@
               </a:rPr>
               <a:t>10</a:t>
             </a:r>
-            <a:endParaRPr lang="en-US" sz="900" dirty="0"/>
+            <a:endParaRPr lang="en-US" sz="1200" dirty="0"/>
           </a:p>
         </p:txBody>
       </p:sp>
@@ -3585,6 +3358,7 @@
         <a:solidFill>
           <a:srgbClr val="FFFFFF"/>
         </a:solidFill>
+        <a:effectLst/>
       </p:bgPr>
     </p:bg>
     <p:spTree>
@@ -3622,11 +3396,11 @@
           <a:bodyPr wrap="square" rtlCol="0" anchor="ctr"/>
           <a:lstStyle/>
           <a:p>
-            <a:pPr indent="0" marL="0">
-              <a:buNone/>
-            </a:pPr>
-            <a:r>
-              <a:rPr lang="en-US" sz="1300" b="1" spc="200" kern="0" dirty="0">
+            <a:pPr marL="0" indent="0">
+              <a:buNone/>
+            </a:pPr>
+            <a:r>
+              <a:rPr lang="en-US" sz="2000" b="1" kern="0" spc="200" dirty="0">
                 <a:solidFill>
                   <a:srgbClr val="1C7293"/>
                 </a:solidFill>
@@ -3636,7 +3410,7 @@
               </a:rPr>
               <a:t>05 · ARQUITECTURA DEL SISTEMA</a:t>
             </a:r>
-            <a:endParaRPr lang="en-US" sz="1300" dirty="0"/>
+            <a:endParaRPr lang="en-US" sz="2000" dirty="0"/>
           </a:p>
         </p:txBody>
       </p:sp>
@@ -3661,11 +3435,11 @@
           <a:bodyPr wrap="square" rtlCol="0" anchor="ctr"/>
           <a:lstStyle/>
           <a:p>
-            <a:pPr indent="0" marL="0">
-              <a:buNone/>
-            </a:pPr>
-            <a:r>
-              <a:rPr lang="en-US" sz="3000" b="1" dirty="0">
+            <a:pPr marL="0" indent="0">
+              <a:buNone/>
+            </a:pPr>
+            <a:r>
+              <a:rPr lang="en-US" sz="4400" b="1" dirty="0">
                 <a:solidFill>
                   <a:srgbClr val="1A2238"/>
                 </a:solidFill>
@@ -3675,7 +3449,7 @@
               </a:rPr>
               <a:t>Modelo de base de datos</a:t>
             </a:r>
-            <a:endParaRPr lang="en-US" sz="3000" dirty="0"/>
+            <a:endParaRPr lang="en-US" sz="4400" dirty="0"/>
           </a:p>
         </p:txBody>
       </p:sp>
@@ -3700,11 +3474,11 @@
           <a:bodyPr wrap="square" rtlCol="0" anchor="ctr"/>
           <a:lstStyle/>
           <a:p>
-            <a:pPr indent="0" marL="0">
-              <a:buNone/>
-            </a:pPr>
-            <a:r>
-              <a:rPr lang="en-US" sz="1250" dirty="0">
+            <a:pPr marL="0" indent="0">
+              <a:buNone/>
+            </a:pPr>
+            <a:r>
+              <a:rPr lang="en-US" sz="2000" dirty="0">
                 <a:solidFill>
                   <a:srgbClr val="6B7280"/>
                 </a:solidFill>
@@ -3714,7 +3488,7 @@
               </a:rPr>
               <a:t>Entidades principales: usuarios, conductores, vehículos, viajes, posiciones_ruta, alertas y ml_samples.</a:t>
             </a:r>
-            <a:endParaRPr lang="en-US" sz="1250" dirty="0"/>
+            <a:endParaRPr lang="en-US" sz="2000" dirty="0"/>
           </a:p>
         </p:txBody>
       </p:sp>
@@ -3742,14 +3516,14 @@
       </p:sp>
       <p:pic>
         <p:nvPicPr>
-          <p:cNvPr id="6" name="Image 0" descr="media/db_diagram.png">    </p:cNvPr>
+          <p:cNvPr id="6" name="Image 0" descr="media/db_diagram.png"/>
           <p:cNvPicPr>
             <a:picLocks noChangeAspect="1"/>
           </p:cNvPicPr>
           <p:nvPr/>
         </p:nvPicPr>
         <p:blipFill>
-          <a:blip r:embed="rId1"/>
+          <a:blip r:embed="rId3"/>
           <a:stretch>
             <a:fillRect/>
           </a:stretch>
@@ -3785,11 +3559,11 @@
           <a:bodyPr wrap="square" rtlCol="0" anchor="ctr"/>
           <a:lstStyle/>
           <a:p>
-            <a:pPr indent="0" marL="0">
-              <a:buNone/>
-            </a:pPr>
-            <a:r>
-              <a:rPr lang="en-US" sz="900" dirty="0">
+            <a:pPr marL="0" indent="0">
+              <a:buNone/>
+            </a:pPr>
+            <a:r>
+              <a:rPr lang="en-US" sz="1200" dirty="0">
                 <a:solidFill>
                   <a:srgbClr val="6B7280"/>
                 </a:solidFill>
@@ -3799,7 +3573,7 @@
               </a:rPr>
               <a:t>DriveSafe AI  |  Detección de somnolencia con Machine Learning</a:t>
             </a:r>
-            <a:endParaRPr lang="en-US" sz="900" dirty="0"/>
+            <a:endParaRPr lang="en-US" sz="1200" dirty="0"/>
           </a:p>
         </p:txBody>
       </p:sp>
@@ -3824,11 +3598,11 @@
           <a:bodyPr wrap="square" rtlCol="0" anchor="ctr"/>
           <a:lstStyle/>
           <a:p>
-            <a:pPr algn="r" indent="0" marL="0">
-              <a:buNone/>
-            </a:pPr>
-            <a:r>
-              <a:rPr lang="en-US" sz="900" dirty="0">
+            <a:pPr marL="0" indent="0" algn="r">
+              <a:buNone/>
+            </a:pPr>
+            <a:r>
+              <a:rPr lang="en-US" sz="1200" dirty="0">
                 <a:solidFill>
                   <a:srgbClr val="6B7280"/>
                 </a:solidFill>
@@ -3838,7 +3612,7 @@
               </a:rPr>
               <a:t>11</a:t>
             </a:r>
-            <a:endParaRPr lang="en-US" sz="900" dirty="0"/>
+            <a:endParaRPr lang="en-US" sz="1200" dirty="0"/>
           </a:p>
         </p:txBody>
       </p:sp>
@@ -3858,6 +3632,7 @@
         <a:solidFill>
           <a:srgbClr val="FFFFFF"/>
         </a:solidFill>
+        <a:effectLst/>
       </p:bgPr>
     </p:bg>
     <p:spTree>
@@ -3895,11 +3670,11 @@
           <a:bodyPr wrap="square" rtlCol="0" anchor="ctr"/>
           <a:lstStyle/>
           <a:p>
-            <a:pPr indent="0" marL="0">
-              <a:buNone/>
-            </a:pPr>
-            <a:r>
-              <a:rPr lang="en-US" sz="1300" b="1" spc="200" kern="0" dirty="0">
+            <a:pPr marL="0" indent="0">
+              <a:buNone/>
+            </a:pPr>
+            <a:r>
+              <a:rPr lang="en-US" sz="2000" b="1" kern="0" spc="200" dirty="0">
                 <a:solidFill>
                   <a:srgbClr val="1C7293"/>
                 </a:solidFill>
@@ -3909,7 +3684,7 @@
               </a:rPr>
               <a:t>05 · ARQUITECTURA DEL SISTEMA</a:t>
             </a:r>
-            <a:endParaRPr lang="en-US" sz="1300" dirty="0"/>
+            <a:endParaRPr lang="en-US" sz="2000" dirty="0"/>
           </a:p>
         </p:txBody>
       </p:sp>
@@ -3934,11 +3709,11 @@
           <a:bodyPr wrap="square" rtlCol="0" anchor="ctr"/>
           <a:lstStyle/>
           <a:p>
-            <a:pPr indent="0" marL="0">
-              <a:buNone/>
-            </a:pPr>
-            <a:r>
-              <a:rPr lang="en-US" sz="3000" b="1" dirty="0">
+            <a:pPr marL="0" indent="0">
+              <a:buNone/>
+            </a:pPr>
+            <a:r>
+              <a:rPr lang="en-US" sz="4400" b="1" dirty="0">
                 <a:solidFill>
                   <a:srgbClr val="1A2238"/>
                 </a:solidFill>
@@ -3948,7 +3723,7 @@
               </a:rPr>
               <a:t>Diagrama de componentes</a:t>
             </a:r>
-            <a:endParaRPr lang="en-US" sz="3000" dirty="0"/>
+            <a:endParaRPr lang="en-US" sz="4400" dirty="0"/>
           </a:p>
         </p:txBody>
       </p:sp>
@@ -3973,11 +3748,11 @@
           <a:bodyPr wrap="square" rtlCol="0" anchor="ctr"/>
           <a:lstStyle/>
           <a:p>
-            <a:pPr indent="0" marL="0">
-              <a:buNone/>
-            </a:pPr>
-            <a:r>
-              <a:rPr lang="en-US" sz="1250" dirty="0">
+            <a:pPr marL="0" indent="0">
+              <a:buNone/>
+            </a:pPr>
+            <a:r>
+              <a:rPr lang="en-US" sz="2000" dirty="0">
                 <a:solidFill>
                   <a:srgbClr val="6B7280"/>
                 </a:solidFill>
@@ -3987,7 +3762,7 @@
               </a:rPr>
               <a:t>Cuatro componentes interactúan en tiempo real para el monitoreo del conductor.</a:t>
             </a:r>
-            <a:endParaRPr lang="en-US" sz="1250" dirty="0"/>
+            <a:endParaRPr lang="en-US" sz="2000" dirty="0"/>
           </a:p>
         </p:txBody>
       </p:sp>
@@ -4015,14 +3790,14 @@
       </p:sp>
       <p:pic>
         <p:nvPicPr>
-          <p:cNvPr id="6" name="Image 0" descr="media/componentes.png">    </p:cNvPr>
+          <p:cNvPr id="6" name="Image 0" descr="media/componentes.png"/>
           <p:cNvPicPr>
             <a:picLocks noChangeAspect="1"/>
           </p:cNvPicPr>
           <p:nvPr/>
         </p:nvPicPr>
         <p:blipFill>
-          <a:blip r:embed="rId1"/>
+          <a:blip r:embed="rId3"/>
           <a:stretch>
             <a:fillRect/>
           </a:stretch>
@@ -4058,11 +3833,11 @@
           <a:bodyPr wrap="square" rtlCol="0" anchor="ctr"/>
           <a:lstStyle/>
           <a:p>
-            <a:pPr indent="0" marL="0">
-              <a:buNone/>
-            </a:pPr>
-            <a:r>
-              <a:rPr lang="en-US" sz="900" dirty="0">
+            <a:pPr marL="0" indent="0">
+              <a:buNone/>
+            </a:pPr>
+            <a:r>
+              <a:rPr lang="en-US" sz="1200" dirty="0">
                 <a:solidFill>
                   <a:srgbClr val="6B7280"/>
                 </a:solidFill>
@@ -4072,7 +3847,7 @@
               </a:rPr>
               <a:t>DriveSafe AI  |  Detección de somnolencia con Machine Learning</a:t>
             </a:r>
-            <a:endParaRPr lang="en-US" sz="900" dirty="0"/>
+            <a:endParaRPr lang="en-US" sz="1200" dirty="0"/>
           </a:p>
         </p:txBody>
       </p:sp>
@@ -4097,11 +3872,11 @@
           <a:bodyPr wrap="square" rtlCol="0" anchor="ctr"/>
           <a:lstStyle/>
           <a:p>
-            <a:pPr algn="r" indent="0" marL="0">
-              <a:buNone/>
-            </a:pPr>
-            <a:r>
-              <a:rPr lang="en-US" sz="900" dirty="0">
+            <a:pPr marL="0" indent="0" algn="r">
+              <a:buNone/>
+            </a:pPr>
+            <a:r>
+              <a:rPr lang="en-US" sz="1200" dirty="0">
                 <a:solidFill>
                   <a:srgbClr val="6B7280"/>
                 </a:solidFill>
@@ -4111,7 +3886,7 @@
               </a:rPr>
               <a:t>12</a:t>
             </a:r>
-            <a:endParaRPr lang="en-US" sz="900" dirty="0"/>
+            <a:endParaRPr lang="en-US" sz="1200" dirty="0"/>
           </a:p>
         </p:txBody>
       </p:sp>
@@ -4131,6 +3906,7 @@
         <a:solidFill>
           <a:srgbClr val="FFFFFF"/>
         </a:solidFill>
+        <a:effectLst/>
       </p:bgPr>
     </p:bg>
     <p:spTree>
@@ -4168,11 +3944,11 @@
           <a:bodyPr wrap="square" rtlCol="0" anchor="ctr"/>
           <a:lstStyle/>
           <a:p>
-            <a:pPr indent="0" marL="0">
-              <a:buNone/>
-            </a:pPr>
-            <a:r>
-              <a:rPr lang="en-US" sz="1300" b="1" spc="200" kern="0" dirty="0">
+            <a:pPr marL="0" indent="0">
+              <a:buNone/>
+            </a:pPr>
+            <a:r>
+              <a:rPr lang="en-US" sz="1300" b="1" kern="0" spc="200" dirty="0">
                 <a:solidFill>
                   <a:srgbClr val="1C7293"/>
                 </a:solidFill>
@@ -4207,11 +3983,11 @@
           <a:bodyPr wrap="square" rtlCol="0" anchor="ctr"/>
           <a:lstStyle/>
           <a:p>
-            <a:pPr indent="0" marL="0">
-              <a:buNone/>
-            </a:pPr>
-            <a:r>
-              <a:rPr lang="en-US" sz="3000" b="1" dirty="0">
+            <a:pPr marL="0" indent="0">
+              <a:buNone/>
+            </a:pPr>
+            <a:r>
+              <a:rPr lang="en-US" sz="4400" b="1" dirty="0">
                 <a:solidFill>
                   <a:srgbClr val="1A2238"/>
                 </a:solidFill>
@@ -4221,7 +3997,7 @@
               </a:rPr>
               <a:t>Actores y casos de uso</a:t>
             </a:r>
-            <a:endParaRPr lang="en-US" sz="3000" dirty="0"/>
+            <a:endParaRPr lang="en-US" sz="4400" dirty="0"/>
           </a:p>
         </p:txBody>
       </p:sp>
@@ -4288,11 +4064,11 @@
           <a:bodyPr wrap="square" rtlCol="0" anchor="ctr"/>
           <a:lstStyle/>
           <a:p>
-            <a:pPr indent="0" marL="0">
-              <a:buNone/>
-            </a:pPr>
-            <a:r>
-              <a:rPr lang="en-US" sz="1500" b="1" dirty="0">
+            <a:pPr marL="0" indent="0">
+              <a:buNone/>
+            </a:pPr>
+            <a:r>
+              <a:rPr lang="en-US" sz="2400" b="1" dirty="0">
                 <a:solidFill>
                   <a:srgbClr val="1A2238"/>
                 </a:solidFill>
@@ -4302,7 +4078,7 @@
               </a:rPr>
               <a:t>Administrador</a:t>
             </a:r>
-            <a:endParaRPr lang="en-US" sz="1500" dirty="0"/>
+            <a:endParaRPr lang="en-US" sz="2400" dirty="0"/>
           </a:p>
         </p:txBody>
       </p:sp>
@@ -4327,11 +4103,11 @@
           <a:bodyPr wrap="square" rtlCol="0" anchor="ctr"/>
           <a:lstStyle/>
           <a:p>
-            <a:pPr indent="0" marL="0">
-              <a:buNone/>
-            </a:pPr>
-            <a:r>
-              <a:rPr lang="en-US" sz="1100" dirty="0">
+            <a:pPr marL="0" indent="0">
+              <a:buNone/>
+            </a:pPr>
+            <a:r>
+              <a:rPr lang="en-US" dirty="0">
                 <a:solidFill>
                   <a:srgbClr val="6B7280"/>
                 </a:solidFill>
@@ -4341,7 +4117,7 @@
               </a:rPr>
               <a:t>•  Gestionar usuarios, conductores y vehículos</a:t>
             </a:r>
-            <a:endParaRPr lang="en-US" sz="1100" dirty="0"/>
+            <a:endParaRPr lang="en-US" dirty="0"/>
           </a:p>
         </p:txBody>
       </p:sp>
@@ -4366,11 +4142,11 @@
           <a:bodyPr wrap="square" rtlCol="0" anchor="ctr"/>
           <a:lstStyle/>
           <a:p>
-            <a:pPr indent="0" marL="0">
-              <a:buNone/>
-            </a:pPr>
-            <a:r>
-              <a:rPr lang="en-US" sz="1100" dirty="0">
+            <a:pPr marL="0" indent="0">
+              <a:buNone/>
+            </a:pPr>
+            <a:r>
+              <a:rPr lang="en-US" dirty="0">
                 <a:solidFill>
                   <a:srgbClr val="6B7280"/>
                 </a:solidFill>
@@ -4380,7 +4156,7 @@
               </a:rPr>
               <a:t>•  Programar rutas y visualizar alertas</a:t>
             </a:r>
-            <a:endParaRPr lang="en-US" sz="1100" dirty="0"/>
+            <a:endParaRPr lang="en-US" dirty="0"/>
           </a:p>
         </p:txBody>
       </p:sp>
@@ -4405,11 +4181,11 @@
           <a:bodyPr wrap="square" rtlCol="0" anchor="ctr"/>
           <a:lstStyle/>
           <a:p>
-            <a:pPr indent="0" marL="0">
-              <a:buNone/>
-            </a:pPr>
-            <a:r>
-              <a:rPr lang="en-US" sz="1100" dirty="0">
+            <a:pPr marL="0" indent="0">
+              <a:buNone/>
+            </a:pPr>
+            <a:r>
+              <a:rPr lang="en-US" dirty="0">
                 <a:solidFill>
                   <a:srgbClr val="6B7280"/>
                 </a:solidFill>
@@ -4419,7 +4195,7 @@
               </a:rPr>
               <a:t>•  Reentrenar el modelo de ML</a:t>
             </a:r>
-            <a:endParaRPr lang="en-US" sz="1100" dirty="0"/>
+            <a:endParaRPr lang="en-US" dirty="0"/>
           </a:p>
         </p:txBody>
       </p:sp>
@@ -4486,11 +4262,11 @@
           <a:bodyPr wrap="square" rtlCol="0" anchor="ctr"/>
           <a:lstStyle/>
           <a:p>
-            <a:pPr indent="0" marL="0">
-              <a:buNone/>
-            </a:pPr>
-            <a:r>
-              <a:rPr lang="en-US" sz="1500" b="1" dirty="0">
+            <a:pPr marL="0" indent="0">
+              <a:buNone/>
+            </a:pPr>
+            <a:r>
+              <a:rPr lang="en-US" sz="2400" b="1" dirty="0">
                 <a:solidFill>
                   <a:srgbClr val="1A2238"/>
                 </a:solidFill>
@@ -4500,7 +4276,7 @@
               </a:rPr>
               <a:t>Supervisor</a:t>
             </a:r>
-            <a:endParaRPr lang="en-US" sz="1500" dirty="0"/>
+            <a:endParaRPr lang="en-US" sz="2400" dirty="0"/>
           </a:p>
         </p:txBody>
       </p:sp>
@@ -4525,11 +4301,11 @@
           <a:bodyPr wrap="square" rtlCol="0" anchor="ctr"/>
           <a:lstStyle/>
           <a:p>
-            <a:pPr indent="0" marL="0">
-              <a:buNone/>
-            </a:pPr>
-            <a:r>
-              <a:rPr lang="en-US" sz="1100" dirty="0">
+            <a:pPr marL="0" indent="0">
+              <a:buNone/>
+            </a:pPr>
+            <a:r>
+              <a:rPr lang="en-US" dirty="0">
                 <a:solidFill>
                   <a:srgbClr val="6B7280"/>
                 </a:solidFill>
@@ -4539,7 +4315,7 @@
               </a:rPr>
               <a:t>•  Monitorear rutas activas</a:t>
             </a:r>
-            <a:endParaRPr lang="en-US" sz="1100" dirty="0"/>
+            <a:endParaRPr lang="en-US" dirty="0"/>
           </a:p>
         </p:txBody>
       </p:sp>
@@ -4564,11 +4340,11 @@
           <a:bodyPr wrap="square" rtlCol="0" anchor="ctr"/>
           <a:lstStyle/>
           <a:p>
-            <a:pPr indent="0" marL="0">
-              <a:buNone/>
-            </a:pPr>
-            <a:r>
-              <a:rPr lang="en-US" sz="1100" dirty="0">
+            <a:pPr marL="0" indent="0">
+              <a:buNone/>
+            </a:pPr>
+            <a:r>
+              <a:rPr lang="en-US" dirty="0">
                 <a:solidFill>
                   <a:srgbClr val="6B7280"/>
                 </a:solidFill>
@@ -4578,7 +4354,7 @@
               </a:rPr>
               <a:t>•  Consultar ubicación GPS</a:t>
             </a:r>
-            <a:endParaRPr lang="en-US" sz="1100" dirty="0"/>
+            <a:endParaRPr lang="en-US" dirty="0"/>
           </a:p>
         </p:txBody>
       </p:sp>
@@ -4603,11 +4379,11 @@
           <a:bodyPr wrap="square" rtlCol="0" anchor="ctr"/>
           <a:lstStyle/>
           <a:p>
-            <a:pPr indent="0" marL="0">
-              <a:buNone/>
-            </a:pPr>
-            <a:r>
-              <a:rPr lang="en-US" sz="1100" dirty="0">
+            <a:pPr marL="0" indent="0">
+              <a:buNone/>
+            </a:pPr>
+            <a:r>
+              <a:rPr lang="en-US" dirty="0">
                 <a:solidFill>
                   <a:srgbClr val="6B7280"/>
                 </a:solidFill>
@@ -4617,7 +4393,7 @@
               </a:rPr>
               <a:t>•  Revisar incidentes reportados</a:t>
             </a:r>
-            <a:endParaRPr lang="en-US" sz="1100" dirty="0"/>
+            <a:endParaRPr lang="en-US" dirty="0"/>
           </a:p>
         </p:txBody>
       </p:sp>
@@ -4684,11 +4460,11 @@
           <a:bodyPr wrap="square" rtlCol="0" anchor="ctr"/>
           <a:lstStyle/>
           <a:p>
-            <a:pPr indent="0" marL="0">
-              <a:buNone/>
-            </a:pPr>
-            <a:r>
-              <a:rPr lang="en-US" sz="1500" b="1" dirty="0">
+            <a:pPr marL="0" indent="0">
+              <a:buNone/>
+            </a:pPr>
+            <a:r>
+              <a:rPr lang="en-US" sz="2400" b="1" dirty="0">
                 <a:solidFill>
                   <a:srgbClr val="1A2238"/>
                 </a:solidFill>
@@ -4698,7 +4474,7 @@
               </a:rPr>
               <a:t>Conductor</a:t>
             </a:r>
-            <a:endParaRPr lang="en-US" sz="1500" dirty="0"/>
+            <a:endParaRPr lang="en-US" sz="2400" dirty="0"/>
           </a:p>
         </p:txBody>
       </p:sp>
@@ -4723,11 +4499,11 @@
           <a:bodyPr wrap="square" rtlCol="0" anchor="ctr"/>
           <a:lstStyle/>
           <a:p>
-            <a:pPr indent="0" marL="0">
-              <a:buNone/>
-            </a:pPr>
-            <a:r>
-              <a:rPr lang="en-US" sz="1100" dirty="0">
+            <a:pPr marL="0" indent="0">
+              <a:buNone/>
+            </a:pPr>
+            <a:r>
+              <a:rPr lang="en-US" dirty="0">
                 <a:solidFill>
                   <a:srgbClr val="6B7280"/>
                 </a:solidFill>
@@ -4737,7 +4513,7 @@
               </a:rPr>
               <a:t>•  Iniciar sesión y seleccionar ruta</a:t>
             </a:r>
-            <a:endParaRPr lang="en-US" sz="1100" dirty="0"/>
+            <a:endParaRPr lang="en-US" dirty="0"/>
           </a:p>
         </p:txBody>
       </p:sp>
@@ -4762,11 +4538,11 @@
           <a:bodyPr wrap="square" rtlCol="0" anchor="ctr"/>
           <a:lstStyle/>
           <a:p>
-            <a:pPr indent="0" marL="0">
-              <a:buNone/>
-            </a:pPr>
-            <a:r>
-              <a:rPr lang="en-US" sz="1100" dirty="0">
+            <a:pPr marL="0" indent="0">
+              <a:buNone/>
+            </a:pPr>
+            <a:r>
+              <a:rPr lang="en-US" dirty="0">
                 <a:solidFill>
                   <a:srgbClr val="6B7280"/>
                 </a:solidFill>
@@ -4776,7 +4552,7 @@
               </a:rPr>
               <a:t>•  Activar el monitoreo y recibir alertas</a:t>
             </a:r>
-            <a:endParaRPr lang="en-US" sz="1100" dirty="0"/>
+            <a:endParaRPr lang="en-US" dirty="0"/>
           </a:p>
         </p:txBody>
       </p:sp>
@@ -4801,11 +4577,11 @@
           <a:bodyPr wrap="square" rtlCol="0" anchor="ctr"/>
           <a:lstStyle/>
           <a:p>
-            <a:pPr indent="0" marL="0">
-              <a:buNone/>
-            </a:pPr>
-            <a:r>
-              <a:rPr lang="en-US" sz="1100" dirty="0">
+            <a:pPr marL="0" indent="0">
+              <a:buNone/>
+            </a:pPr>
+            <a:r>
+              <a:rPr lang="en-US" dirty="0">
                 <a:solidFill>
                   <a:srgbClr val="6B7280"/>
                 </a:solidFill>
@@ -4815,7 +4591,7 @@
               </a:rPr>
               <a:t>•  Reportar incidentes</a:t>
             </a:r>
-            <a:endParaRPr lang="en-US" sz="1100" dirty="0"/>
+            <a:endParaRPr lang="en-US" dirty="0"/>
           </a:p>
         </p:txBody>
       </p:sp>
@@ -4840,11 +4616,11 @@
           <a:bodyPr wrap="square" rtlCol="0" anchor="ctr"/>
           <a:lstStyle/>
           <a:p>
-            <a:pPr indent="0" marL="0">
-              <a:buNone/>
-            </a:pPr>
-            <a:r>
-              <a:rPr lang="en-US" sz="1100" i="1" dirty="0">
+            <a:pPr marL="0" indent="0">
+              <a:buNone/>
+            </a:pPr>
+            <a:r>
+              <a:rPr lang="en-US" i="1" dirty="0">
                 <a:solidFill>
                   <a:srgbClr val="6B7280"/>
                 </a:solidFill>
@@ -4854,7 +4630,7 @@
               </a:rPr>
               <a:t>Diagrama UML de casos de uso disponible en el Anexo 1 del informe.</a:t>
             </a:r>
-            <a:endParaRPr lang="en-US" sz="1100" dirty="0"/>
+            <a:endParaRPr lang="en-US" dirty="0"/>
           </a:p>
         </p:txBody>
       </p:sp>
@@ -4879,11 +4655,11 @@
           <a:bodyPr wrap="square" rtlCol="0" anchor="ctr"/>
           <a:lstStyle/>
           <a:p>
-            <a:pPr indent="0" marL="0">
-              <a:buNone/>
-            </a:pPr>
-            <a:r>
-              <a:rPr lang="en-US" sz="900" dirty="0">
+            <a:pPr marL="0" indent="0">
+              <a:buNone/>
+            </a:pPr>
+            <a:r>
+              <a:rPr lang="en-US" sz="1200" dirty="0">
                 <a:solidFill>
                   <a:srgbClr val="6B7280"/>
                 </a:solidFill>
@@ -4893,7 +4669,7 @@
               </a:rPr>
               <a:t>DriveSafe AI  |  Detección de somnolencia con Machine Learning</a:t>
             </a:r>
-            <a:endParaRPr lang="en-US" sz="900" dirty="0"/>
+            <a:endParaRPr lang="en-US" sz="1200" dirty="0"/>
           </a:p>
         </p:txBody>
       </p:sp>
@@ -4918,11 +4694,11 @@
           <a:bodyPr wrap="square" rtlCol="0" anchor="ctr"/>
           <a:lstStyle/>
           <a:p>
-            <a:pPr algn="r" indent="0" marL="0">
-              <a:buNone/>
-            </a:pPr>
-            <a:r>
-              <a:rPr lang="en-US" sz="900" dirty="0">
+            <a:pPr marL="0" indent="0" algn="r">
+              <a:buNone/>
+            </a:pPr>
+            <a:r>
+              <a:rPr lang="en-US" sz="1200" dirty="0">
                 <a:solidFill>
                   <a:srgbClr val="6B7280"/>
                 </a:solidFill>
@@ -4932,7 +4708,7 @@
               </a:rPr>
               <a:t>13</a:t>
             </a:r>
-            <a:endParaRPr lang="en-US" sz="900" dirty="0"/>
+            <a:endParaRPr lang="en-US" sz="1200" dirty="0"/>
           </a:p>
         </p:txBody>
       </p:sp>
@@ -4952,6 +4728,7 @@
         <a:solidFill>
           <a:srgbClr val="0F1B3C"/>
         </a:solidFill>
+        <a:effectLst/>
       </p:bgPr>
     </p:bg>
     <p:spTree>
@@ -4989,11 +4766,11 @@
           <a:bodyPr wrap="square" rtlCol="0" anchor="ctr"/>
           <a:lstStyle/>
           <a:p>
-            <a:pPr indent="0" marL="0">
-              <a:buNone/>
-            </a:pPr>
-            <a:r>
-              <a:rPr lang="en-US" sz="1300" b="1" spc="200" kern="0" dirty="0">
+            <a:pPr marL="0" indent="0">
+              <a:buNone/>
+            </a:pPr>
+            <a:r>
+              <a:rPr lang="en-US" b="1" kern="0" spc="200" dirty="0">
                 <a:solidFill>
                   <a:srgbClr val="5FBDB0"/>
                 </a:solidFill>
@@ -5003,7 +4780,7 @@
               </a:rPr>
               <a:t>06 · INTEGRACIÓN Y RESULTADOS</a:t>
             </a:r>
-            <a:endParaRPr lang="en-US" sz="1300" dirty="0"/>
+            <a:endParaRPr lang="en-US" dirty="0"/>
           </a:p>
         </p:txBody>
       </p:sp>
@@ -5028,11 +4805,11 @@
           <a:bodyPr wrap="square" rtlCol="0" anchor="ctr"/>
           <a:lstStyle/>
           <a:p>
-            <a:pPr indent="0" marL="0">
-              <a:buNone/>
-            </a:pPr>
-            <a:r>
-              <a:rPr lang="en-US" sz="2800" b="1" dirty="0">
+            <a:pPr marL="0" indent="0">
+              <a:buNone/>
+            </a:pPr>
+            <a:r>
+              <a:rPr lang="en-US" sz="4000" b="1" dirty="0">
                 <a:solidFill>
                   <a:srgbClr val="FFFFFF"/>
                 </a:solidFill>
@@ -5042,7 +4819,7 @@
               </a:rPr>
               <a:t>Predicción en tiempo real vía API</a:t>
             </a:r>
-            <a:endParaRPr lang="en-US" sz="2800" dirty="0"/>
+            <a:endParaRPr lang="en-US" sz="4000" dirty="0"/>
           </a:p>
         </p:txBody>
       </p:sp>
@@ -5089,11 +4866,11 @@
           <a:bodyPr wrap="square" rtlCol="0" anchor="ctr"/>
           <a:lstStyle/>
           <a:p>
-            <a:pPr algn="ctr" indent="0" marL="0">
-              <a:buNone/>
-            </a:pPr>
-            <a:r>
-              <a:rPr lang="en-US" sz="1100" b="1" dirty="0">
+            <a:pPr marL="0" indent="0" algn="ctr">
+              <a:buNone/>
+            </a:pPr>
+            <a:r>
+              <a:rPr lang="en-US" sz="1600" b="1" dirty="0">
                 <a:solidFill>
                   <a:srgbClr val="FFFFFF"/>
                 </a:solidFill>
@@ -5103,14 +4880,14 @@
               </a:rPr>
               <a:t>Navegador</a:t>
             </a:r>
-            <a:endParaRPr lang="en-US" sz="1100" dirty="0"/>
-          </a:p>
-          <a:p>
-            <a:pPr algn="ctr" indent="0" marL="0">
-              <a:buNone/>
-            </a:pPr>
-            <a:r>
-              <a:rPr lang="en-US" sz="1100" b="1" dirty="0">
+            <a:endParaRPr lang="en-US" sz="1600" dirty="0"/>
+          </a:p>
+          <a:p>
+            <a:pPr marL="0" indent="0" algn="ctr">
+              <a:buNone/>
+            </a:pPr>
+            <a:r>
+              <a:rPr lang="en-US" sz="1600" b="1" dirty="0">
                 <a:solidFill>
                   <a:srgbClr val="FFFFFF"/>
                 </a:solidFill>
@@ -5120,7 +4897,7 @@
               </a:rPr>
               <a:t>(MediaPipe)</a:t>
             </a:r>
-            <a:endParaRPr lang="en-US" sz="1100" dirty="0"/>
+            <a:endParaRPr lang="en-US" sz="1600" dirty="0"/>
           </a:p>
         </p:txBody>
       </p:sp>
@@ -5187,11 +4964,11 @@
           <a:bodyPr wrap="square" rtlCol="0" anchor="ctr"/>
           <a:lstStyle/>
           <a:p>
-            <a:pPr algn="ctr" indent="0" marL="0">
-              <a:buNone/>
-            </a:pPr>
-            <a:r>
-              <a:rPr lang="en-US" sz="1100" b="1" dirty="0">
+            <a:pPr marL="0" indent="0" algn="ctr">
+              <a:buNone/>
+            </a:pPr>
+            <a:r>
+              <a:rPr lang="en-US" sz="1600" b="1" dirty="0">
                 <a:solidFill>
                   <a:srgbClr val="FFFFFF"/>
                 </a:solidFill>
@@ -5201,7 +4978,7 @@
               </a:rPr>
               <a:t>api_alerts.php</a:t>
             </a:r>
-            <a:endParaRPr lang="en-US" sz="1100" dirty="0"/>
+            <a:endParaRPr lang="en-US" sz="1600" dirty="0"/>
           </a:p>
         </p:txBody>
       </p:sp>
@@ -5268,11 +5045,11 @@
           <a:bodyPr wrap="square" rtlCol="0" anchor="ctr"/>
           <a:lstStyle/>
           <a:p>
-            <a:pPr algn="ctr" indent="0" marL="0">
-              <a:buNone/>
-            </a:pPr>
-            <a:r>
-              <a:rPr lang="en-US" sz="1100" b="1" dirty="0">
+            <a:pPr marL="0" indent="0" algn="ctr">
+              <a:buNone/>
+            </a:pPr>
+            <a:r>
+              <a:rPr lang="en-US" sz="1600" b="1" dirty="0">
                 <a:solidFill>
                   <a:srgbClr val="FFFFFF"/>
                 </a:solidFill>
@@ -5282,14 +5059,14 @@
               </a:rPr>
               <a:t>FastAPI</a:t>
             </a:r>
-            <a:endParaRPr lang="en-US" sz="1100" dirty="0"/>
-          </a:p>
-          <a:p>
-            <a:pPr algn="ctr" indent="0" marL="0">
-              <a:buNone/>
-            </a:pPr>
-            <a:r>
-              <a:rPr lang="en-US" sz="1100" b="1" dirty="0">
+            <a:endParaRPr lang="en-US" sz="1600" dirty="0"/>
+          </a:p>
+          <a:p>
+            <a:pPr marL="0" indent="0" algn="ctr">
+              <a:buNone/>
+            </a:pPr>
+            <a:r>
+              <a:rPr lang="en-US" sz="1600" b="1" dirty="0">
                 <a:solidFill>
                   <a:srgbClr val="FFFFFF"/>
                 </a:solidFill>
@@ -5299,7 +5076,7 @@
               </a:rPr>
               <a:t>POST /predict</a:t>
             </a:r>
-            <a:endParaRPr lang="en-US" sz="1100" dirty="0"/>
+            <a:endParaRPr lang="en-US" sz="1600" dirty="0"/>
           </a:p>
         </p:txBody>
       </p:sp>
@@ -5366,11 +5143,11 @@
           <a:bodyPr wrap="square" rtlCol="0" anchor="ctr"/>
           <a:lstStyle/>
           <a:p>
-            <a:pPr algn="ctr" indent="0" marL="0">
-              <a:buNone/>
-            </a:pPr>
-            <a:r>
-              <a:rPr lang="en-US" sz="1100" b="1" dirty="0">
+            <a:pPr marL="0" indent="0" algn="ctr">
+              <a:buNone/>
+            </a:pPr>
+            <a:r>
+              <a:rPr lang="en-US" sz="1600" b="1" dirty="0">
                 <a:solidFill>
                   <a:srgbClr val="FFFFFF"/>
                 </a:solidFill>
@@ -5380,7 +5157,7 @@
               </a:rPr>
               <a:t>modelo_fatiga.pkl</a:t>
             </a:r>
-            <a:endParaRPr lang="en-US" sz="1100" dirty="0"/>
+            <a:endParaRPr lang="en-US" sz="1600" dirty="0"/>
           </a:p>
         </p:txBody>
       </p:sp>
@@ -5447,11 +5224,11 @@
           <a:bodyPr wrap="square" rtlCol="0" anchor="ctr"/>
           <a:lstStyle/>
           <a:p>
-            <a:pPr algn="ctr" indent="0" marL="0">
-              <a:buNone/>
-            </a:pPr>
-            <a:r>
-              <a:rPr lang="en-US" sz="1100" b="1" dirty="0">
+            <a:pPr marL="0" indent="0" algn="ctr">
+              <a:buNone/>
+            </a:pPr>
+            <a:r>
+              <a:rPr lang="en-US" sz="1600" b="1" dirty="0">
                 <a:solidFill>
                   <a:srgbClr val="FFFFFF"/>
                 </a:solidFill>
@@ -5461,14 +5238,14 @@
               </a:rPr>
               <a:t>Nivel de</a:t>
             </a:r>
-            <a:endParaRPr lang="en-US" sz="1100" dirty="0"/>
-          </a:p>
-          <a:p>
-            <a:pPr algn="ctr" indent="0" marL="0">
-              <a:buNone/>
-            </a:pPr>
-            <a:r>
-              <a:rPr lang="en-US" sz="1100" b="1" dirty="0">
+            <a:endParaRPr lang="en-US" sz="1600" dirty="0"/>
+          </a:p>
+          <a:p>
+            <a:pPr marL="0" indent="0" algn="ctr">
+              <a:buNone/>
+            </a:pPr>
+            <a:r>
+              <a:rPr lang="en-US" sz="1600" b="1" dirty="0">
                 <a:solidFill>
                   <a:srgbClr val="FFFFFF"/>
                 </a:solidFill>
@@ -5478,7 +5255,7 @@
               </a:rPr>
               <a:t>fatiga (0-100)</a:t>
             </a:r>
-            <a:endParaRPr lang="en-US" sz="1100" dirty="0"/>
+            <a:endParaRPr lang="en-US" sz="1600" dirty="0"/>
           </a:p>
         </p:txBody>
       </p:sp>
@@ -5503,11 +5280,11 @@
           <a:bodyPr wrap="square" rtlCol="0" anchor="ctr"/>
           <a:lstStyle/>
           <a:p>
-            <a:pPr indent="0" marL="0">
-              <a:buNone/>
-            </a:pPr>
-            <a:r>
-              <a:rPr lang="en-US" sz="1500" b="1" dirty="0">
+            <a:pPr marL="0" indent="0">
+              <a:buNone/>
+            </a:pPr>
+            <a:r>
+              <a:rPr lang="en-US" sz="2000" b="1" dirty="0">
                 <a:solidFill>
                   <a:srgbClr val="FFFFFF"/>
                 </a:solidFill>
@@ -5517,7 +5294,7 @@
               </a:rPr>
               <a:t>Mecanismo de respaldo (fallback)</a:t>
             </a:r>
-            <a:endParaRPr lang="en-US" sz="1500" dirty="0"/>
+            <a:endParaRPr lang="en-US" sz="2000" dirty="0"/>
           </a:p>
         </p:txBody>
       </p:sp>
@@ -5542,11 +5319,11 @@
           <a:bodyPr wrap="square" rtlCol="0" anchor="ctr"/>
           <a:lstStyle/>
           <a:p>
-            <a:pPr indent="0" marL="0">
-              <a:buNone/>
-            </a:pPr>
-            <a:r>
-              <a:rPr lang="en-US" sz="1200" dirty="0">
+            <a:pPr marL="0" indent="0">
+              <a:buNone/>
+            </a:pPr>
+            <a:r>
+              <a:rPr lang="en-US" dirty="0">
                 <a:solidFill>
                   <a:srgbClr val="C7CEE6"/>
                 </a:solidFill>
@@ -5556,7 +5333,7 @@
               </a:rPr>
               <a:t>Si el servicio FastAPI no responde, api_alerts.php ejecuta directamente predictor.py mediante shell_exec, garantizando disponibilidad continua del sistema.</a:t>
             </a:r>
-            <a:endParaRPr lang="en-US" sz="1200" dirty="0"/>
+            <a:endParaRPr lang="en-US" dirty="0"/>
           </a:p>
         </p:txBody>
       </p:sp>
@@ -5603,11 +5380,11 @@
           <a:bodyPr wrap="square" rtlCol="0" anchor="ctr"/>
           <a:lstStyle/>
           <a:p>
-            <a:pPr indent="0" marL="0">
-              <a:buNone/>
-            </a:pPr>
-            <a:r>
-              <a:rPr lang="en-US" sz="1150" b="1" dirty="0">
+            <a:pPr marL="0" indent="0">
+              <a:buNone/>
+            </a:pPr>
+            <a:r>
+              <a:rPr lang="en-US" sz="1600" b="1" dirty="0">
                 <a:solidFill>
                   <a:srgbClr val="9AA5C4"/>
                 </a:solidFill>
@@ -5617,7 +5394,7 @@
               </a:rPr>
               <a:t>Ejemplo de respuesta del endpoint</a:t>
             </a:r>
-            <a:endParaRPr lang="en-US" sz="1150" dirty="0"/>
+            <a:endParaRPr lang="en-US" sz="1600" dirty="0"/>
           </a:p>
         </p:txBody>
       </p:sp>
@@ -5642,14 +5419,14 @@
           <a:bodyPr wrap="square" rtlCol="0" anchor="ctr"/>
           <a:lstStyle/>
           <a:p>
-            <a:pPr indent="0" marL="0">
+            <a:pPr marL="0" indent="0">
               <a:lnSpc>
                 <a:spcPct val="130000"/>
               </a:lnSpc>
               <a:buNone/>
             </a:pPr>
             <a:r>
-              <a:rPr lang="en-US" sz="1250" dirty="0">
+              <a:rPr lang="en-US" dirty="0">
                 <a:solidFill>
                   <a:srgbClr val="5FBDB0"/>
                 </a:solidFill>
@@ -5659,26 +5436,26 @@
               </a:rPr>
               <a:t>POST http://127.0.0.1:8000/predict</a:t>
             </a:r>
-            <a:endParaRPr lang="en-US" sz="1250" dirty="0"/>
-          </a:p>
-          <a:p>
-            <a:pPr indent="0" marL="0">
+            <a:endParaRPr lang="en-US" dirty="0"/>
+          </a:p>
+          <a:p>
+            <a:pPr marL="0" indent="0">
               <a:lnSpc>
                 <a:spcPct val="130000"/>
               </a:lnSpc>
               <a:buNone/>
             </a:pPr>
-            <a:endParaRPr lang="en-US" sz="1250" dirty="0"/>
-          </a:p>
-          <a:p>
-            <a:pPr indent="0" marL="0">
+            <a:endParaRPr lang="en-US" dirty="0"/>
+          </a:p>
+          <a:p>
+            <a:pPr marL="0" indent="0">
               <a:lnSpc>
                 <a:spcPct val="130000"/>
               </a:lnSpc>
               <a:buNone/>
             </a:pPr>
             <a:r>
-              <a:rPr lang="en-US" sz="1250" dirty="0">
+              <a:rPr lang="en-US" dirty="0">
                 <a:solidFill>
                   <a:srgbClr val="5FBDB0"/>
                 </a:solidFill>
@@ -5688,26 +5465,26 @@
               </a:rPr>
               <a:t>{ "ojos": 0.23, "bostezos": 2, "tiempo": 40 }</a:t>
             </a:r>
-            <a:endParaRPr lang="en-US" sz="1250" dirty="0"/>
-          </a:p>
-          <a:p>
-            <a:pPr indent="0" marL="0">
+            <a:endParaRPr lang="en-US" dirty="0"/>
+          </a:p>
+          <a:p>
+            <a:pPr marL="0" indent="0">
               <a:lnSpc>
                 <a:spcPct val="130000"/>
               </a:lnSpc>
               <a:buNone/>
             </a:pPr>
-            <a:endParaRPr lang="en-US" sz="1250" dirty="0"/>
-          </a:p>
-          <a:p>
-            <a:pPr indent="0" marL="0">
+            <a:endParaRPr lang="en-US" dirty="0"/>
+          </a:p>
+          <a:p>
+            <a:pPr marL="0" indent="0">
               <a:lnSpc>
                 <a:spcPct val="130000"/>
               </a:lnSpc>
               <a:buNone/>
             </a:pPr>
             <a:r>
-              <a:rPr lang="en-US" sz="1250" dirty="0">
+              <a:rPr lang="en-US" dirty="0">
                 <a:solidFill>
                   <a:srgbClr val="5FBDB0"/>
                 </a:solidFill>
@@ -5717,7 +5494,7 @@
               </a:rPr>
               <a:t>→  { "fatiga": 68 }</a:t>
             </a:r>
-            <a:endParaRPr lang="en-US" sz="1250" dirty="0"/>
+            <a:endParaRPr lang="en-US" dirty="0"/>
           </a:p>
         </p:txBody>
       </p:sp>
@@ -5742,7 +5519,7 @@
           <a:bodyPr wrap="square" rtlCol="0" anchor="ctr"/>
           <a:lstStyle/>
           <a:p>
-            <a:pPr indent="0" marL="0">
+            <a:pPr marL="0" indent="0">
               <a:buNone/>
             </a:pPr>
             <a:r>
@@ -5781,11 +5558,11 @@
           <a:bodyPr wrap="square" rtlCol="0" anchor="ctr"/>
           <a:lstStyle/>
           <a:p>
-            <a:pPr algn="r" indent="0" marL="0">
-              <a:buNone/>
-            </a:pPr>
-            <a:r>
-              <a:rPr lang="en-US" sz="900" dirty="0">
+            <a:pPr marL="0" indent="0" algn="r">
+              <a:buNone/>
+            </a:pPr>
+            <a:r>
+              <a:rPr lang="en-US" sz="1100" dirty="0">
                 <a:solidFill>
                   <a:srgbClr val="9AA5C4"/>
                 </a:solidFill>
@@ -5795,7 +5572,7 @@
               </a:rPr>
               <a:t>14</a:t>
             </a:r>
-            <a:endParaRPr lang="en-US" sz="900" dirty="0"/>
+            <a:endParaRPr lang="en-US" sz="1100" dirty="0"/>
           </a:p>
         </p:txBody>
       </p:sp>
@@ -5815,6 +5592,7 @@
         <a:solidFill>
           <a:srgbClr val="FFFFFF"/>
         </a:solidFill>
+        <a:effectLst/>
       </p:bgPr>
     </p:bg>
     <p:spTree>
@@ -5852,11 +5630,11 @@
           <a:bodyPr wrap="square" rtlCol="0" anchor="ctr"/>
           <a:lstStyle/>
           <a:p>
-            <a:pPr indent="0" marL="0">
-              <a:buNone/>
-            </a:pPr>
-            <a:r>
-              <a:rPr lang="en-US" sz="1300" b="1" spc="200" kern="0" dirty="0">
+            <a:pPr marL="0" indent="0">
+              <a:buNone/>
+            </a:pPr>
+            <a:r>
+              <a:rPr lang="en-US" sz="2000" b="1" kern="0" spc="200" dirty="0">
                 <a:solidFill>
                   <a:srgbClr val="1C7293"/>
                 </a:solidFill>
@@ -5866,7 +5644,7 @@
               </a:rPr>
               <a:t>06 · INTEGRACIÓN Y RESULTADOS</a:t>
             </a:r>
-            <a:endParaRPr lang="en-US" sz="1300" dirty="0"/>
+            <a:endParaRPr lang="en-US" sz="2000" dirty="0"/>
           </a:p>
         </p:txBody>
       </p:sp>
@@ -5891,11 +5669,11 @@
           <a:bodyPr wrap="square" rtlCol="0" anchor="ctr"/>
           <a:lstStyle/>
           <a:p>
-            <a:pPr indent="0" marL="0">
-              <a:buNone/>
-            </a:pPr>
-            <a:r>
-              <a:rPr lang="en-US" sz="3000" b="1" dirty="0">
+            <a:pPr marL="0" indent="0">
+              <a:buNone/>
+            </a:pPr>
+            <a:r>
+              <a:rPr lang="en-US" sz="4400" b="1" dirty="0">
                 <a:solidFill>
                   <a:srgbClr val="1A2238"/>
                 </a:solidFill>
@@ -5905,7 +5683,7 @@
               </a:rPr>
               <a:t>De un número a una decisión</a:t>
             </a:r>
-            <a:endParaRPr lang="en-US" sz="3000" dirty="0"/>
+            <a:endParaRPr lang="en-US" sz="4400" dirty="0"/>
           </a:p>
         </p:txBody>
       </p:sp>
@@ -5930,11 +5708,11 @@
           <a:bodyPr wrap="square" rtlCol="0" anchor="ctr"/>
           <a:lstStyle/>
           <a:p>
-            <a:pPr indent="0" marL="0">
-              <a:buNone/>
-            </a:pPr>
-            <a:r>
-              <a:rPr lang="en-US" sz="1250" dirty="0">
+            <a:pPr marL="0" indent="0">
+              <a:buNone/>
+            </a:pPr>
+            <a:r>
+              <a:rPr lang="en-US" sz="2000" dirty="0">
                 <a:solidFill>
                   <a:srgbClr val="6B7280"/>
                 </a:solidFill>
@@ -5944,7 +5722,7 @@
               </a:rPr>
               <a:t>El sistema clasifica el porcentaje de fatiga en cuatro niveles de riesgo y activa la lógica de negocio correspondiente.</a:t>
             </a:r>
-            <a:endParaRPr lang="en-US" sz="1250" dirty="0"/>
+            <a:endParaRPr lang="en-US" sz="2000" dirty="0"/>
           </a:p>
         </p:txBody>
       </p:sp>
@@ -5991,11 +5769,11 @@
           <a:bodyPr wrap="square" rtlCol="0" anchor="ctr"/>
           <a:lstStyle/>
           <a:p>
-            <a:pPr algn="ctr" indent="0" marL="0">
-              <a:buNone/>
-            </a:pPr>
-            <a:r>
-              <a:rPr lang="en-US" sz="1700" b="1" dirty="0">
+            <a:pPr marL="0" indent="0" algn="ctr">
+              <a:buNone/>
+            </a:pPr>
+            <a:r>
+              <a:rPr lang="en-US" sz="2800" b="1" dirty="0">
                 <a:solidFill>
                   <a:srgbClr val="FFFFFF"/>
                 </a:solidFill>
@@ -6005,7 +5783,7 @@
               </a:rPr>
               <a:t>Bajo</a:t>
             </a:r>
-            <a:endParaRPr lang="en-US" sz="1700" dirty="0"/>
+            <a:endParaRPr lang="en-US" sz="2800" dirty="0"/>
           </a:p>
         </p:txBody>
       </p:sp>
@@ -6030,11 +5808,11 @@
           <a:bodyPr wrap="square" rtlCol="0" anchor="ctr"/>
           <a:lstStyle/>
           <a:p>
-            <a:pPr algn="ctr" indent="0" marL="0">
-              <a:buNone/>
-            </a:pPr>
-            <a:r>
-              <a:rPr lang="en-US" sz="1300" dirty="0">
+            <a:pPr marL="0" indent="0" algn="ctr">
+              <a:buNone/>
+            </a:pPr>
+            <a:r>
+              <a:rPr lang="en-US" sz="2000" dirty="0">
                 <a:solidFill>
                   <a:srgbClr val="FFFFFF"/>
                 </a:solidFill>
@@ -6044,7 +5822,7 @@
               </a:rPr>
               <a:t>0 – 23</a:t>
             </a:r>
-            <a:endParaRPr lang="en-US" sz="1300" dirty="0"/>
+            <a:endParaRPr lang="en-US" sz="2000" dirty="0"/>
           </a:p>
         </p:txBody>
       </p:sp>
@@ -6091,11 +5869,11 @@
           <a:bodyPr wrap="square" rtlCol="0" anchor="ctr"/>
           <a:lstStyle/>
           <a:p>
-            <a:pPr algn="ctr" indent="0" marL="0">
-              <a:buNone/>
-            </a:pPr>
-            <a:r>
-              <a:rPr lang="en-US" sz="1700" b="1" dirty="0">
+            <a:pPr marL="0" indent="0" algn="ctr">
+              <a:buNone/>
+            </a:pPr>
+            <a:r>
+              <a:rPr lang="en-US" sz="2800" b="1" dirty="0">
                 <a:solidFill>
                   <a:srgbClr val="FFFFFF"/>
                 </a:solidFill>
@@ -6105,7 +5883,7 @@
               </a:rPr>
               <a:t>Medio</a:t>
             </a:r>
-            <a:endParaRPr lang="en-US" sz="1700" dirty="0"/>
+            <a:endParaRPr lang="en-US" sz="2800" dirty="0"/>
           </a:p>
         </p:txBody>
       </p:sp>
@@ -6130,11 +5908,11 @@
           <a:bodyPr wrap="square" rtlCol="0" anchor="ctr"/>
           <a:lstStyle/>
           <a:p>
-            <a:pPr algn="ctr" indent="0" marL="0">
-              <a:buNone/>
-            </a:pPr>
-            <a:r>
-              <a:rPr lang="en-US" sz="1300" dirty="0">
+            <a:pPr marL="0" indent="0" algn="ctr">
+              <a:buNone/>
+            </a:pPr>
+            <a:r>
+              <a:rPr lang="en-US" sz="2000" dirty="0">
                 <a:solidFill>
                   <a:srgbClr val="FFFFFF"/>
                 </a:solidFill>
@@ -6144,7 +5922,7 @@
               </a:rPr>
               <a:t>24 – 47</a:t>
             </a:r>
-            <a:endParaRPr lang="en-US" sz="1300" dirty="0"/>
+            <a:endParaRPr lang="en-US" sz="2000" dirty="0"/>
           </a:p>
         </p:txBody>
       </p:sp>
@@ -6191,11 +5969,11 @@
           <a:bodyPr wrap="square" rtlCol="0" anchor="ctr"/>
           <a:lstStyle/>
           <a:p>
-            <a:pPr algn="ctr" indent="0" marL="0">
-              <a:buNone/>
-            </a:pPr>
-            <a:r>
-              <a:rPr lang="en-US" sz="1700" b="1" dirty="0">
+            <a:pPr marL="0" indent="0" algn="ctr">
+              <a:buNone/>
+            </a:pPr>
+            <a:r>
+              <a:rPr lang="en-US" sz="2800" b="1" dirty="0">
                 <a:solidFill>
                   <a:srgbClr val="FFFFFF"/>
                 </a:solidFill>
@@ -6205,7 +5983,7 @@
               </a:rPr>
               <a:t>Alto</a:t>
             </a:r>
-            <a:endParaRPr lang="en-US" sz="1700" dirty="0"/>
+            <a:endParaRPr lang="en-US" sz="2800" dirty="0"/>
           </a:p>
         </p:txBody>
       </p:sp>
@@ -6230,11 +6008,11 @@
           <a:bodyPr wrap="square" rtlCol="0" anchor="ctr"/>
           <a:lstStyle/>
           <a:p>
-            <a:pPr algn="ctr" indent="0" marL="0">
-              <a:buNone/>
-            </a:pPr>
-            <a:r>
-              <a:rPr lang="en-US" sz="1300" dirty="0">
+            <a:pPr marL="0" indent="0" algn="ctr">
+              <a:buNone/>
+            </a:pPr>
+            <a:r>
+              <a:rPr lang="en-US" sz="2000" dirty="0">
                 <a:solidFill>
                   <a:srgbClr val="FFFFFF"/>
                 </a:solidFill>
@@ -6244,7 +6022,7 @@
               </a:rPr>
               <a:t>48 – 71</a:t>
             </a:r>
-            <a:endParaRPr lang="en-US" sz="1300" dirty="0"/>
+            <a:endParaRPr lang="en-US" sz="2000" dirty="0"/>
           </a:p>
         </p:txBody>
       </p:sp>
@@ -6291,11 +6069,11 @@
           <a:bodyPr wrap="square" rtlCol="0" anchor="ctr"/>
           <a:lstStyle/>
           <a:p>
-            <a:pPr algn="ctr" indent="0" marL="0">
-              <a:buNone/>
-            </a:pPr>
-            <a:r>
-              <a:rPr lang="en-US" sz="1700" b="1" dirty="0">
+            <a:pPr marL="0" indent="0" algn="ctr">
+              <a:buNone/>
+            </a:pPr>
+            <a:r>
+              <a:rPr lang="en-US" sz="2800" b="1" dirty="0">
                 <a:solidFill>
                   <a:srgbClr val="FFFFFF"/>
                 </a:solidFill>
@@ -6305,7 +6083,7 @@
               </a:rPr>
               <a:t>Crítico</a:t>
             </a:r>
-            <a:endParaRPr lang="en-US" sz="1700" dirty="0"/>
+            <a:endParaRPr lang="en-US" sz="2800" dirty="0"/>
           </a:p>
         </p:txBody>
       </p:sp>
@@ -6330,11 +6108,11 @@
           <a:bodyPr wrap="square" rtlCol="0" anchor="ctr"/>
           <a:lstStyle/>
           <a:p>
-            <a:pPr algn="ctr" indent="0" marL="0">
-              <a:buNone/>
-            </a:pPr>
-            <a:r>
-              <a:rPr lang="en-US" sz="1300" dirty="0">
+            <a:pPr marL="0" indent="0" algn="ctr">
+              <a:buNone/>
+            </a:pPr>
+            <a:r>
+              <a:rPr lang="en-US" sz="2000" dirty="0">
                 <a:solidFill>
                   <a:srgbClr val="FFFFFF"/>
                 </a:solidFill>
@@ -6344,7 +6122,7 @@
               </a:rPr>
               <a:t>72 – 100</a:t>
             </a:r>
-            <a:endParaRPr lang="en-US" sz="1300" dirty="0"/>
+            <a:endParaRPr lang="en-US" sz="2000" dirty="0"/>
           </a:p>
         </p:txBody>
       </p:sp>
@@ -6369,11 +6147,11 @@
           <a:bodyPr wrap="square" rtlCol="0" anchor="ctr"/>
           <a:lstStyle/>
           <a:p>
-            <a:pPr indent="0" marL="0">
-              <a:buNone/>
-            </a:pPr>
-            <a:r>
-              <a:rPr lang="en-US" sz="1500" b="1" dirty="0">
+            <a:pPr marL="0" indent="0">
+              <a:buNone/>
+            </a:pPr>
+            <a:r>
+              <a:rPr lang="en-US" sz="2400" b="1" dirty="0">
                 <a:solidFill>
                   <a:srgbClr val="1A2238"/>
                 </a:solidFill>
@@ -6383,7 +6161,7 @@
               </a:rPr>
               <a:t>Casos de prueba</a:t>
             </a:r>
-            <a:endParaRPr lang="en-US" sz="1500" dirty="0"/>
+            <a:endParaRPr lang="en-US" sz="2400" dirty="0"/>
           </a:p>
         </p:txBody>
       </p:sp>
@@ -6450,11 +6228,11 @@
           <a:bodyPr wrap="square" rtlCol="0" anchor="ctr"/>
           <a:lstStyle/>
           <a:p>
-            <a:pPr indent="0" marL="0">
-              <a:buNone/>
-            </a:pPr>
-            <a:r>
-              <a:rPr lang="en-US" sz="1050" dirty="0">
+            <a:pPr marL="0" indent="0">
+              <a:buNone/>
+            </a:pPr>
+            <a:r>
+              <a:rPr lang="en-US" sz="1600" dirty="0">
                 <a:solidFill>
                   <a:srgbClr val="6B7280"/>
                 </a:solidFill>
@@ -6464,7 +6242,7 @@
               </a:rPr>
               <a:t>EAR 0.34 · 0 bostezos · 10 min</a:t>
             </a:r>
-            <a:endParaRPr lang="en-US" sz="1050" dirty="0"/>
+            <a:endParaRPr lang="en-US" sz="1600" dirty="0"/>
           </a:p>
         </p:txBody>
       </p:sp>
@@ -6489,11 +6267,11 @@
           <a:bodyPr wrap="square" rtlCol="0" anchor="ctr"/>
           <a:lstStyle/>
           <a:p>
-            <a:pPr indent="0" marL="0">
-              <a:buNone/>
-            </a:pPr>
-            <a:r>
-              <a:rPr lang="en-US" sz="1400" b="1" dirty="0">
+            <a:pPr marL="0" indent="0">
+              <a:buNone/>
+            </a:pPr>
+            <a:r>
+              <a:rPr lang="en-US" sz="2400" b="1" dirty="0">
                 <a:solidFill>
                   <a:srgbClr val="1A2238"/>
                 </a:solidFill>
@@ -6503,7 +6281,7 @@
               </a:rPr>
               <a:t>Fatiga 15 — Bajo</a:t>
             </a:r>
-            <a:endParaRPr lang="en-US" sz="1400" dirty="0"/>
+            <a:endParaRPr lang="en-US" sz="2400" dirty="0"/>
           </a:p>
         </p:txBody>
       </p:sp>
@@ -6528,11 +6306,11 @@
           <a:bodyPr wrap="square" rtlCol="0" anchor="ctr"/>
           <a:lstStyle/>
           <a:p>
-            <a:pPr indent="0" marL="0">
-              <a:buNone/>
-            </a:pPr>
-            <a:r>
-              <a:rPr lang="en-US" sz="1050" dirty="0">
+            <a:pPr marL="0" indent="0">
+              <a:buNone/>
+            </a:pPr>
+            <a:r>
+              <a:rPr lang="en-US" sz="1600" dirty="0">
                 <a:solidFill>
                   <a:srgbClr val="6B7280"/>
                 </a:solidFill>
@@ -6542,7 +6320,7 @@
               </a:rPr>
               <a:t>Monitoreo continúa sin alertas críticas</a:t>
             </a:r>
-            <a:endParaRPr lang="en-US" sz="1050" dirty="0"/>
+            <a:endParaRPr lang="en-US" sz="1600" dirty="0"/>
           </a:p>
         </p:txBody>
       </p:sp>
@@ -6609,11 +6387,11 @@
           <a:bodyPr wrap="square" rtlCol="0" anchor="ctr"/>
           <a:lstStyle/>
           <a:p>
-            <a:pPr indent="0" marL="0">
-              <a:buNone/>
-            </a:pPr>
-            <a:r>
-              <a:rPr lang="en-US" sz="1050" dirty="0">
+            <a:pPr marL="0" indent="0">
+              <a:buNone/>
+            </a:pPr>
+            <a:r>
+              <a:rPr lang="en-US" sz="1600" dirty="0">
                 <a:solidFill>
                   <a:srgbClr val="6B7280"/>
                 </a:solidFill>
@@ -6623,7 +6401,7 @@
               </a:rPr>
               <a:t>EAR 0.23 · 2 bostezos · 40 min</a:t>
             </a:r>
-            <a:endParaRPr lang="en-US" sz="1050" dirty="0"/>
+            <a:endParaRPr lang="en-US" sz="1600" dirty="0"/>
           </a:p>
         </p:txBody>
       </p:sp>
@@ -6648,11 +6426,11 @@
           <a:bodyPr wrap="square" rtlCol="0" anchor="ctr"/>
           <a:lstStyle/>
           <a:p>
-            <a:pPr indent="0" marL="0">
-              <a:buNone/>
-            </a:pPr>
-            <a:r>
-              <a:rPr lang="en-US" sz="1400" b="1" dirty="0">
+            <a:pPr marL="0" indent="0">
+              <a:buNone/>
+            </a:pPr>
+            <a:r>
+              <a:rPr lang="en-US" sz="2400" b="1" dirty="0">
                 <a:solidFill>
                   <a:srgbClr val="1A2238"/>
                 </a:solidFill>
@@ -6662,7 +6440,7 @@
               </a:rPr>
               <a:t>Fatiga 56 — Alto</a:t>
             </a:r>
-            <a:endParaRPr lang="en-US" sz="1400" dirty="0"/>
+            <a:endParaRPr lang="en-US" sz="2400" dirty="0"/>
           </a:p>
         </p:txBody>
       </p:sp>
@@ -6687,11 +6465,11 @@
           <a:bodyPr wrap="square" rtlCol="0" anchor="ctr"/>
           <a:lstStyle/>
           <a:p>
-            <a:pPr indent="0" marL="0">
-              <a:buNone/>
-            </a:pPr>
-            <a:r>
-              <a:rPr lang="en-US" sz="1050" dirty="0">
+            <a:pPr marL="0" indent="0">
+              <a:buNone/>
+            </a:pPr>
+            <a:r>
+              <a:rPr lang="en-US" sz="1600" dirty="0">
                 <a:solidFill>
                   <a:srgbClr val="6B7280"/>
                 </a:solidFill>
@@ -6701,7 +6479,7 @@
               </a:rPr>
               <a:t>Alerta registrada; se recomienda una pausa</a:t>
             </a:r>
-            <a:endParaRPr lang="en-US" sz="1050" dirty="0"/>
+            <a:endParaRPr lang="en-US" sz="1600" dirty="0"/>
           </a:p>
         </p:txBody>
       </p:sp>
@@ -6768,11 +6546,11 @@
           <a:bodyPr wrap="square" rtlCol="0" anchor="ctr"/>
           <a:lstStyle/>
           <a:p>
-            <a:pPr indent="0" marL="0">
-              <a:buNone/>
-            </a:pPr>
-            <a:r>
-              <a:rPr lang="en-US" sz="1050" dirty="0">
+            <a:pPr marL="0" indent="0">
+              <a:buNone/>
+            </a:pPr>
+            <a:r>
+              <a:rPr lang="en-US" sz="1600" dirty="0">
                 <a:solidFill>
                   <a:srgbClr val="6B7280"/>
                 </a:solidFill>
@@ -6782,7 +6560,7 @@
               </a:rPr>
               <a:t>EAR 0.14 · 4 bostezos · 70 min</a:t>
             </a:r>
-            <a:endParaRPr lang="en-US" sz="1050" dirty="0"/>
+            <a:endParaRPr lang="en-US" sz="1600" dirty="0"/>
           </a:p>
         </p:txBody>
       </p:sp>
@@ -6807,11 +6585,11 @@
           <a:bodyPr wrap="square" rtlCol="0" anchor="ctr"/>
           <a:lstStyle/>
           <a:p>
-            <a:pPr indent="0" marL="0">
-              <a:buNone/>
-            </a:pPr>
-            <a:r>
-              <a:rPr lang="en-US" sz="1400" b="1" dirty="0">
+            <a:pPr marL="0" indent="0">
+              <a:buNone/>
+            </a:pPr>
+            <a:r>
+              <a:rPr lang="en-US" sz="2400" b="1" dirty="0">
                 <a:solidFill>
                   <a:srgbClr val="1A2238"/>
                 </a:solidFill>
@@ -6821,7 +6599,7 @@
               </a:rPr>
               <a:t>Fatiga 88 — Crítico</a:t>
             </a:r>
-            <a:endParaRPr lang="en-US" sz="1400" dirty="0"/>
+            <a:endParaRPr lang="en-US" sz="2400" dirty="0"/>
           </a:p>
         </p:txBody>
       </p:sp>
@@ -6846,11 +6624,11 @@
           <a:bodyPr wrap="square" rtlCol="0" anchor="ctr"/>
           <a:lstStyle/>
           <a:p>
-            <a:pPr indent="0" marL="0">
-              <a:buNone/>
-            </a:pPr>
-            <a:r>
-              <a:rPr lang="en-US" sz="1050" dirty="0">
+            <a:pPr marL="0" indent="0">
+              <a:buNone/>
+            </a:pPr>
+            <a:r>
+              <a:rPr lang="en-US" sz="1600" dirty="0">
                 <a:solidFill>
                   <a:srgbClr val="6B7280"/>
                 </a:solidFill>
@@ -6860,7 +6638,7 @@
               </a:rPr>
               <a:t>Alerta crítica; se recomienda detener el vehículo</a:t>
             </a:r>
-            <a:endParaRPr lang="en-US" sz="1050" dirty="0"/>
+            <a:endParaRPr lang="en-US" sz="1600" dirty="0"/>
           </a:p>
         </p:txBody>
       </p:sp>
@@ -6885,11 +6663,11 @@
           <a:bodyPr wrap="square" rtlCol="0" anchor="ctr"/>
           <a:lstStyle/>
           <a:p>
-            <a:pPr indent="0" marL="0">
-              <a:buNone/>
-            </a:pPr>
-            <a:r>
-              <a:rPr lang="en-US" sz="900" dirty="0">
+            <a:pPr marL="0" indent="0">
+              <a:buNone/>
+            </a:pPr>
+            <a:r>
+              <a:rPr lang="en-US" sz="1200" dirty="0">
                 <a:solidFill>
                   <a:srgbClr val="6B7280"/>
                 </a:solidFill>
@@ -6899,7 +6677,7 @@
               </a:rPr>
               <a:t>DriveSafe AI  |  Detección de somnolencia con Machine Learning</a:t>
             </a:r>
-            <a:endParaRPr lang="en-US" sz="900" dirty="0"/>
+            <a:endParaRPr lang="en-US" sz="1200" dirty="0"/>
           </a:p>
         </p:txBody>
       </p:sp>
@@ -6924,11 +6702,11 @@
           <a:bodyPr wrap="square" rtlCol="0" anchor="ctr"/>
           <a:lstStyle/>
           <a:p>
-            <a:pPr algn="r" indent="0" marL="0">
-              <a:buNone/>
-            </a:pPr>
-            <a:r>
-              <a:rPr lang="en-US" sz="900" dirty="0">
+            <a:pPr marL="0" indent="0" algn="r">
+              <a:buNone/>
+            </a:pPr>
+            <a:r>
+              <a:rPr lang="en-US" sz="1200" dirty="0">
                 <a:solidFill>
                   <a:srgbClr val="6B7280"/>
                 </a:solidFill>
@@ -6938,7 +6716,7 @@
               </a:rPr>
               <a:t>15</a:t>
             </a:r>
-            <a:endParaRPr lang="en-US" sz="900" dirty="0"/>
+            <a:endParaRPr lang="en-US" sz="1200" dirty="0"/>
           </a:p>
         </p:txBody>
       </p:sp>
@@ -6958,6 +6736,7 @@
         <a:solidFill>
           <a:srgbClr val="FFFFFF"/>
         </a:solidFill>
+        <a:effectLst/>
       </p:bgPr>
     </p:bg>
     <p:spTree>
@@ -6995,11 +6774,11 @@
           <a:bodyPr wrap="square" rtlCol="0" anchor="ctr"/>
           <a:lstStyle/>
           <a:p>
-            <a:pPr indent="0" marL="0">
-              <a:buNone/>
-            </a:pPr>
-            <a:r>
-              <a:rPr lang="en-US" sz="1300" b="1" spc="200" kern="0" dirty="0">
+            <a:pPr marL="0" indent="0">
+              <a:buNone/>
+            </a:pPr>
+            <a:r>
+              <a:rPr lang="en-US" sz="2400" b="1" kern="0" spc="200" dirty="0">
                 <a:solidFill>
                   <a:srgbClr val="1C7293"/>
                 </a:solidFill>
@@ -7009,7 +6788,7 @@
               </a:rPr>
               <a:t>06 · INTEGRACIÓN Y RESULTADOS</a:t>
             </a:r>
-            <a:endParaRPr lang="en-US" sz="1300" dirty="0"/>
+            <a:endParaRPr lang="en-US" sz="2400" dirty="0"/>
           </a:p>
         </p:txBody>
       </p:sp>
@@ -7034,11 +6813,11 @@
           <a:bodyPr wrap="square" rtlCol="0" anchor="ctr"/>
           <a:lstStyle/>
           <a:p>
-            <a:pPr indent="0" marL="0">
-              <a:buNone/>
-            </a:pPr>
-            <a:r>
-              <a:rPr lang="en-US" sz="3000" b="1" dirty="0">
+            <a:pPr marL="0" indent="0">
+              <a:buNone/>
+            </a:pPr>
+            <a:r>
+              <a:rPr lang="en-US" sz="4800" b="1" dirty="0">
                 <a:solidFill>
                   <a:srgbClr val="1A2238"/>
                 </a:solidFill>
@@ -7048,7 +6827,7 @@
               </a:rPr>
               <a:t>El sistema en funcionamiento</a:t>
             </a:r>
-            <a:endParaRPr lang="en-US" sz="3000" dirty="0"/>
+            <a:endParaRPr lang="en-US" sz="4800" dirty="0"/>
           </a:p>
         </p:txBody>
       </p:sp>
@@ -7073,7 +6852,7 @@
           </a:solidFill>
           <a:ln/>
           <a:effectLst>
-            <a:outerShdw sx="100000" sy="100000" kx="0" ky="0" algn="bl" rotWithShape="0" blurRad="101600" dist="38100" dir="5400000">
+            <a:outerShdw blurRad="101600" dist="38100" dir="5400000" algn="bl" rotWithShape="0">
               <a:srgbClr val="1A2238">
                 <a:alpha val="15000"/>
               </a:srgbClr>
@@ -7083,15 +6862,15 @@
       </p:sp>
       <p:pic>
         <p:nvPicPr>
-          <p:cNvPr id="5" name="Image 0" descr="media/dashboard.png">    </p:cNvPr>
+          <p:cNvPr id="5" name="Image 0" descr="media/dashboard.png"/>
           <p:cNvPicPr>
             <a:picLocks noChangeAspect="1"/>
           </p:cNvPicPr>
           <p:nvPr/>
         </p:nvPicPr>
         <p:blipFill>
-          <a:blip r:embed="rId1"/>
-          <a:srcRect l="0" r="0" t="0" b="0"/>
+          <a:blip r:embed="rId3"/>
+          <a:srcRect/>
           <a:stretch/>
         </p:blipFill>
         <p:spPr>
@@ -7125,11 +6904,11 @@
           <a:bodyPr wrap="square" rtlCol="0" anchor="ctr"/>
           <a:lstStyle/>
           <a:p>
-            <a:pPr algn="ctr" indent="0" marL="0">
-              <a:buNone/>
-            </a:pPr>
-            <a:r>
-              <a:rPr lang="en-US" sz="1100" b="1" dirty="0">
+            <a:pPr marL="0" indent="0" algn="ctr">
+              <a:buNone/>
+            </a:pPr>
+            <a:r>
+              <a:rPr lang="en-US" sz="2000" b="1" dirty="0">
                 <a:solidFill>
                   <a:srgbClr val="1A2238"/>
                 </a:solidFill>
@@ -7139,7 +6918,7 @@
               </a:rPr>
               <a:t>Dashboard del administrador</a:t>
             </a:r>
-            <a:endParaRPr lang="en-US" sz="1100" dirty="0"/>
+            <a:endParaRPr lang="en-US" sz="2000" dirty="0"/>
           </a:p>
         </p:txBody>
       </p:sp>
@@ -7164,7 +6943,7 @@
           </a:solidFill>
           <a:ln/>
           <a:effectLst>
-            <a:outerShdw sx="100000" sy="100000" kx="0" ky="0" algn="bl" rotWithShape="0" blurRad="101600" dist="38100" dir="5400000">
+            <a:outerShdw blurRad="101600" dist="38100" dir="5400000" algn="bl" rotWithShape="0">
               <a:srgbClr val="1A2238">
                 <a:alpha val="15000"/>
               </a:srgbClr>
@@ -7174,15 +6953,15 @@
       </p:sp>
       <p:pic>
         <p:nvPicPr>
-          <p:cNvPr id="8" name="Image 1" descr="media/monitor_idle.png">    </p:cNvPr>
+          <p:cNvPr id="8" name="Image 1" descr="media/monitor_idle.png"/>
           <p:cNvPicPr>
             <a:picLocks noChangeAspect="1"/>
           </p:cNvPicPr>
           <p:nvPr/>
         </p:nvPicPr>
         <p:blipFill>
-          <a:blip r:embed="rId2"/>
-          <a:srcRect l="0" r="0" t="0" b="0"/>
+          <a:blip r:embed="rId4"/>
+          <a:srcRect/>
           <a:stretch/>
         </p:blipFill>
         <p:spPr>
@@ -7203,24 +6982,24 @@
         </p:nvSpPr>
         <p:spPr>
           <a:xfrm>
-            <a:off x="4407408" y="5440680"/>
-            <a:ext cx="3392424" cy="320040"/>
-          </a:xfrm>
-          <a:prstGeom prst="rect">
-            <a:avLst/>
-          </a:prstGeom>
-          <a:noFill/>
-          <a:ln/>
-        </p:spPr>
-        <p:txBody>
-          <a:bodyPr wrap="square" rtlCol="0" anchor="ctr"/>
-          <a:lstStyle/>
-          <a:p>
-            <a:pPr algn="ctr" indent="0" marL="0">
-              <a:buNone/>
-            </a:pPr>
-            <a:r>
-              <a:rPr lang="en-US" sz="1100" b="1" dirty="0">
+            <a:off x="4297680" y="5440680"/>
+            <a:ext cx="3611880" cy="320040"/>
+          </a:xfrm>
+          <a:prstGeom prst="rect">
+            <a:avLst/>
+          </a:prstGeom>
+          <a:noFill/>
+          <a:ln/>
+        </p:spPr>
+        <p:txBody>
+          <a:bodyPr wrap="square" rtlCol="0" anchor="ctr"/>
+          <a:lstStyle/>
+          <a:p>
+            <a:pPr marL="0" indent="0" algn="ctr">
+              <a:buNone/>
+            </a:pPr>
+            <a:r>
+              <a:rPr lang="en-US" sz="2000" b="1" dirty="0">
                 <a:solidFill>
                   <a:srgbClr val="1A2238"/>
                 </a:solidFill>
@@ -7230,7 +7009,7 @@
               </a:rPr>
               <a:t>Monitor antes de iniciar sesión</a:t>
             </a:r>
-            <a:endParaRPr lang="en-US" sz="1100" dirty="0"/>
+            <a:endParaRPr lang="en-US" sz="2000" dirty="0"/>
           </a:p>
         </p:txBody>
       </p:sp>
@@ -7255,7 +7034,7 @@
           </a:solidFill>
           <a:ln/>
           <a:effectLst>
-            <a:outerShdw sx="100000" sy="100000" kx="0" ky="0" algn="bl" rotWithShape="0" blurRad="101600" dist="38100" dir="5400000">
+            <a:outerShdw blurRad="101600" dist="38100" dir="5400000" algn="bl" rotWithShape="0">
               <a:srgbClr val="1A2238">
                 <a:alpha val="15000"/>
               </a:srgbClr>
@@ -7265,15 +7044,15 @@
       </p:sp>
       <p:pic>
         <p:nvPicPr>
-          <p:cNvPr id="11" name="Image 2" descr="media/monitor_alerta.png">    </p:cNvPr>
+          <p:cNvPr id="11" name="Image 2" descr="media/monitor_alerta.png"/>
           <p:cNvPicPr>
             <a:picLocks noChangeAspect="1"/>
           </p:cNvPicPr>
           <p:nvPr/>
         </p:nvPicPr>
         <p:blipFill>
-          <a:blip r:embed="rId3"/>
-          <a:srcRect l="0" r="0" t="0" b="0"/>
+          <a:blip r:embed="rId5"/>
+          <a:srcRect/>
           <a:stretch/>
         </p:blipFill>
         <p:spPr>
@@ -7307,11 +7086,11 @@
           <a:bodyPr wrap="square" rtlCol="0" anchor="ctr"/>
           <a:lstStyle/>
           <a:p>
-            <a:pPr algn="ctr" indent="0" marL="0">
-              <a:buNone/>
-            </a:pPr>
-            <a:r>
-              <a:rPr lang="en-US" sz="1100" b="1" dirty="0">
+            <a:pPr marL="0" indent="0" algn="ctr">
+              <a:buNone/>
+            </a:pPr>
+            <a:r>
+              <a:rPr lang="en-US" sz="2000" b="1" dirty="0">
                 <a:solidFill>
                   <a:srgbClr val="1A2238"/>
                 </a:solidFill>
@@ -7321,7 +7100,7 @@
               </a:rPr>
               <a:t>Alerta de somnolencia activa</a:t>
             </a:r>
-            <a:endParaRPr lang="en-US" sz="1100" dirty="0"/>
+            <a:endParaRPr lang="en-US" sz="2000" dirty="0"/>
           </a:p>
         </p:txBody>
       </p:sp>
@@ -7346,11 +7125,11 @@
           <a:bodyPr wrap="square" rtlCol="0" anchor="ctr"/>
           <a:lstStyle/>
           <a:p>
-            <a:pPr indent="0" marL="0">
-              <a:buNone/>
-            </a:pPr>
-            <a:r>
-              <a:rPr lang="en-US" sz="900" dirty="0">
+            <a:pPr marL="0" indent="0">
+              <a:buNone/>
+            </a:pPr>
+            <a:r>
+              <a:rPr lang="en-US" sz="1400" dirty="0">
                 <a:solidFill>
                   <a:srgbClr val="6B7280"/>
                 </a:solidFill>
@@ -7360,7 +7139,7 @@
               </a:rPr>
               <a:t>DriveSafe AI  |  Detección de somnolencia con Machine Learning</a:t>
             </a:r>
-            <a:endParaRPr lang="en-US" sz="900" dirty="0"/>
+            <a:endParaRPr lang="en-US" sz="1400" dirty="0"/>
           </a:p>
         </p:txBody>
       </p:sp>
@@ -7385,11 +7164,11 @@
           <a:bodyPr wrap="square" rtlCol="0" anchor="ctr"/>
           <a:lstStyle/>
           <a:p>
-            <a:pPr algn="r" indent="0" marL="0">
-              <a:buNone/>
-            </a:pPr>
-            <a:r>
-              <a:rPr lang="en-US" sz="900" dirty="0">
+            <a:pPr marL="0" indent="0" algn="r">
+              <a:buNone/>
+            </a:pPr>
+            <a:r>
+              <a:rPr lang="en-US" sz="1400" dirty="0">
                 <a:solidFill>
                   <a:srgbClr val="6B7280"/>
                 </a:solidFill>
@@ -7399,7 +7178,7 @@
               </a:rPr>
               <a:t>16</a:t>
             </a:r>
-            <a:endParaRPr lang="en-US" sz="900" dirty="0"/>
+            <a:endParaRPr lang="en-US" sz="1400" dirty="0"/>
           </a:p>
         </p:txBody>
       </p:sp>
@@ -7419,6 +7198,7 @@
         <a:solidFill>
           <a:srgbClr val="0F1B3C"/>
         </a:solidFill>
+        <a:effectLst/>
       </p:bgPr>
     </p:bg>
     <p:spTree>
@@ -7500,11 +7280,11 @@
           <a:bodyPr wrap="square" rtlCol="0" anchor="ctr"/>
           <a:lstStyle/>
           <a:p>
-            <a:pPr indent="0" marL="0">
-              <a:buNone/>
-            </a:pPr>
-            <a:r>
-              <a:rPr lang="en-US" sz="1300" b="1" spc="200" kern="0" dirty="0">
+            <a:pPr marL="0" indent="0">
+              <a:buNone/>
+            </a:pPr>
+            <a:r>
+              <a:rPr lang="en-US" b="1" kern="0" spc="200" dirty="0">
                 <a:solidFill>
                   <a:srgbClr val="5FBDB0"/>
                 </a:solidFill>
@@ -7514,7 +7294,7 @@
               </a:rPr>
               <a:t>CONCLUSIÓN</a:t>
             </a:r>
-            <a:endParaRPr lang="en-US" sz="1300" dirty="0"/>
+            <a:endParaRPr lang="en-US" dirty="0"/>
           </a:p>
         </p:txBody>
       </p:sp>
@@ -7526,24 +7306,24 @@
         </p:nvSpPr>
         <p:spPr>
           <a:xfrm>
-            <a:off x="548640" y="1051560"/>
-            <a:ext cx="10515600" cy="731520"/>
-          </a:xfrm>
-          <a:prstGeom prst="rect">
-            <a:avLst/>
-          </a:prstGeom>
-          <a:noFill/>
-          <a:ln/>
-        </p:spPr>
-        <p:txBody>
-          <a:bodyPr wrap="square" rtlCol="0" anchor="ctr"/>
-          <a:lstStyle/>
-          <a:p>
-            <a:pPr indent="0" marL="0">
-              <a:buNone/>
-            </a:pPr>
-            <a:r>
-              <a:rPr lang="en-US" sz="3000" b="1" dirty="0">
+            <a:off x="670560" y="1351026"/>
+            <a:ext cx="6489192" cy="731520"/>
+          </a:xfrm>
+          <a:prstGeom prst="rect">
+            <a:avLst/>
+          </a:prstGeom>
+          <a:noFill/>
+          <a:ln/>
+        </p:spPr>
+        <p:txBody>
+          <a:bodyPr wrap="square" rtlCol="0" anchor="ctr"/>
+          <a:lstStyle/>
+          <a:p>
+            <a:pPr marL="0" indent="0">
+              <a:buNone/>
+            </a:pPr>
+            <a:r>
+              <a:rPr lang="en-US" sz="4000" b="1" dirty="0">
                 <a:solidFill>
                   <a:srgbClr val="FFFFFF"/>
                 </a:solidFill>
@@ -7553,7 +7333,7 @@
               </a:rPr>
               <a:t>IA aplicada a la seguridad vial</a:t>
             </a:r>
-            <a:endParaRPr lang="en-US" sz="3000" dirty="0"/>
+            <a:endParaRPr lang="en-US" sz="4000" dirty="0"/>
           </a:p>
         </p:txBody>
       </p:sp>
@@ -7565,7 +7345,7 @@
         </p:nvSpPr>
         <p:spPr>
           <a:xfrm>
-            <a:off x="548640" y="1965960"/>
+            <a:off x="548640" y="2683764"/>
             <a:ext cx="6400800" cy="1188720"/>
           </a:xfrm>
           <a:prstGeom prst="rect">
@@ -7578,11 +7358,11 @@
           <a:bodyPr wrap="square" rtlCol="0" anchor="ctr"/>
           <a:lstStyle/>
           <a:p>
-            <a:pPr indent="0" marL="0">
-              <a:buNone/>
-            </a:pPr>
-            <a:r>
-              <a:rPr lang="en-US" sz="1400" dirty="0">
+            <a:pPr marL="0" indent="0">
+              <a:buNone/>
+            </a:pPr>
+            <a:r>
+              <a:rPr lang="en-US" sz="2000" dirty="0">
                 <a:solidFill>
                   <a:srgbClr val="C7CEE6"/>
                 </a:solidFill>
@@ -7592,7 +7372,7 @@
               </a:rPr>
               <a:t>DriveSafe AI integra visión artificial, monitoreo en tiempo real y un modelo Random Forest para estimar la fatiga del conductor a partir de la apertura de ojos, los bostezos y el tiempo de conducción.</a:t>
             </a:r>
-            <a:endParaRPr lang="en-US" sz="1400" dirty="0"/>
+            <a:endParaRPr lang="en-US" sz="2000" dirty="0"/>
           </a:p>
         </p:txBody>
       </p:sp>
@@ -7604,7 +7384,7 @@
         </p:nvSpPr>
         <p:spPr>
           <a:xfrm>
-            <a:off x="548640" y="3246120"/>
+            <a:off x="548640" y="4105656"/>
             <a:ext cx="6400800" cy="1188720"/>
           </a:xfrm>
           <a:prstGeom prst="rect">
@@ -7617,11 +7397,11 @@
           <a:bodyPr wrap="square" rtlCol="0" anchor="ctr"/>
           <a:lstStyle/>
           <a:p>
-            <a:pPr indent="0" marL="0">
-              <a:buNone/>
-            </a:pPr>
-            <a:r>
-              <a:rPr lang="en-US" sz="1400" dirty="0">
+            <a:pPr marL="0" indent="0">
+              <a:buNone/>
+            </a:pPr>
+            <a:r>
+              <a:rPr lang="en-US" sz="2000" dirty="0">
                 <a:solidFill>
                   <a:srgbClr val="C7CEE6"/>
                 </a:solidFill>
@@ -7631,36 +7411,36 @@
               </a:rPr>
               <a:t>El desacople del servicio de IA mediante FastAPI facilita el mantenimiento y la actualización del modelo, mientras que la recolección continua de muestras permite una mejora progresiva de las predicciones.</a:t>
             </a:r>
-            <a:endParaRPr lang="en-US" sz="1400" dirty="0"/>
-          </a:p>
-        </p:txBody>
-      </p:sp>
-      <p:sp>
-        <p:nvSpPr>
-          <p:cNvPr id="8" name="Text 6"/>
-          <p:cNvSpPr/>
-          <p:nvPr/>
-        </p:nvSpPr>
-        <p:spPr>
-          <a:xfrm>
-            <a:off x="7406640" y="2011680"/>
-            <a:ext cx="2011680" cy="914400"/>
-          </a:xfrm>
-          <a:prstGeom prst="rect">
-            <a:avLst/>
-          </a:prstGeom>
-          <a:noFill/>
-          <a:ln/>
-        </p:spPr>
-        <p:txBody>
-          <a:bodyPr wrap="square" rtlCol="0" anchor="ctr"/>
-          <a:lstStyle/>
-          <a:p>
-            <a:pPr indent="0" marL="0">
-              <a:buNone/>
-            </a:pPr>
-            <a:r>
-              <a:rPr lang="en-US" sz="4400" b="1" dirty="0">
+            <a:endParaRPr lang="en-US" sz="2000" dirty="0"/>
+          </a:p>
+        </p:txBody>
+      </p:sp>
+      <p:sp>
+        <p:nvSpPr>
+          <p:cNvPr id="14" name="Text 12"/>
+          <p:cNvSpPr/>
+          <p:nvPr/>
+        </p:nvSpPr>
+        <p:spPr>
+          <a:xfrm>
+            <a:off x="7406640" y="2615184"/>
+            <a:ext cx="914400" cy="731520"/>
+          </a:xfrm>
+          <a:prstGeom prst="rect">
+            <a:avLst/>
+          </a:prstGeom>
+          <a:noFill/>
+          <a:ln/>
+        </p:spPr>
+        <p:txBody>
+          <a:bodyPr wrap="square" rtlCol="0" anchor="ctr"/>
+          <a:lstStyle/>
+          <a:p>
+            <a:pPr marL="0" indent="0">
+              <a:buNone/>
+            </a:pPr>
+            <a:r>
+              <a:rPr lang="en-US" sz="5400" b="1" dirty="0">
                 <a:solidFill>
                   <a:srgbClr val="5FBDB0"/>
                 </a:solidFill>
@@ -7670,77 +7450,77 @@
               </a:rPr>
               <a:t>3</a:t>
             </a:r>
-            <a:endParaRPr lang="en-US" sz="4400" dirty="0"/>
-          </a:p>
-        </p:txBody>
-      </p:sp>
-      <p:sp>
-        <p:nvSpPr>
-          <p:cNvPr id="9" name="Text 7"/>
-          <p:cNvSpPr/>
-          <p:nvPr/>
-        </p:nvSpPr>
-        <p:spPr>
-          <a:xfrm>
-            <a:off x="7406640" y="2788920"/>
-            <a:ext cx="4023360" cy="548640"/>
-          </a:xfrm>
-          <a:prstGeom prst="rect">
-            <a:avLst/>
-          </a:prstGeom>
-          <a:noFill/>
-          <a:ln/>
-        </p:spPr>
-        <p:txBody>
-          <a:bodyPr wrap="square" rtlCol="0" anchor="ctr"/>
-          <a:lstStyle/>
-          <a:p>
-            <a:pPr indent="0" marL="0">
-              <a:buNone/>
-            </a:pPr>
-            <a:r>
-              <a:rPr lang="en-US" sz="1150" dirty="0">
-                <a:solidFill>
-                  <a:srgbClr val="9AA5C4"/>
-                </a:solidFill>
-                <a:latin typeface="Calibri" pitchFamily="34" charset="0"/>
-                <a:ea typeface="Calibri" pitchFamily="34" charset="-122"/>
-                <a:cs typeface="Calibri" pitchFamily="34" charset="-120"/>
-              </a:rPr>
-              <a:t>variables de entrada</a:t>
-            </a:r>
-            <a:endParaRPr lang="en-US" sz="1150" dirty="0"/>
-          </a:p>
-        </p:txBody>
-      </p:sp>
-      <p:sp>
-        <p:nvSpPr>
-          <p:cNvPr id="10" name="Text 8"/>
-          <p:cNvSpPr/>
-          <p:nvPr/>
-        </p:nvSpPr>
-        <p:spPr>
-          <a:xfrm>
-            <a:off x="7406640" y="2011680"/>
-            <a:ext cx="2011680" cy="914400"/>
-          </a:xfrm>
-          <a:prstGeom prst="rect">
-            <a:avLst/>
-          </a:prstGeom>
-          <a:noFill/>
-          <a:ln/>
-        </p:spPr>
-        <p:txBody>
-          <a:bodyPr wrap="square" rtlCol="0" anchor="ctr"/>
-          <a:lstStyle/>
-          <a:p>
-            <a:pPr indent="0" marL="0">
-              <a:buNone/>
-            </a:pPr>
-            <a:r>
-              <a:rPr lang="en-US" sz="4400" b="1" dirty="0">
-                <a:solidFill>
-                  <a:srgbClr val="5FBDB0"/>
+            <a:endParaRPr lang="en-US" sz="5400" dirty="0"/>
+          </a:p>
+        </p:txBody>
+      </p:sp>
+      <p:sp>
+        <p:nvSpPr>
+          <p:cNvPr id="15" name="Text 13"/>
+          <p:cNvSpPr/>
+          <p:nvPr/>
+        </p:nvSpPr>
+        <p:spPr>
+          <a:xfrm>
+            <a:off x="8321040" y="2683764"/>
+            <a:ext cx="3200400" cy="548640"/>
+          </a:xfrm>
+          <a:prstGeom prst="rect">
+            <a:avLst/>
+          </a:prstGeom>
+          <a:noFill/>
+          <a:ln/>
+        </p:spPr>
+        <p:txBody>
+          <a:bodyPr wrap="square" rtlCol="0" anchor="ctr"/>
+          <a:lstStyle/>
+          <a:p>
+            <a:pPr marL="0" indent="0">
+              <a:buNone/>
+            </a:pPr>
+            <a:r>
+              <a:rPr lang="en-US" sz="1600" dirty="0">
+                <a:solidFill>
+                  <a:srgbClr val="C7CEE6"/>
+                </a:solidFill>
+                <a:latin typeface="Calibri" pitchFamily="34" charset="0"/>
+                <a:ea typeface="Calibri" pitchFamily="34" charset="-122"/>
+                <a:cs typeface="Calibri" pitchFamily="34" charset="-120"/>
+              </a:rPr>
+              <a:t>variables de entrada (ojos, bostezos, tiempo)</a:t>
+            </a:r>
+            <a:endParaRPr lang="en-US" sz="1600" dirty="0"/>
+          </a:p>
+        </p:txBody>
+      </p:sp>
+      <p:sp>
+        <p:nvSpPr>
+          <p:cNvPr id="16" name="Text 14"/>
+          <p:cNvSpPr/>
+          <p:nvPr/>
+        </p:nvSpPr>
+        <p:spPr>
+          <a:xfrm>
+            <a:off x="7406640" y="3401568"/>
+            <a:ext cx="914400" cy="731520"/>
+          </a:xfrm>
+          <a:prstGeom prst="rect">
+            <a:avLst/>
+          </a:prstGeom>
+          <a:noFill/>
+          <a:ln/>
+        </p:spPr>
+        <p:txBody>
+          <a:bodyPr wrap="square" rtlCol="0" anchor="ctr"/>
+          <a:lstStyle/>
+          <a:p>
+            <a:pPr marL="0" indent="0">
+              <a:buNone/>
+            </a:pPr>
+            <a:r>
+              <a:rPr lang="en-US" sz="5400" b="1" dirty="0">
+                <a:solidFill>
+                  <a:srgbClr val="F2A541"/>
                 </a:solidFill>
                 <a:latin typeface="Cambria" pitchFamily="34" charset="0"/>
                 <a:ea typeface="Cambria" pitchFamily="34" charset="-122"/>
@@ -7748,77 +7528,77 @@
               </a:rPr>
               <a:t>4</a:t>
             </a:r>
-            <a:endParaRPr lang="en-US" sz="4400" dirty="0"/>
-          </a:p>
-        </p:txBody>
-      </p:sp>
-      <p:sp>
-        <p:nvSpPr>
-          <p:cNvPr id="11" name="Text 9"/>
-          <p:cNvSpPr/>
-          <p:nvPr/>
-        </p:nvSpPr>
-        <p:spPr>
-          <a:xfrm>
-            <a:off x="7406640" y="2788920"/>
-            <a:ext cx="4023360" cy="548640"/>
-          </a:xfrm>
-          <a:prstGeom prst="rect">
-            <a:avLst/>
-          </a:prstGeom>
-          <a:noFill/>
-          <a:ln/>
-        </p:spPr>
-        <p:txBody>
-          <a:bodyPr wrap="square" rtlCol="0" anchor="ctr"/>
-          <a:lstStyle/>
-          <a:p>
-            <a:pPr indent="0" marL="0">
-              <a:buNone/>
-            </a:pPr>
-            <a:r>
-              <a:rPr lang="en-US" sz="1150" dirty="0">
-                <a:solidFill>
-                  <a:srgbClr val="9AA5C4"/>
-                </a:solidFill>
-                <a:latin typeface="Calibri" pitchFamily="34" charset="0"/>
-                <a:ea typeface="Calibri" pitchFamily="34" charset="-122"/>
-                <a:cs typeface="Calibri" pitchFamily="34" charset="-120"/>
-              </a:rPr>
-              <a:t>niveles de riesgo</a:t>
-            </a:r>
-            <a:endParaRPr lang="en-US" sz="1150" dirty="0"/>
-          </a:p>
-        </p:txBody>
-      </p:sp>
-      <p:sp>
-        <p:nvSpPr>
-          <p:cNvPr id="12" name="Text 10"/>
-          <p:cNvSpPr/>
-          <p:nvPr/>
-        </p:nvSpPr>
-        <p:spPr>
-          <a:xfrm>
-            <a:off x="7406640" y="2011680"/>
-            <a:ext cx="2011680" cy="914400"/>
-          </a:xfrm>
-          <a:prstGeom prst="rect">
-            <a:avLst/>
-          </a:prstGeom>
-          <a:noFill/>
-          <a:ln/>
-        </p:spPr>
-        <p:txBody>
-          <a:bodyPr wrap="square" rtlCol="0" anchor="ctr"/>
-          <a:lstStyle/>
-          <a:p>
-            <a:pPr indent="0" marL="0">
-              <a:buNone/>
-            </a:pPr>
-            <a:r>
-              <a:rPr lang="en-US" sz="4400" b="1" dirty="0">
-                <a:solidFill>
-                  <a:srgbClr val="5FBDB0"/>
+            <a:endParaRPr lang="en-US" sz="5400" dirty="0"/>
+          </a:p>
+        </p:txBody>
+      </p:sp>
+      <p:sp>
+        <p:nvSpPr>
+          <p:cNvPr id="17" name="Text 15"/>
+          <p:cNvSpPr/>
+          <p:nvPr/>
+        </p:nvSpPr>
+        <p:spPr>
+          <a:xfrm>
+            <a:off x="8412480" y="3538728"/>
+            <a:ext cx="3200400" cy="548640"/>
+          </a:xfrm>
+          <a:prstGeom prst="rect">
+            <a:avLst/>
+          </a:prstGeom>
+          <a:noFill/>
+          <a:ln/>
+        </p:spPr>
+        <p:txBody>
+          <a:bodyPr wrap="square" rtlCol="0" anchor="ctr"/>
+          <a:lstStyle/>
+          <a:p>
+            <a:pPr marL="0" indent="0">
+              <a:buNone/>
+            </a:pPr>
+            <a:r>
+              <a:rPr lang="en-US" sz="1600" dirty="0">
+                <a:solidFill>
+                  <a:srgbClr val="C7CEE6"/>
+                </a:solidFill>
+                <a:latin typeface="Calibri" pitchFamily="34" charset="0"/>
+                <a:ea typeface="Calibri" pitchFamily="34" charset="-122"/>
+                <a:cs typeface="Calibri" pitchFamily="34" charset="-120"/>
+              </a:rPr>
+              <a:t>niveles de riesgo clasificados automáticamente</a:t>
+            </a:r>
+            <a:endParaRPr lang="en-US" sz="1600" dirty="0"/>
+          </a:p>
+        </p:txBody>
+      </p:sp>
+      <p:sp>
+        <p:nvSpPr>
+          <p:cNvPr id="18" name="Text 16"/>
+          <p:cNvSpPr/>
+          <p:nvPr/>
+        </p:nvSpPr>
+        <p:spPr>
+          <a:xfrm>
+            <a:off x="7406640" y="4315968"/>
+            <a:ext cx="914400" cy="731520"/>
+          </a:xfrm>
+          <a:prstGeom prst="rect">
+            <a:avLst/>
+          </a:prstGeom>
+          <a:noFill/>
+          <a:ln/>
+        </p:spPr>
+        <p:txBody>
+          <a:bodyPr wrap="square" rtlCol="0" anchor="ctr"/>
+          <a:lstStyle/>
+          <a:p>
+            <a:pPr marL="0" indent="0">
+              <a:buNone/>
+            </a:pPr>
+            <a:r>
+              <a:rPr lang="en-US" sz="5400" b="1" dirty="0">
+                <a:solidFill>
+                  <a:srgbClr val="E8505B"/>
                 </a:solidFill>
                 <a:latin typeface="Cambria" pitchFamily="34" charset="0"/>
                 <a:ea typeface="Cambria" pitchFamily="34" charset="-122"/>
@@ -7826,114 +7606,19 @@
               </a:rPr>
               <a:t>2</a:t>
             </a:r>
-            <a:endParaRPr lang="en-US" sz="4400" dirty="0"/>
-          </a:p>
-        </p:txBody>
-      </p:sp>
-      <p:sp>
-        <p:nvSpPr>
-          <p:cNvPr id="13" name="Text 11"/>
-          <p:cNvSpPr/>
-          <p:nvPr/>
-        </p:nvSpPr>
-        <p:spPr>
-          <a:xfrm>
-            <a:off x="7406640" y="2788920"/>
-            <a:ext cx="4023360" cy="548640"/>
-          </a:xfrm>
-          <a:prstGeom prst="rect">
-            <a:avLst/>
-          </a:prstGeom>
-          <a:noFill/>
-          <a:ln/>
-        </p:spPr>
-        <p:txBody>
-          <a:bodyPr wrap="square" rtlCol="0" anchor="ctr"/>
-          <a:lstStyle/>
-          <a:p>
-            <a:pPr indent="0" marL="0">
-              <a:buNone/>
-            </a:pPr>
-            <a:r>
-              <a:rPr lang="en-US" sz="1150" dirty="0">
-                <a:solidFill>
-                  <a:srgbClr val="9AA5C4"/>
-                </a:solidFill>
-                <a:latin typeface="Calibri" pitchFamily="34" charset="0"/>
-                <a:ea typeface="Calibri" pitchFamily="34" charset="-122"/>
-                <a:cs typeface="Calibri" pitchFamily="34" charset="-120"/>
-              </a:rPr>
-              <a:t>mecanismos de predicción</a:t>
-            </a:r>
-            <a:endParaRPr lang="en-US" sz="1150" dirty="0"/>
-          </a:p>
-          <a:p>
-            <a:pPr indent="0" marL="0">
-              <a:buNone/>
-            </a:pPr>
-            <a:r>
-              <a:rPr lang="en-US" sz="1150" dirty="0">
-                <a:solidFill>
-                  <a:srgbClr val="9AA5C4"/>
-                </a:solidFill>
-                <a:latin typeface="Calibri" pitchFamily="34" charset="0"/>
-                <a:ea typeface="Calibri" pitchFamily="34" charset="-122"/>
-                <a:cs typeface="Calibri" pitchFamily="34" charset="-120"/>
-              </a:rPr>
-              <a:t>(API + fallback)</a:t>
-            </a:r>
-            <a:endParaRPr lang="en-US" sz="1150" dirty="0"/>
-          </a:p>
-        </p:txBody>
-      </p:sp>
-      <p:sp>
-        <p:nvSpPr>
-          <p:cNvPr id="14" name="Text 12"/>
-          <p:cNvSpPr/>
-          <p:nvPr/>
-        </p:nvSpPr>
-        <p:spPr>
-          <a:xfrm>
-            <a:off x="7406640" y="1965960"/>
-            <a:ext cx="914400" cy="731520"/>
-          </a:xfrm>
-          <a:prstGeom prst="rect">
-            <a:avLst/>
-          </a:prstGeom>
-          <a:noFill/>
-          <a:ln/>
-        </p:spPr>
-        <p:txBody>
-          <a:bodyPr wrap="square" rtlCol="0" anchor="ctr"/>
-          <a:lstStyle/>
-          <a:p>
-            <a:pPr indent="0" marL="0">
-              <a:buNone/>
-            </a:pPr>
-            <a:r>
-              <a:rPr lang="en-US" sz="4000" b="1" dirty="0">
-                <a:solidFill>
-                  <a:srgbClr val="5FBDB0"/>
-                </a:solidFill>
-                <a:latin typeface="Cambria" pitchFamily="34" charset="0"/>
-                <a:ea typeface="Cambria" pitchFamily="34" charset="-122"/>
-                <a:cs typeface="Cambria" pitchFamily="34" charset="-120"/>
-              </a:rPr>
-              <a:t>3</a:t>
-            </a:r>
-            <a:endParaRPr lang="en-US" sz="4000" dirty="0"/>
-          </a:p>
-        </p:txBody>
-      </p:sp>
-      <p:sp>
-        <p:nvSpPr>
-          <p:cNvPr id="15" name="Text 13"/>
-          <p:cNvSpPr/>
-          <p:nvPr/>
-        </p:nvSpPr>
-        <p:spPr>
-          <a:xfrm>
-            <a:off x="8412480" y="2103120"/>
+            <a:endParaRPr lang="en-US" sz="5400" dirty="0"/>
+          </a:p>
+        </p:txBody>
+      </p:sp>
+      <p:sp>
+        <p:nvSpPr>
+          <p:cNvPr id="19" name="Text 17"/>
+          <p:cNvSpPr/>
+          <p:nvPr/>
+        </p:nvSpPr>
+        <p:spPr>
+          <a:xfrm>
+            <a:off x="8412480" y="4453128"/>
             <a:ext cx="3200400" cy="548640"/>
           </a:xfrm>
           <a:prstGeom prst="rect">
@@ -7946,11 +7631,11 @@
           <a:bodyPr wrap="square" rtlCol="0" anchor="ctr"/>
           <a:lstStyle/>
           <a:p>
-            <a:pPr indent="0" marL="0">
-              <a:buNone/>
-            </a:pPr>
-            <a:r>
-              <a:rPr lang="en-US" sz="1100" dirty="0">
+            <a:pPr marL="0" indent="0">
+              <a:buNone/>
+            </a:pPr>
+            <a:r>
+              <a:rPr lang="en-US" sz="1600" dirty="0">
                 <a:solidFill>
                   <a:srgbClr val="C7CEE6"/>
                 </a:solidFill>
@@ -7958,165 +7643,9 @@
                 <a:ea typeface="Calibri" pitchFamily="34" charset="-122"/>
                 <a:cs typeface="Calibri" pitchFamily="34" charset="-120"/>
               </a:rPr>
-              <a:t>variables de entrada (ojos, bostezos, tiempo)</a:t>
-            </a:r>
-            <a:endParaRPr lang="en-US" sz="1100" dirty="0"/>
-          </a:p>
-        </p:txBody>
-      </p:sp>
-      <p:sp>
-        <p:nvSpPr>
-          <p:cNvPr id="16" name="Text 14"/>
-          <p:cNvSpPr/>
-          <p:nvPr/>
-        </p:nvSpPr>
-        <p:spPr>
-          <a:xfrm>
-            <a:off x="7406640" y="2880360"/>
-            <a:ext cx="914400" cy="731520"/>
-          </a:xfrm>
-          <a:prstGeom prst="rect">
-            <a:avLst/>
-          </a:prstGeom>
-          <a:noFill/>
-          <a:ln/>
-        </p:spPr>
-        <p:txBody>
-          <a:bodyPr wrap="square" rtlCol="0" anchor="ctr"/>
-          <a:lstStyle/>
-          <a:p>
-            <a:pPr indent="0" marL="0">
-              <a:buNone/>
-            </a:pPr>
-            <a:r>
-              <a:rPr lang="en-US" sz="4000" b="1" dirty="0">
-                <a:solidFill>
-                  <a:srgbClr val="F2A541"/>
-                </a:solidFill>
-                <a:latin typeface="Cambria" pitchFamily="34" charset="0"/>
-                <a:ea typeface="Cambria" pitchFamily="34" charset="-122"/>
-                <a:cs typeface="Cambria" pitchFamily="34" charset="-120"/>
-              </a:rPr>
-              <a:t>4</a:t>
-            </a:r>
-            <a:endParaRPr lang="en-US" sz="4000" dirty="0"/>
-          </a:p>
-        </p:txBody>
-      </p:sp>
-      <p:sp>
-        <p:nvSpPr>
-          <p:cNvPr id="17" name="Text 15"/>
-          <p:cNvSpPr/>
-          <p:nvPr/>
-        </p:nvSpPr>
-        <p:spPr>
-          <a:xfrm>
-            <a:off x="8412480" y="3017520"/>
-            <a:ext cx="3200400" cy="548640"/>
-          </a:xfrm>
-          <a:prstGeom prst="rect">
-            <a:avLst/>
-          </a:prstGeom>
-          <a:noFill/>
-          <a:ln/>
-        </p:spPr>
-        <p:txBody>
-          <a:bodyPr wrap="square" rtlCol="0" anchor="ctr"/>
-          <a:lstStyle/>
-          <a:p>
-            <a:pPr indent="0" marL="0">
-              <a:buNone/>
-            </a:pPr>
-            <a:r>
-              <a:rPr lang="en-US" sz="1100" dirty="0">
-                <a:solidFill>
-                  <a:srgbClr val="C7CEE6"/>
-                </a:solidFill>
-                <a:latin typeface="Calibri" pitchFamily="34" charset="0"/>
-                <a:ea typeface="Calibri" pitchFamily="34" charset="-122"/>
-                <a:cs typeface="Calibri" pitchFamily="34" charset="-120"/>
-              </a:rPr>
-              <a:t>niveles de riesgo clasificados automáticamente</a:t>
-            </a:r>
-            <a:endParaRPr lang="en-US" sz="1100" dirty="0"/>
-          </a:p>
-        </p:txBody>
-      </p:sp>
-      <p:sp>
-        <p:nvSpPr>
-          <p:cNvPr id="18" name="Text 16"/>
-          <p:cNvSpPr/>
-          <p:nvPr/>
-        </p:nvSpPr>
-        <p:spPr>
-          <a:xfrm>
-            <a:off x="7406640" y="3794760"/>
-            <a:ext cx="914400" cy="731520"/>
-          </a:xfrm>
-          <a:prstGeom prst="rect">
-            <a:avLst/>
-          </a:prstGeom>
-          <a:noFill/>
-          <a:ln/>
-        </p:spPr>
-        <p:txBody>
-          <a:bodyPr wrap="square" rtlCol="0" anchor="ctr"/>
-          <a:lstStyle/>
-          <a:p>
-            <a:pPr indent="0" marL="0">
-              <a:buNone/>
-            </a:pPr>
-            <a:r>
-              <a:rPr lang="en-US" sz="4000" b="1" dirty="0">
-                <a:solidFill>
-                  <a:srgbClr val="E8505B"/>
-                </a:solidFill>
-                <a:latin typeface="Cambria" pitchFamily="34" charset="0"/>
-                <a:ea typeface="Cambria" pitchFamily="34" charset="-122"/>
-                <a:cs typeface="Cambria" pitchFamily="34" charset="-120"/>
-              </a:rPr>
-              <a:t>2</a:t>
-            </a:r>
-            <a:endParaRPr lang="en-US" sz="4000" dirty="0"/>
-          </a:p>
-        </p:txBody>
-      </p:sp>
-      <p:sp>
-        <p:nvSpPr>
-          <p:cNvPr id="19" name="Text 17"/>
-          <p:cNvSpPr/>
-          <p:nvPr/>
-        </p:nvSpPr>
-        <p:spPr>
-          <a:xfrm>
-            <a:off x="8412480" y="3931920"/>
-            <a:ext cx="3200400" cy="548640"/>
-          </a:xfrm>
-          <a:prstGeom prst="rect">
-            <a:avLst/>
-          </a:prstGeom>
-          <a:noFill/>
-          <a:ln/>
-        </p:spPr>
-        <p:txBody>
-          <a:bodyPr wrap="square" rtlCol="0" anchor="ctr"/>
-          <a:lstStyle/>
-          <a:p>
-            <a:pPr indent="0" marL="0">
-              <a:buNone/>
-            </a:pPr>
-            <a:r>
-              <a:rPr lang="en-US" sz="1100" dirty="0">
-                <a:solidFill>
-                  <a:srgbClr val="C7CEE6"/>
-                </a:solidFill>
-                <a:latin typeface="Calibri" pitchFamily="34" charset="0"/>
-                <a:ea typeface="Calibri" pitchFamily="34" charset="-122"/>
-                <a:cs typeface="Calibri" pitchFamily="34" charset="-120"/>
-              </a:rPr>
               <a:t>mecanismos de predicción: API FastAPI + fallback local</a:t>
             </a:r>
-            <a:endParaRPr lang="en-US" sz="1100" dirty="0"/>
+            <a:endParaRPr lang="en-US" sz="1600" dirty="0"/>
           </a:p>
         </p:txBody>
       </p:sp>
@@ -8161,11 +7690,11 @@
           <a:bodyPr wrap="square" rtlCol="0" anchor="ctr"/>
           <a:lstStyle/>
           <a:p>
-            <a:pPr indent="0" marL="0">
-              <a:buNone/>
-            </a:pPr>
-            <a:r>
-              <a:rPr lang="en-US" sz="1200" dirty="0">
+            <a:pPr marL="0" indent="0">
+              <a:buNone/>
+            </a:pPr>
+            <a:r>
+              <a:rPr lang="en-US" dirty="0">
                 <a:solidFill>
                   <a:srgbClr val="9AA5C4"/>
                 </a:solidFill>
@@ -8175,7 +7704,7 @@
               </a:rPr>
               <a:t>Gracias — Universidad Mayor de San Andrés · Carrera de Informática</a:t>
             </a:r>
-            <a:endParaRPr lang="en-US" sz="1200" dirty="0"/>
+            <a:endParaRPr lang="en-US" dirty="0"/>
           </a:p>
         </p:txBody>
       </p:sp>
@@ -8195,6 +7724,7 @@
         <a:solidFill>
           <a:srgbClr val="FFFFFF"/>
         </a:solidFill>
+        <a:effectLst/>
       </p:bgPr>
     </p:bg>
     <p:spTree>
@@ -8232,11 +7762,11 @@
           <a:bodyPr wrap="square" rtlCol="0" anchor="ctr"/>
           <a:lstStyle/>
           <a:p>
-            <a:pPr indent="0" marL="0">
-              <a:buNone/>
-            </a:pPr>
-            <a:r>
-              <a:rPr lang="en-US" sz="1300" b="1" spc="200" kern="0" dirty="0">
+            <a:pPr marL="0" indent="0">
+              <a:buNone/>
+            </a:pPr>
+            <a:r>
+              <a:rPr lang="en-US" b="1" kern="0" spc="200" dirty="0">
                 <a:solidFill>
                   <a:srgbClr val="1C7293"/>
                 </a:solidFill>
@@ -8246,7 +7776,7 @@
               </a:rPr>
               <a:t>CONTENIDO</a:t>
             </a:r>
-            <a:endParaRPr lang="en-US" sz="1300" dirty="0"/>
+            <a:endParaRPr lang="en-US" dirty="0"/>
           </a:p>
         </p:txBody>
       </p:sp>
@@ -8271,11 +7801,11 @@
           <a:bodyPr wrap="square" rtlCol="0" anchor="ctr"/>
           <a:lstStyle/>
           <a:p>
-            <a:pPr indent="0" marL="0">
-              <a:buNone/>
-            </a:pPr>
-            <a:r>
-              <a:rPr lang="en-US" sz="3000" b="1" dirty="0">
+            <a:pPr marL="0" indent="0">
+              <a:buNone/>
+            </a:pPr>
+            <a:r>
+              <a:rPr lang="en-US" sz="4000" b="1" dirty="0">
                 <a:solidFill>
                   <a:srgbClr val="1A2238"/>
                 </a:solidFill>
@@ -8285,7 +7815,7 @@
               </a:rPr>
               <a:t>De los datos al modelo en producción</a:t>
             </a:r>
-            <a:endParaRPr lang="en-US" sz="3000" dirty="0"/>
+            <a:endParaRPr lang="en-US" sz="4000" dirty="0"/>
           </a:p>
         </p:txBody>
       </p:sp>
@@ -8310,7 +7840,7 @@
           </a:solidFill>
           <a:ln/>
           <a:effectLst>
-            <a:outerShdw sx="100000" sy="100000" kx="0" ky="0" algn="bl" rotWithShape="0" blurRad="76200" dist="25400" dir="5400000">
+            <a:outerShdw blurRad="76200" dist="25400" dir="5400000" algn="bl" rotWithShape="0">
               <a:srgbClr val="1A2238">
                 <a:alpha val="12000"/>
               </a:srgbClr>
@@ -8339,11 +7869,11 @@
           <a:bodyPr wrap="square" rtlCol="0" anchor="ctr"/>
           <a:lstStyle/>
           <a:p>
-            <a:pPr indent="0" marL="0">
-              <a:buNone/>
-            </a:pPr>
-            <a:r>
-              <a:rPr lang="en-US" sz="2600" b="1" dirty="0">
+            <a:pPr marL="0" indent="0">
+              <a:buNone/>
+            </a:pPr>
+            <a:r>
+              <a:rPr lang="en-US" sz="3600" b="1" dirty="0">
                 <a:solidFill>
                   <a:srgbClr val="1C7293"/>
                 </a:solidFill>
@@ -8353,7 +7883,7 @@
               </a:rPr>
               <a:t>01</a:t>
             </a:r>
-            <a:endParaRPr lang="en-US" sz="2600" dirty="0"/>
+            <a:endParaRPr lang="en-US" sz="3600" dirty="0"/>
           </a:p>
         </p:txBody>
       </p:sp>
@@ -8378,11 +7908,11 @@
           <a:bodyPr wrap="square" rtlCol="0" anchor="ctr"/>
           <a:lstStyle/>
           <a:p>
-            <a:pPr indent="0" marL="0">
-              <a:buNone/>
-            </a:pPr>
-            <a:r>
-              <a:rPr lang="en-US" sz="1500" b="1" dirty="0">
+            <a:pPr marL="0" indent="0">
+              <a:buNone/>
+            </a:pPr>
+            <a:r>
+              <a:rPr lang="en-US" sz="2000" b="1" dirty="0">
                 <a:solidFill>
                   <a:srgbClr val="1A2238"/>
                 </a:solidFill>
@@ -8392,7 +7922,7 @@
               </a:rPr>
               <a:t>Dataset y variables</a:t>
             </a:r>
-            <a:endParaRPr lang="en-US" sz="1500" dirty="0"/>
+            <a:endParaRPr lang="en-US" sz="2000" dirty="0"/>
           </a:p>
         </p:txBody>
       </p:sp>
@@ -8417,11 +7947,11 @@
           <a:bodyPr wrap="square" rtlCol="0" anchor="ctr"/>
           <a:lstStyle/>
           <a:p>
-            <a:pPr indent="0" marL="0">
-              <a:buNone/>
-            </a:pPr>
-            <a:r>
-              <a:rPr lang="en-US" sz="1100" dirty="0">
+            <a:pPr marL="0" indent="0">
+              <a:buNone/>
+            </a:pPr>
+            <a:r>
+              <a:rPr lang="en-US" sz="1600" dirty="0">
                 <a:solidFill>
                   <a:srgbClr val="6B7280"/>
                 </a:solidFill>
@@ -8431,7 +7961,7 @@
               </a:rPr>
               <a:t>Origen de los datos y su estructura</a:t>
             </a:r>
-            <a:endParaRPr lang="en-US" sz="1100" dirty="0"/>
+            <a:endParaRPr lang="en-US" sz="1600" dirty="0"/>
           </a:p>
         </p:txBody>
       </p:sp>
@@ -8456,7 +7986,7 @@
           </a:solidFill>
           <a:ln/>
           <a:effectLst>
-            <a:outerShdw sx="100000" sy="100000" kx="0" ky="0" algn="bl" rotWithShape="0" blurRad="76200" dist="25400" dir="5400000">
+            <a:outerShdw blurRad="76200" dist="25400" dir="5400000" algn="bl" rotWithShape="0">
               <a:srgbClr val="1A2238">
                 <a:alpha val="12000"/>
               </a:srgbClr>
@@ -8485,11 +8015,11 @@
           <a:bodyPr wrap="square" rtlCol="0" anchor="ctr"/>
           <a:lstStyle/>
           <a:p>
-            <a:pPr indent="0" marL="0">
-              <a:buNone/>
-            </a:pPr>
-            <a:r>
-              <a:rPr lang="en-US" sz="2600" b="1" dirty="0">
+            <a:pPr marL="0" indent="0">
+              <a:buNone/>
+            </a:pPr>
+            <a:r>
+              <a:rPr lang="en-US" sz="3600" b="1" dirty="0">
                 <a:solidFill>
                   <a:srgbClr val="1C7293"/>
                 </a:solidFill>
@@ -8499,7 +8029,7 @@
               </a:rPr>
               <a:t>02</a:t>
             </a:r>
-            <a:endParaRPr lang="en-US" sz="2600" dirty="0"/>
+            <a:endParaRPr lang="en-US" sz="3600" dirty="0"/>
           </a:p>
         </p:txBody>
       </p:sp>
@@ -8524,11 +8054,11 @@
           <a:bodyPr wrap="square" rtlCol="0" anchor="ctr"/>
           <a:lstStyle/>
           <a:p>
-            <a:pPr indent="0" marL="0">
-              <a:buNone/>
-            </a:pPr>
-            <a:r>
-              <a:rPr lang="en-US" sz="1500" b="1" dirty="0">
+            <a:pPr marL="0" indent="0">
+              <a:buNone/>
+            </a:pPr>
+            <a:r>
+              <a:rPr lang="en-US" sz="2000" b="1" dirty="0">
                 <a:solidFill>
                   <a:srgbClr val="1A2238"/>
                 </a:solidFill>
@@ -8538,7 +8068,7 @@
               </a:rPr>
               <a:t>Análisis exploratorio</a:t>
             </a:r>
-            <a:endParaRPr lang="en-US" sz="1500" dirty="0"/>
+            <a:endParaRPr lang="en-US" sz="2000" dirty="0"/>
           </a:p>
         </p:txBody>
       </p:sp>
@@ -8563,11 +8093,11 @@
           <a:bodyPr wrap="square" rtlCol="0" anchor="ctr"/>
           <a:lstStyle/>
           <a:p>
-            <a:pPr indent="0" marL="0">
-              <a:buNone/>
-            </a:pPr>
-            <a:r>
-              <a:rPr lang="en-US" sz="1100" dirty="0">
+            <a:pPr marL="0" indent="0">
+              <a:buNone/>
+            </a:pPr>
+            <a:r>
+              <a:rPr lang="en-US" sz="1600" dirty="0">
                 <a:solidFill>
                   <a:srgbClr val="6B7280"/>
                 </a:solidFill>
@@ -8577,7 +8107,7 @@
               </a:rPr>
               <a:t>Distribución y correlación de variables</a:t>
             </a:r>
-            <a:endParaRPr lang="en-US" sz="1100" dirty="0"/>
+            <a:endParaRPr lang="en-US" sz="1600" dirty="0"/>
           </a:p>
         </p:txBody>
       </p:sp>
@@ -8602,7 +8132,7 @@
           </a:solidFill>
           <a:ln/>
           <a:effectLst>
-            <a:outerShdw sx="100000" sy="100000" kx="0" ky="0" algn="bl" rotWithShape="0" blurRad="76200" dist="25400" dir="5400000">
+            <a:outerShdw blurRad="76200" dist="25400" dir="5400000" algn="bl" rotWithShape="0">
               <a:srgbClr val="1A2238">
                 <a:alpha val="12000"/>
               </a:srgbClr>
@@ -8631,11 +8161,11 @@
           <a:bodyPr wrap="square" rtlCol="0" anchor="ctr"/>
           <a:lstStyle/>
           <a:p>
-            <a:pPr indent="0" marL="0">
-              <a:buNone/>
-            </a:pPr>
-            <a:r>
-              <a:rPr lang="en-US" sz="2600" b="1" dirty="0">
+            <a:pPr marL="0" indent="0">
+              <a:buNone/>
+            </a:pPr>
+            <a:r>
+              <a:rPr lang="en-US" sz="3600" b="1" dirty="0">
                 <a:solidFill>
                   <a:srgbClr val="1C7293"/>
                 </a:solidFill>
@@ -8645,7 +8175,7 @@
               </a:rPr>
               <a:t>03</a:t>
             </a:r>
-            <a:endParaRPr lang="en-US" sz="2600" dirty="0"/>
+            <a:endParaRPr lang="en-US" sz="3600" dirty="0"/>
           </a:p>
         </p:txBody>
       </p:sp>
@@ -8670,11 +8200,11 @@
           <a:bodyPr wrap="square" rtlCol="0" anchor="ctr"/>
           <a:lstStyle/>
           <a:p>
-            <a:pPr indent="0" marL="0">
-              <a:buNone/>
-            </a:pPr>
-            <a:r>
-              <a:rPr lang="en-US" sz="1500" b="1" dirty="0">
+            <a:pPr marL="0" indent="0">
+              <a:buNone/>
+            </a:pPr>
+            <a:r>
+              <a:rPr lang="en-US" sz="2000" b="1" dirty="0">
                 <a:solidFill>
                   <a:srgbClr val="1A2238"/>
                 </a:solidFill>
@@ -8684,7 +8214,7 @@
               </a:rPr>
               <a:t>Preprocesamiento</a:t>
             </a:r>
-            <a:endParaRPr lang="en-US" sz="1500" dirty="0"/>
+            <a:endParaRPr lang="en-US" sz="2000" dirty="0"/>
           </a:p>
         </p:txBody>
       </p:sp>
@@ -8709,11 +8239,11 @@
           <a:bodyPr wrap="square" rtlCol="0" anchor="ctr"/>
           <a:lstStyle/>
           <a:p>
-            <a:pPr indent="0" marL="0">
-              <a:buNone/>
-            </a:pPr>
-            <a:r>
-              <a:rPr lang="en-US" sz="1100" dirty="0">
+            <a:pPr marL="0" indent="0">
+              <a:buNone/>
+            </a:pPr>
+            <a:r>
+              <a:rPr lang="en-US" sz="1600" dirty="0">
                 <a:solidFill>
                   <a:srgbClr val="6B7280"/>
                 </a:solidFill>
@@ -8723,7 +8253,7 @@
               </a:rPr>
               <a:t>Limpieza, filtrado y features</a:t>
             </a:r>
-            <a:endParaRPr lang="en-US" sz="1100" dirty="0"/>
+            <a:endParaRPr lang="en-US" sz="1600" dirty="0"/>
           </a:p>
         </p:txBody>
       </p:sp>
@@ -8748,7 +8278,7 @@
           </a:solidFill>
           <a:ln/>
           <a:effectLst>
-            <a:outerShdw sx="100000" sy="100000" kx="0" ky="0" algn="bl" rotWithShape="0" blurRad="76200" dist="25400" dir="5400000">
+            <a:outerShdw blurRad="76200" dist="25400" dir="5400000" algn="bl" rotWithShape="0">
               <a:srgbClr val="1A2238">
                 <a:alpha val="12000"/>
               </a:srgbClr>
@@ -8777,11 +8307,11 @@
           <a:bodyPr wrap="square" rtlCol="0" anchor="ctr"/>
           <a:lstStyle/>
           <a:p>
-            <a:pPr indent="0" marL="0">
-              <a:buNone/>
-            </a:pPr>
-            <a:r>
-              <a:rPr lang="en-US" sz="2600" b="1" dirty="0">
+            <a:pPr marL="0" indent="0">
+              <a:buNone/>
+            </a:pPr>
+            <a:r>
+              <a:rPr lang="en-US" sz="3600" b="1" dirty="0">
                 <a:solidFill>
                   <a:srgbClr val="1C7293"/>
                 </a:solidFill>
@@ -8791,7 +8321,7 @@
               </a:rPr>
               <a:t>04</a:t>
             </a:r>
-            <a:endParaRPr lang="en-US" sz="2600" dirty="0"/>
+            <a:endParaRPr lang="en-US" sz="3600" dirty="0"/>
           </a:p>
         </p:txBody>
       </p:sp>
@@ -8816,11 +8346,11 @@
           <a:bodyPr wrap="square" rtlCol="0" anchor="ctr"/>
           <a:lstStyle/>
           <a:p>
-            <a:pPr indent="0" marL="0">
-              <a:buNone/>
-            </a:pPr>
-            <a:r>
-              <a:rPr lang="en-US" sz="1500" b="1" dirty="0">
+            <a:pPr marL="0" indent="0">
+              <a:buNone/>
+            </a:pPr>
+            <a:r>
+              <a:rPr lang="en-US" sz="2000" b="1" dirty="0">
                 <a:solidFill>
                   <a:srgbClr val="1A2238"/>
                 </a:solidFill>
@@ -8830,7 +8360,7 @@
               </a:rPr>
               <a:t>Entrenamiento del modelo</a:t>
             </a:r>
-            <a:endParaRPr lang="en-US" sz="1500" dirty="0"/>
+            <a:endParaRPr lang="en-US" sz="2000" dirty="0"/>
           </a:p>
         </p:txBody>
       </p:sp>
@@ -8855,11 +8385,11 @@
           <a:bodyPr wrap="square" rtlCol="0" anchor="ctr"/>
           <a:lstStyle/>
           <a:p>
-            <a:pPr indent="0" marL="0">
-              <a:buNone/>
-            </a:pPr>
-            <a:r>
-              <a:rPr lang="en-US" sz="1100" dirty="0">
+            <a:pPr marL="0" indent="0">
+              <a:buNone/>
+            </a:pPr>
+            <a:r>
+              <a:rPr lang="en-US" sz="1600" dirty="0">
                 <a:solidFill>
                   <a:srgbClr val="6B7280"/>
                 </a:solidFill>
@@ -8869,7 +8399,7 @@
               </a:rPr>
               <a:t>Random Forest Regressor</a:t>
             </a:r>
-            <a:endParaRPr lang="en-US" sz="1100" dirty="0"/>
+            <a:endParaRPr lang="en-US" sz="1600" dirty="0"/>
           </a:p>
         </p:txBody>
       </p:sp>
@@ -8894,7 +8424,7 @@
           </a:solidFill>
           <a:ln/>
           <a:effectLst>
-            <a:outerShdw sx="100000" sy="100000" kx="0" ky="0" algn="bl" rotWithShape="0" blurRad="76200" dist="25400" dir="5400000">
+            <a:outerShdw blurRad="76200" dist="25400" dir="5400000" algn="bl" rotWithShape="0">
               <a:srgbClr val="1A2238">
                 <a:alpha val="12000"/>
               </a:srgbClr>
@@ -8923,11 +8453,11 @@
           <a:bodyPr wrap="square" rtlCol="0" anchor="ctr"/>
           <a:lstStyle/>
           <a:p>
-            <a:pPr indent="0" marL="0">
-              <a:buNone/>
-            </a:pPr>
-            <a:r>
-              <a:rPr lang="en-US" sz="2600" b="1" dirty="0">
+            <a:pPr marL="0" indent="0">
+              <a:buNone/>
+            </a:pPr>
+            <a:r>
+              <a:rPr lang="en-US" sz="3600" b="1" dirty="0">
                 <a:solidFill>
                   <a:srgbClr val="1C7293"/>
                 </a:solidFill>
@@ -8937,7 +8467,7 @@
               </a:rPr>
               <a:t>05</a:t>
             </a:r>
-            <a:endParaRPr lang="en-US" sz="2600" dirty="0"/>
+            <a:endParaRPr lang="en-US" sz="3600" dirty="0"/>
           </a:p>
         </p:txBody>
       </p:sp>
@@ -8962,11 +8492,11 @@
           <a:bodyPr wrap="square" rtlCol="0" anchor="ctr"/>
           <a:lstStyle/>
           <a:p>
-            <a:pPr indent="0" marL="0">
-              <a:buNone/>
-            </a:pPr>
-            <a:r>
-              <a:rPr lang="en-US" sz="1500" b="1" dirty="0">
+            <a:pPr marL="0" indent="0">
+              <a:buNone/>
+            </a:pPr>
+            <a:r>
+              <a:rPr lang="en-US" sz="2000" b="1" dirty="0">
                 <a:solidFill>
                   <a:srgbClr val="1A2238"/>
                 </a:solidFill>
@@ -8976,7 +8506,7 @@
               </a:rPr>
               <a:t>Arquitectura del sistema</a:t>
             </a:r>
-            <a:endParaRPr lang="en-US" sz="1500" dirty="0"/>
+            <a:endParaRPr lang="en-US" sz="2000" dirty="0"/>
           </a:p>
         </p:txBody>
       </p:sp>
@@ -9001,11 +8531,11 @@
           <a:bodyPr wrap="square" rtlCol="0" anchor="ctr"/>
           <a:lstStyle/>
           <a:p>
-            <a:pPr indent="0" marL="0">
-              <a:buNone/>
-            </a:pPr>
-            <a:r>
-              <a:rPr lang="en-US" sz="1100" dirty="0">
+            <a:pPr marL="0" indent="0">
+              <a:buNone/>
+            </a:pPr>
+            <a:r>
+              <a:rPr lang="en-US" sz="1600" dirty="0">
                 <a:solidFill>
                   <a:srgbClr val="6B7280"/>
                 </a:solidFill>
@@ -9015,7 +8545,7 @@
               </a:rPr>
               <a:t>Frontend, backend, IA y base de datos</a:t>
             </a:r>
-            <a:endParaRPr lang="en-US" sz="1100" dirty="0"/>
+            <a:endParaRPr lang="en-US" sz="1600" dirty="0"/>
           </a:p>
         </p:txBody>
       </p:sp>
@@ -9040,7 +8570,7 @@
           </a:solidFill>
           <a:ln/>
           <a:effectLst>
-            <a:outerShdw sx="100000" sy="100000" kx="0" ky="0" algn="bl" rotWithShape="0" blurRad="76200" dist="25400" dir="5400000">
+            <a:outerShdw blurRad="76200" dist="25400" dir="5400000" algn="bl" rotWithShape="0">
               <a:srgbClr val="1A2238">
                 <a:alpha val="12000"/>
               </a:srgbClr>
@@ -9069,11 +8599,11 @@
           <a:bodyPr wrap="square" rtlCol="0" anchor="ctr"/>
           <a:lstStyle/>
           <a:p>
-            <a:pPr indent="0" marL="0">
-              <a:buNone/>
-            </a:pPr>
-            <a:r>
-              <a:rPr lang="en-US" sz="2600" b="1" dirty="0">
+            <a:pPr marL="0" indent="0">
+              <a:buNone/>
+            </a:pPr>
+            <a:r>
+              <a:rPr lang="en-US" sz="3600" b="1" dirty="0">
                 <a:solidFill>
                   <a:srgbClr val="1C7293"/>
                 </a:solidFill>
@@ -9083,7 +8613,7 @@
               </a:rPr>
               <a:t>06</a:t>
             </a:r>
-            <a:endParaRPr lang="en-US" sz="2600" dirty="0"/>
+            <a:endParaRPr lang="en-US" sz="3600" dirty="0"/>
           </a:p>
         </p:txBody>
       </p:sp>
@@ -9108,11 +8638,11 @@
           <a:bodyPr wrap="square" rtlCol="0" anchor="ctr"/>
           <a:lstStyle/>
           <a:p>
-            <a:pPr indent="0" marL="0">
-              <a:buNone/>
-            </a:pPr>
-            <a:r>
-              <a:rPr lang="en-US" sz="1500" b="1" dirty="0">
+            <a:pPr marL="0" indent="0">
+              <a:buNone/>
+            </a:pPr>
+            <a:r>
+              <a:rPr lang="en-US" sz="2000" b="1" dirty="0">
                 <a:solidFill>
                   <a:srgbClr val="1A2238"/>
                 </a:solidFill>
@@ -9122,7 +8652,7 @@
               </a:rPr>
               <a:t>Integración y resultados</a:t>
             </a:r>
-            <a:endParaRPr lang="en-US" sz="1500" dirty="0"/>
+            <a:endParaRPr lang="en-US" sz="2000" dirty="0"/>
           </a:p>
         </p:txBody>
       </p:sp>
@@ -9147,11 +8677,11 @@
           <a:bodyPr wrap="square" rtlCol="0" anchor="ctr"/>
           <a:lstStyle/>
           <a:p>
-            <a:pPr indent="0" marL="0">
-              <a:buNone/>
-            </a:pPr>
-            <a:r>
-              <a:rPr lang="en-US" sz="1100" dirty="0">
+            <a:pPr marL="0" indent="0">
+              <a:buNone/>
+            </a:pPr>
+            <a:r>
+              <a:rPr lang="en-US" sz="1600" dirty="0">
                 <a:solidFill>
                   <a:srgbClr val="6B7280"/>
                 </a:solidFill>
@@ -9161,7 +8691,7 @@
               </a:rPr>
               <a:t>API, lógica de negocio y pruebas</a:t>
             </a:r>
-            <a:endParaRPr lang="en-US" sz="1100" dirty="0"/>
+            <a:endParaRPr lang="en-US" sz="1600" dirty="0"/>
           </a:p>
         </p:txBody>
       </p:sp>
@@ -9186,11 +8716,11 @@
           <a:bodyPr wrap="square" rtlCol="0" anchor="ctr"/>
           <a:lstStyle/>
           <a:p>
-            <a:pPr indent="0" marL="0">
-              <a:buNone/>
-            </a:pPr>
-            <a:r>
-              <a:rPr lang="en-US" sz="900" dirty="0">
+            <a:pPr marL="0" indent="0">
+              <a:buNone/>
+            </a:pPr>
+            <a:r>
+              <a:rPr lang="en-US" sz="1100" dirty="0">
                 <a:solidFill>
                   <a:srgbClr val="6B7280"/>
                 </a:solidFill>
@@ -9200,7 +8730,7 @@
               </a:rPr>
               <a:t>DriveSafe AI  |  Detección de somnolencia con Machine Learning</a:t>
             </a:r>
-            <a:endParaRPr lang="en-US" sz="900" dirty="0"/>
+            <a:endParaRPr lang="en-US" sz="1100" dirty="0"/>
           </a:p>
         </p:txBody>
       </p:sp>
@@ -9225,11 +8755,11 @@
           <a:bodyPr wrap="square" rtlCol="0" anchor="ctr"/>
           <a:lstStyle/>
           <a:p>
-            <a:pPr algn="r" indent="0" marL="0">
-              <a:buNone/>
-            </a:pPr>
-            <a:r>
-              <a:rPr lang="en-US" sz="900" dirty="0">
+            <a:pPr marL="0" indent="0" algn="r">
+              <a:buNone/>
+            </a:pPr>
+            <a:r>
+              <a:rPr lang="en-US" sz="1100" dirty="0">
                 <a:solidFill>
                   <a:srgbClr val="6B7280"/>
                 </a:solidFill>
@@ -9239,7 +8769,7 @@
               </a:rPr>
               <a:t>2</a:t>
             </a:r>
-            <a:endParaRPr lang="en-US" sz="900" dirty="0"/>
+            <a:endParaRPr lang="en-US" sz="1100" dirty="0"/>
           </a:p>
         </p:txBody>
       </p:sp>
@@ -9259,6 +8789,7 @@
         <a:solidFill>
           <a:srgbClr val="FFFFFF"/>
         </a:solidFill>
+        <a:effectLst/>
       </p:bgPr>
     </p:bg>
     <p:spTree>
@@ -9296,11 +8827,11 @@
           <a:bodyPr wrap="square" rtlCol="0" anchor="ctr"/>
           <a:lstStyle/>
           <a:p>
-            <a:pPr indent="0" marL="0">
-              <a:buNone/>
-            </a:pPr>
-            <a:r>
-              <a:rPr lang="en-US" sz="1300" b="1" spc="200" kern="0" dirty="0">
+            <a:pPr marL="0" indent="0">
+              <a:buNone/>
+            </a:pPr>
+            <a:r>
+              <a:rPr lang="en-US" sz="1300" b="1" kern="0" spc="200" dirty="0">
                 <a:solidFill>
                   <a:srgbClr val="1C7293"/>
                 </a:solidFill>
@@ -9335,11 +8866,11 @@
           <a:bodyPr wrap="square" rtlCol="0" anchor="ctr"/>
           <a:lstStyle/>
           <a:p>
-            <a:pPr indent="0" marL="0">
-              <a:buNone/>
-            </a:pPr>
-            <a:r>
-              <a:rPr lang="en-US" sz="3000" b="1" dirty="0">
+            <a:pPr marL="0" indent="0">
+              <a:buNone/>
+            </a:pPr>
+            <a:r>
+              <a:rPr lang="en-US" sz="4000" b="1" dirty="0">
                 <a:solidFill>
                   <a:srgbClr val="1A2238"/>
                 </a:solidFill>
@@ -9349,7 +8880,7 @@
               </a:rPr>
               <a:t>Un dataset propio, generado en tiempo real</a:t>
             </a:r>
-            <a:endParaRPr lang="en-US" sz="3000" dirty="0"/>
+            <a:endParaRPr lang="en-US" sz="4000" dirty="0"/>
           </a:p>
         </p:txBody>
       </p:sp>
@@ -9374,11 +8905,11 @@
           <a:bodyPr wrap="square" rtlCol="0" anchor="ctr"/>
           <a:lstStyle/>
           <a:p>
-            <a:pPr indent="0" marL="0">
-              <a:buNone/>
-            </a:pPr>
-            <a:r>
-              <a:rPr lang="en-US" sz="1300" dirty="0">
+            <a:pPr marL="0" indent="0">
+              <a:buNone/>
+            </a:pPr>
+            <a:r>
+              <a:rPr lang="en-US" dirty="0">
                 <a:solidFill>
                   <a:srgbClr val="6B7280"/>
                 </a:solidFill>
@@ -9388,7 +8919,7 @@
               </a:rPr>
               <a:t>Cada alerta de fatiga detectada por la app se guarda como una muestra de entrenamiento en la tabla ml_samples, y luego se exporta a dataset.csv para alimentar a train_model.py.</a:t>
             </a:r>
-            <a:endParaRPr lang="en-US" sz="1300" dirty="0"/>
+            <a:endParaRPr lang="en-US" dirty="0"/>
           </a:p>
         </p:txBody>
       </p:sp>
@@ -9435,11 +8966,11 @@
           <a:bodyPr wrap="square" rtlCol="0" anchor="ctr"/>
           <a:lstStyle/>
           <a:p>
-            <a:pPr algn="ctr" indent="0" marL="0">
-              <a:buNone/>
-            </a:pPr>
-            <a:r>
-              <a:rPr lang="en-US" sz="1150" b="1" dirty="0">
+            <a:pPr marL="0" indent="0" algn="ctr">
+              <a:buNone/>
+            </a:pPr>
+            <a:r>
+              <a:rPr lang="en-US" sz="1600" b="1" dirty="0">
                 <a:solidFill>
                   <a:srgbClr val="FFFFFF"/>
                 </a:solidFill>
@@ -9449,14 +8980,14 @@
               </a:rPr>
               <a:t>App de</a:t>
             </a:r>
-            <a:endParaRPr lang="en-US" sz="1150" dirty="0"/>
-          </a:p>
-          <a:p>
-            <a:pPr algn="ctr" indent="0" marL="0">
-              <a:buNone/>
-            </a:pPr>
-            <a:r>
-              <a:rPr lang="en-US" sz="1150" b="1" dirty="0">
+            <a:endParaRPr lang="en-US" sz="1600" dirty="0"/>
+          </a:p>
+          <a:p>
+            <a:pPr marL="0" indent="0" algn="ctr">
+              <a:buNone/>
+            </a:pPr>
+            <a:r>
+              <a:rPr lang="en-US" sz="1600" b="1" dirty="0">
                 <a:solidFill>
                   <a:srgbClr val="FFFFFF"/>
                 </a:solidFill>
@@ -9466,7 +8997,7 @@
               </a:rPr>
               <a:t>monitoreo</a:t>
             </a:r>
-            <a:endParaRPr lang="en-US" sz="1150" dirty="0"/>
+            <a:endParaRPr lang="en-US" sz="1600" dirty="0"/>
           </a:p>
         </p:txBody>
       </p:sp>
@@ -9533,11 +9064,11 @@
           <a:bodyPr wrap="square" rtlCol="0" anchor="ctr"/>
           <a:lstStyle/>
           <a:p>
-            <a:pPr algn="ctr" indent="0" marL="0">
-              <a:buNone/>
-            </a:pPr>
-            <a:r>
-              <a:rPr lang="en-US" sz="1150" b="1" dirty="0">
+            <a:pPr marL="0" indent="0" algn="ctr">
+              <a:buNone/>
+            </a:pPr>
+            <a:r>
+              <a:rPr lang="en-US" sz="1600" b="1" dirty="0">
                 <a:solidFill>
                   <a:srgbClr val="FFFFFF"/>
                 </a:solidFill>
@@ -9547,14 +9078,14 @@
               </a:rPr>
               <a:t>Tabla</a:t>
             </a:r>
-            <a:endParaRPr lang="en-US" sz="1150" dirty="0"/>
-          </a:p>
-          <a:p>
-            <a:pPr algn="ctr" indent="0" marL="0">
-              <a:buNone/>
-            </a:pPr>
-            <a:r>
-              <a:rPr lang="en-US" sz="1150" b="1" dirty="0">
+            <a:endParaRPr lang="en-US" sz="1600" dirty="0"/>
+          </a:p>
+          <a:p>
+            <a:pPr marL="0" indent="0" algn="ctr">
+              <a:buNone/>
+            </a:pPr>
+            <a:r>
+              <a:rPr lang="en-US" sz="1600" b="1" dirty="0">
                 <a:solidFill>
                   <a:srgbClr val="FFFFFF"/>
                 </a:solidFill>
@@ -9564,7 +9095,7 @@
               </a:rPr>
               <a:t>ml_samples</a:t>
             </a:r>
-            <a:endParaRPr lang="en-US" sz="1150" dirty="0"/>
+            <a:endParaRPr lang="en-US" sz="1600" dirty="0"/>
           </a:p>
         </p:txBody>
       </p:sp>
@@ -9631,11 +9162,11 @@
           <a:bodyPr wrap="square" rtlCol="0" anchor="ctr"/>
           <a:lstStyle/>
           <a:p>
-            <a:pPr algn="ctr" indent="0" marL="0">
-              <a:buNone/>
-            </a:pPr>
-            <a:r>
-              <a:rPr lang="en-US" sz="1150" b="1" dirty="0">
+            <a:pPr marL="0" indent="0" algn="ctr">
+              <a:buNone/>
+            </a:pPr>
+            <a:r>
+              <a:rPr lang="en-US" sz="1600" b="1" dirty="0">
                 <a:solidFill>
                   <a:srgbClr val="FFFFFF"/>
                 </a:solidFill>
@@ -9645,7 +9176,7 @@
               </a:rPr>
               <a:t>dataset.csv</a:t>
             </a:r>
-            <a:endParaRPr lang="en-US" sz="1150" dirty="0"/>
+            <a:endParaRPr lang="en-US" sz="1600" dirty="0"/>
           </a:p>
         </p:txBody>
       </p:sp>
@@ -9712,11 +9243,11 @@
           <a:bodyPr wrap="square" rtlCol="0" anchor="ctr"/>
           <a:lstStyle/>
           <a:p>
-            <a:pPr algn="ctr" indent="0" marL="0">
-              <a:buNone/>
-            </a:pPr>
-            <a:r>
-              <a:rPr lang="en-US" sz="1150" b="1" dirty="0">
+            <a:pPr marL="0" indent="0" algn="ctr">
+              <a:buNone/>
+            </a:pPr>
+            <a:r>
+              <a:rPr lang="en-US" sz="1600" b="1" dirty="0">
                 <a:solidFill>
                   <a:srgbClr val="FFFFFF"/>
                 </a:solidFill>
@@ -9726,7 +9257,7 @@
               </a:rPr>
               <a:t>train_model.py</a:t>
             </a:r>
-            <a:endParaRPr lang="en-US" sz="1150" dirty="0"/>
+            <a:endParaRPr lang="en-US" sz="1600" dirty="0"/>
           </a:p>
         </p:txBody>
       </p:sp>
@@ -9751,11 +9282,11 @@
           <a:bodyPr wrap="square" rtlCol="0" anchor="ctr"/>
           <a:lstStyle/>
           <a:p>
-            <a:pPr indent="0" marL="0">
-              <a:buNone/>
-            </a:pPr>
-            <a:r>
-              <a:rPr lang="en-US" sz="1100" i="1" dirty="0">
+            <a:pPr marL="0" indent="0">
+              <a:buNone/>
+            </a:pPr>
+            <a:r>
+              <a:rPr lang="en-US" sz="1600" i="1" dirty="0">
                 <a:solidFill>
                   <a:srgbClr val="1C7293"/>
                 </a:solidFill>
@@ -9765,7 +9296,7 @@
               </a:rPr>
               <a:t>Ciclo continuo: cada nueva alerta añade una muestra, permitiendo reentrenar el modelo con datos más recientes.</a:t>
             </a:r>
-            <a:endParaRPr lang="en-US" sz="1100" dirty="0"/>
+            <a:endParaRPr lang="en-US" sz="1600" dirty="0"/>
           </a:p>
         </p:txBody>
       </p:sp>
@@ -9812,11 +9343,11 @@
           <a:bodyPr wrap="square" rtlCol="0" anchor="ctr"/>
           <a:lstStyle/>
           <a:p>
-            <a:pPr indent="0" marL="0">
-              <a:buNone/>
-            </a:pPr>
-            <a:r>
-              <a:rPr lang="en-US" sz="1500" b="1" dirty="0">
+            <a:pPr marL="0" indent="0">
+              <a:buNone/>
+            </a:pPr>
+            <a:r>
+              <a:rPr lang="en-US" sz="2000" b="1" dirty="0">
                 <a:solidFill>
                   <a:srgbClr val="1A2238"/>
                 </a:solidFill>
@@ -9826,7 +9357,7 @@
               </a:rPr>
               <a:t>Variables del dataset</a:t>
             </a:r>
-            <a:endParaRPr lang="en-US" sz="1500" dirty="0"/>
+            <a:endParaRPr lang="en-US" sz="2000" dirty="0"/>
           </a:p>
         </p:txBody>
       </p:sp>
@@ -9871,11 +9402,11 @@
           <a:bodyPr wrap="square" rtlCol="0" anchor="ctr"/>
           <a:lstStyle/>
           <a:p>
-            <a:pPr indent="0" marL="0">
-              <a:buNone/>
-            </a:pPr>
-            <a:r>
-              <a:rPr lang="en-US" sz="1300" b="1" dirty="0">
+            <a:pPr marL="0" indent="0">
+              <a:buNone/>
+            </a:pPr>
+            <a:r>
+              <a:rPr lang="en-US" b="1" dirty="0">
                 <a:solidFill>
                   <a:srgbClr val="1A2238"/>
                 </a:solidFill>
@@ -9885,7 +9416,7 @@
               </a:rPr>
               <a:t>ojos</a:t>
             </a:r>
-            <a:endParaRPr lang="en-US" sz="1300" dirty="0"/>
+            <a:endParaRPr lang="en-US" dirty="0"/>
           </a:p>
         </p:txBody>
       </p:sp>
@@ -9910,11 +9441,11 @@
           <a:bodyPr wrap="square" rtlCol="0" anchor="ctr"/>
           <a:lstStyle/>
           <a:p>
-            <a:pPr indent="0" marL="0">
-              <a:buNone/>
-            </a:pPr>
-            <a:r>
-              <a:rPr lang="en-US" sz="1100" dirty="0">
+            <a:pPr marL="0" indent="0">
+              <a:buNone/>
+            </a:pPr>
+            <a:r>
+              <a:rPr lang="en-US" sz="1600" dirty="0">
                 <a:solidFill>
                   <a:srgbClr val="1C7293"/>
                 </a:solidFill>
@@ -9924,7 +9455,7 @@
               </a:rPr>
               <a:t>Double</a:t>
             </a:r>
-            <a:endParaRPr lang="en-US" sz="1100" dirty="0"/>
+            <a:endParaRPr lang="en-US" sz="1600" dirty="0"/>
           </a:p>
         </p:txBody>
       </p:sp>
@@ -9949,11 +9480,11 @@
           <a:bodyPr wrap="square" rtlCol="0" anchor="ctr"/>
           <a:lstStyle/>
           <a:p>
-            <a:pPr indent="0" marL="0">
-              <a:buNone/>
-            </a:pPr>
-            <a:r>
-              <a:rPr lang="en-US" sz="1100" dirty="0">
+            <a:pPr marL="0" indent="0">
+              <a:buNone/>
+            </a:pPr>
+            <a:r>
+              <a:rPr lang="en-US" sz="1600" dirty="0">
                 <a:solidFill>
                   <a:srgbClr val="6B7280"/>
                 </a:solidFill>
@@ -9963,7 +9494,7 @@
               </a:rPr>
               <a:t>Nivel de apertura de los ojos (EAR)</a:t>
             </a:r>
-            <a:endParaRPr lang="en-US" sz="1100" dirty="0"/>
+            <a:endParaRPr lang="en-US" sz="1600" dirty="0"/>
           </a:p>
         </p:txBody>
       </p:sp>
@@ -10008,11 +9539,11 @@
           <a:bodyPr wrap="square" rtlCol="0" anchor="ctr"/>
           <a:lstStyle/>
           <a:p>
-            <a:pPr indent="0" marL="0">
-              <a:buNone/>
-            </a:pPr>
-            <a:r>
-              <a:rPr lang="en-US" sz="1300" b="1" dirty="0">
+            <a:pPr marL="0" indent="0">
+              <a:buNone/>
+            </a:pPr>
+            <a:r>
+              <a:rPr lang="en-US" b="1" dirty="0">
                 <a:solidFill>
                   <a:srgbClr val="1A2238"/>
                 </a:solidFill>
@@ -10022,7 +9553,7 @@
               </a:rPr>
               <a:t>bostezos</a:t>
             </a:r>
-            <a:endParaRPr lang="en-US" sz="1300" dirty="0"/>
+            <a:endParaRPr lang="en-US" dirty="0"/>
           </a:p>
         </p:txBody>
       </p:sp>
@@ -10047,11 +9578,11 @@
           <a:bodyPr wrap="square" rtlCol="0" anchor="ctr"/>
           <a:lstStyle/>
           <a:p>
-            <a:pPr indent="0" marL="0">
-              <a:buNone/>
-            </a:pPr>
-            <a:r>
-              <a:rPr lang="en-US" sz="1100" dirty="0">
+            <a:pPr marL="0" indent="0">
+              <a:buNone/>
+            </a:pPr>
+            <a:r>
+              <a:rPr lang="en-US" sz="1600" dirty="0">
                 <a:solidFill>
                   <a:srgbClr val="1C7293"/>
                 </a:solidFill>
@@ -10061,7 +9592,7 @@
               </a:rPr>
               <a:t>Entero</a:t>
             </a:r>
-            <a:endParaRPr lang="en-US" sz="1100" dirty="0"/>
+            <a:endParaRPr lang="en-US" sz="1600" dirty="0"/>
           </a:p>
         </p:txBody>
       </p:sp>
@@ -10086,11 +9617,11 @@
           <a:bodyPr wrap="square" rtlCol="0" anchor="ctr"/>
           <a:lstStyle/>
           <a:p>
-            <a:pPr indent="0" marL="0">
-              <a:buNone/>
-            </a:pPr>
-            <a:r>
-              <a:rPr lang="en-US" sz="1100" dirty="0">
+            <a:pPr marL="0" indent="0">
+              <a:buNone/>
+            </a:pPr>
+            <a:r>
+              <a:rPr lang="en-US" sz="1600" dirty="0">
                 <a:solidFill>
                   <a:srgbClr val="6B7280"/>
                 </a:solidFill>
@@ -10100,7 +9631,7 @@
               </a:rPr>
               <a:t>Cantidad de bostezos detectados</a:t>
             </a:r>
-            <a:endParaRPr lang="en-US" sz="1100" dirty="0"/>
+            <a:endParaRPr lang="en-US" sz="1600" dirty="0"/>
           </a:p>
         </p:txBody>
       </p:sp>
@@ -10145,11 +9676,11 @@
           <a:bodyPr wrap="square" rtlCol="0" anchor="ctr"/>
           <a:lstStyle/>
           <a:p>
-            <a:pPr indent="0" marL="0">
-              <a:buNone/>
-            </a:pPr>
-            <a:r>
-              <a:rPr lang="en-US" sz="1300" b="1" dirty="0">
+            <a:pPr marL="0" indent="0">
+              <a:buNone/>
+            </a:pPr>
+            <a:r>
+              <a:rPr lang="en-US" b="1" dirty="0">
                 <a:solidFill>
                   <a:srgbClr val="1A2238"/>
                 </a:solidFill>
@@ -10159,7 +9690,7 @@
               </a:rPr>
               <a:t>tiempo</a:t>
             </a:r>
-            <a:endParaRPr lang="en-US" sz="1300" dirty="0"/>
+            <a:endParaRPr lang="en-US" dirty="0"/>
           </a:p>
         </p:txBody>
       </p:sp>
@@ -10184,11 +9715,11 @@
           <a:bodyPr wrap="square" rtlCol="0" anchor="ctr"/>
           <a:lstStyle/>
           <a:p>
-            <a:pPr indent="0" marL="0">
-              <a:buNone/>
-            </a:pPr>
-            <a:r>
-              <a:rPr lang="en-US" sz="1100" dirty="0">
+            <a:pPr marL="0" indent="0">
+              <a:buNone/>
+            </a:pPr>
+            <a:r>
+              <a:rPr lang="en-US" sz="1600" dirty="0">
                 <a:solidFill>
                   <a:srgbClr val="1C7293"/>
                 </a:solidFill>
@@ -10198,7 +9729,7 @@
               </a:rPr>
               <a:t>Double</a:t>
             </a:r>
-            <a:endParaRPr lang="en-US" sz="1100" dirty="0"/>
+            <a:endParaRPr lang="en-US" sz="1600" dirty="0"/>
           </a:p>
         </p:txBody>
       </p:sp>
@@ -10223,11 +9754,11 @@
           <a:bodyPr wrap="square" rtlCol="0" anchor="ctr"/>
           <a:lstStyle/>
           <a:p>
-            <a:pPr indent="0" marL="0">
-              <a:buNone/>
-            </a:pPr>
-            <a:r>
-              <a:rPr lang="en-US" sz="1100" dirty="0">
+            <a:pPr marL="0" indent="0">
+              <a:buNone/>
+            </a:pPr>
+            <a:r>
+              <a:rPr lang="en-US" sz="1600" dirty="0">
                 <a:solidFill>
                   <a:srgbClr val="6B7280"/>
                 </a:solidFill>
@@ -10237,7 +9768,7 @@
               </a:rPr>
               <a:t>Tiempo de conducción en minutos</a:t>
             </a:r>
-            <a:endParaRPr lang="en-US" sz="1100" dirty="0"/>
+            <a:endParaRPr lang="en-US" sz="1600" dirty="0"/>
           </a:p>
         </p:txBody>
       </p:sp>
@@ -10282,11 +9813,11 @@
           <a:bodyPr wrap="square" rtlCol="0" anchor="ctr"/>
           <a:lstStyle/>
           <a:p>
-            <a:pPr indent="0" marL="0">
-              <a:buNone/>
-            </a:pPr>
-            <a:r>
-              <a:rPr lang="en-US" sz="1300" b="1" dirty="0">
+            <a:pPr marL="0" indent="0">
+              <a:buNone/>
+            </a:pPr>
+            <a:r>
+              <a:rPr lang="en-US" b="1" dirty="0">
                 <a:solidFill>
                   <a:srgbClr val="1A2238"/>
                 </a:solidFill>
@@ -10296,7 +9827,7 @@
               </a:rPr>
               <a:t>fatiga</a:t>
             </a:r>
-            <a:endParaRPr lang="en-US" sz="1300" dirty="0"/>
+            <a:endParaRPr lang="en-US" dirty="0"/>
           </a:p>
         </p:txBody>
       </p:sp>
@@ -10321,11 +9852,11 @@
           <a:bodyPr wrap="square" rtlCol="0" anchor="ctr"/>
           <a:lstStyle/>
           <a:p>
-            <a:pPr indent="0" marL="0">
-              <a:buNone/>
-            </a:pPr>
-            <a:r>
-              <a:rPr lang="en-US" sz="1100" dirty="0">
+            <a:pPr marL="0" indent="0">
+              <a:buNone/>
+            </a:pPr>
+            <a:r>
+              <a:rPr lang="en-US" sz="1600" dirty="0">
                 <a:solidFill>
                   <a:srgbClr val="1C7293"/>
                 </a:solidFill>
@@ -10335,7 +9866,7 @@
               </a:rPr>
               <a:t>Entero</a:t>
             </a:r>
-            <a:endParaRPr lang="en-US" sz="1100" dirty="0"/>
+            <a:endParaRPr lang="en-US" sz="1600" dirty="0"/>
           </a:p>
         </p:txBody>
       </p:sp>
@@ -10360,11 +9891,11 @@
           <a:bodyPr wrap="square" rtlCol="0" anchor="ctr"/>
           <a:lstStyle/>
           <a:p>
-            <a:pPr indent="0" marL="0">
-              <a:buNone/>
-            </a:pPr>
-            <a:r>
-              <a:rPr lang="en-US" sz="1100" dirty="0">
+            <a:pPr marL="0" indent="0">
+              <a:buNone/>
+            </a:pPr>
+            <a:r>
+              <a:rPr lang="en-US" sz="1600" dirty="0">
                 <a:solidFill>
                   <a:srgbClr val="6B7280"/>
                 </a:solidFill>
@@ -10374,7 +9905,7 @@
               </a:rPr>
               <a:t>Variable objetivo (0–100)</a:t>
             </a:r>
-            <a:endParaRPr lang="en-US" sz="1100" dirty="0"/>
+            <a:endParaRPr lang="en-US" sz="1600" dirty="0"/>
           </a:p>
         </p:txBody>
       </p:sp>
@@ -10399,7 +9930,7 @@
           <a:bodyPr wrap="square" rtlCol="0" anchor="ctr"/>
           <a:lstStyle/>
           <a:p>
-            <a:pPr indent="0" marL="0">
+            <a:pPr marL="0" indent="0">
               <a:buNone/>
             </a:pPr>
             <a:r>
@@ -10438,7 +9969,7 @@
           <a:bodyPr wrap="square" rtlCol="0" anchor="ctr"/>
           <a:lstStyle/>
           <a:p>
-            <a:pPr algn="r" indent="0" marL="0">
+            <a:pPr marL="0" indent="0" algn="r">
               <a:buNone/>
             </a:pPr>
             <a:r>
@@ -10472,6 +10003,7 @@
         <a:solidFill>
           <a:srgbClr val="FFFFFF"/>
         </a:solidFill>
+        <a:effectLst/>
       </p:bgPr>
     </p:bg>
     <p:spTree>
@@ -10509,11 +10041,11 @@
           <a:bodyPr wrap="square" rtlCol="0" anchor="ctr"/>
           <a:lstStyle/>
           <a:p>
-            <a:pPr indent="0" marL="0">
-              <a:buNone/>
-            </a:pPr>
-            <a:r>
-              <a:rPr lang="en-US" sz="1300" b="1" spc="200" kern="0" dirty="0">
+            <a:pPr marL="0" indent="0">
+              <a:buNone/>
+            </a:pPr>
+            <a:r>
+              <a:rPr lang="en-US" sz="1300" b="1" kern="0" spc="200" dirty="0">
                 <a:solidFill>
                   <a:srgbClr val="1C7293"/>
                 </a:solidFill>
@@ -10548,11 +10080,11 @@
           <a:bodyPr wrap="square" rtlCol="0" anchor="ctr"/>
           <a:lstStyle/>
           <a:p>
-            <a:pPr indent="0" marL="0">
-              <a:buNone/>
-            </a:pPr>
-            <a:r>
-              <a:rPr lang="en-US" sz="3000" b="1" dirty="0">
+            <a:pPr marL="0" indent="0">
+              <a:buNone/>
+            </a:pPr>
+            <a:r>
+              <a:rPr lang="en-US" sz="4400" b="1" dirty="0">
                 <a:solidFill>
                   <a:srgbClr val="1A2238"/>
                 </a:solidFill>
@@ -10562,7 +10094,7 @@
               </a:rPr>
               <a:t>Cuatro variables, todas numéricas</a:t>
             </a:r>
-            <a:endParaRPr lang="en-US" sz="3000" dirty="0"/>
+            <a:endParaRPr lang="en-US" sz="4400" dirty="0"/>
           </a:p>
         </p:txBody>
       </p:sp>
@@ -10587,11 +10119,11 @@
           <a:bodyPr wrap="square" rtlCol="0" anchor="ctr"/>
           <a:lstStyle/>
           <a:p>
-            <a:pPr indent="0" marL="0">
-              <a:buNone/>
-            </a:pPr>
-            <a:r>
-              <a:rPr lang="en-US" sz="1300" dirty="0">
+            <a:pPr marL="0" indent="0">
+              <a:buNone/>
+            </a:pPr>
+            <a:r>
+              <a:rPr lang="en-US" sz="2000" dirty="0">
                 <a:solidFill>
                   <a:srgbClr val="6B7280"/>
                 </a:solidFill>
@@ -10601,7 +10133,7 @@
               </a:rPr>
               <a:t>No se requiere codificación de variables categóricas: el dataset puede entrenar directamente un modelo de regresión.</a:t>
             </a:r>
-            <a:endParaRPr lang="en-US" sz="1300" dirty="0"/>
+            <a:endParaRPr lang="en-US" sz="2000" dirty="0"/>
           </a:p>
         </p:txBody>
       </p:sp>
@@ -10668,11 +10200,11 @@
           <a:bodyPr wrap="square" rtlCol="0" anchor="ctr"/>
           <a:lstStyle/>
           <a:p>
-            <a:pPr indent="0" marL="0">
-              <a:buNone/>
-            </a:pPr>
-            <a:r>
-              <a:rPr lang="en-US" sz="2000" b="1" dirty="0">
+            <a:pPr marL="0" indent="0">
+              <a:buNone/>
+            </a:pPr>
+            <a:r>
+              <a:rPr lang="en-US" sz="3600" b="1" dirty="0">
                 <a:solidFill>
                   <a:srgbClr val="FFFFFF"/>
                 </a:solidFill>
@@ -10682,7 +10214,7 @@
               </a:rPr>
               <a:t>ojos</a:t>
             </a:r>
-            <a:endParaRPr lang="en-US" sz="2000" dirty="0"/>
+            <a:endParaRPr lang="en-US" sz="3600" dirty="0"/>
           </a:p>
         </p:txBody>
       </p:sp>
@@ -10707,11 +10239,11 @@
           <a:bodyPr wrap="square" rtlCol="0" anchor="ctr"/>
           <a:lstStyle/>
           <a:p>
-            <a:pPr indent="0" marL="0">
-              <a:buNone/>
-            </a:pPr>
-            <a:r>
-              <a:rPr lang="en-US" sz="1100" b="1" dirty="0">
+            <a:pPr marL="0" indent="0">
+              <a:buNone/>
+            </a:pPr>
+            <a:r>
+              <a:rPr lang="en-US" b="1" dirty="0">
                 <a:solidFill>
                   <a:srgbClr val="1C7293"/>
                 </a:solidFill>
@@ -10721,7 +10253,7 @@
               </a:rPr>
               <a:t>Numérica continua</a:t>
             </a:r>
-            <a:endParaRPr lang="en-US" sz="1100" dirty="0"/>
+            <a:endParaRPr lang="en-US" dirty="0"/>
           </a:p>
         </p:txBody>
       </p:sp>
@@ -10746,11 +10278,11 @@
           <a:bodyPr wrap="square" rtlCol="0" anchor="ctr"/>
           <a:lstStyle/>
           <a:p>
-            <a:pPr indent="0" marL="0">
-              <a:buNone/>
-            </a:pPr>
-            <a:r>
-              <a:rPr lang="en-US" sz="1050" dirty="0">
+            <a:pPr marL="0" indent="0">
+              <a:buNone/>
+            </a:pPr>
+            <a:r>
+              <a:rPr lang="en-US" sz="1600" dirty="0">
                 <a:solidFill>
                   <a:srgbClr val="9AA5C4"/>
                 </a:solidFill>
@@ -10760,7 +10292,7 @@
               </a:rPr>
               <a:t>Entrada</a:t>
             </a:r>
-            <a:endParaRPr lang="en-US" sz="1050" dirty="0"/>
+            <a:endParaRPr lang="en-US" sz="1600" dirty="0"/>
           </a:p>
         </p:txBody>
       </p:sp>
@@ -10785,11 +10317,11 @@
           <a:bodyPr wrap="square" rtlCol="0" anchor="ctr"/>
           <a:lstStyle/>
           <a:p>
-            <a:pPr indent="0" marL="0">
-              <a:buNone/>
-            </a:pPr>
-            <a:r>
-              <a:rPr lang="en-US" sz="1100" dirty="0">
+            <a:pPr marL="0" indent="0">
+              <a:buNone/>
+            </a:pPr>
+            <a:r>
+              <a:rPr lang="en-US" dirty="0">
                 <a:solidFill>
                   <a:srgbClr val="D6DBEC"/>
                 </a:solidFill>
@@ -10799,7 +10331,7 @@
               </a:rPr>
               <a:t>Valores bajos → mayor tiempo con ojos cerrados → mayor riesgo de fatiga.</a:t>
             </a:r>
-            <a:endParaRPr lang="en-US" sz="1100" dirty="0"/>
+            <a:endParaRPr lang="en-US" dirty="0"/>
           </a:p>
         </p:txBody>
       </p:sp>
@@ -10853,24 +10385,24 @@
         </p:nvSpPr>
         <p:spPr>
           <a:xfrm>
-            <a:off x="3611880" y="2560320"/>
-            <a:ext cx="2148840" cy="457200"/>
-          </a:xfrm>
-          <a:prstGeom prst="rect">
-            <a:avLst/>
-          </a:prstGeom>
-          <a:noFill/>
-          <a:ln/>
-        </p:spPr>
-        <p:txBody>
-          <a:bodyPr wrap="square" rtlCol="0" anchor="ctr"/>
-          <a:lstStyle/>
-          <a:p>
-            <a:pPr indent="0" marL="0">
-              <a:buNone/>
-            </a:pPr>
-            <a:r>
-              <a:rPr lang="en-US" sz="2000" b="1" dirty="0">
+            <a:off x="3611879" y="2560320"/>
+            <a:ext cx="2274015" cy="457200"/>
+          </a:xfrm>
+          <a:prstGeom prst="rect">
+            <a:avLst/>
+          </a:prstGeom>
+          <a:noFill/>
+          <a:ln/>
+        </p:spPr>
+        <p:txBody>
+          <a:bodyPr wrap="square" rtlCol="0" anchor="ctr"/>
+          <a:lstStyle/>
+          <a:p>
+            <a:pPr marL="0" indent="0">
+              <a:buNone/>
+            </a:pPr>
+            <a:r>
+              <a:rPr lang="en-US" sz="3600" b="1" dirty="0">
                 <a:solidFill>
                   <a:srgbClr val="FFFFFF"/>
                 </a:solidFill>
@@ -10880,7 +10412,7 @@
               </a:rPr>
               <a:t>bostezos</a:t>
             </a:r>
-            <a:endParaRPr lang="en-US" sz="2000" dirty="0"/>
+            <a:endParaRPr lang="en-US" sz="3600" dirty="0"/>
           </a:p>
         </p:txBody>
       </p:sp>
@@ -10905,11 +10437,11 @@
           <a:bodyPr wrap="square" rtlCol="0" anchor="ctr"/>
           <a:lstStyle/>
           <a:p>
-            <a:pPr indent="0" marL="0">
-              <a:buNone/>
-            </a:pPr>
-            <a:r>
-              <a:rPr lang="en-US" sz="1100" b="1" dirty="0">
+            <a:pPr marL="0" indent="0">
+              <a:buNone/>
+            </a:pPr>
+            <a:r>
+              <a:rPr lang="en-US" b="1" dirty="0">
                 <a:solidFill>
                   <a:srgbClr val="5FBDB0"/>
                 </a:solidFill>
@@ -10919,7 +10451,7 @@
               </a:rPr>
               <a:t>Numérica discreta</a:t>
             </a:r>
-            <a:endParaRPr lang="en-US" sz="1100" dirty="0"/>
+            <a:endParaRPr lang="en-US" dirty="0"/>
           </a:p>
         </p:txBody>
       </p:sp>
@@ -10944,11 +10476,11 @@
           <a:bodyPr wrap="square" rtlCol="0" anchor="ctr"/>
           <a:lstStyle/>
           <a:p>
-            <a:pPr indent="0" marL="0">
-              <a:buNone/>
-            </a:pPr>
-            <a:r>
-              <a:rPr lang="en-US" sz="1050" dirty="0">
+            <a:pPr marL="0" indent="0">
+              <a:buNone/>
+            </a:pPr>
+            <a:r>
+              <a:rPr lang="en-US" sz="1600" dirty="0">
                 <a:solidFill>
                   <a:srgbClr val="9AA5C4"/>
                 </a:solidFill>
@@ -10958,7 +10490,7 @@
               </a:rPr>
               <a:t>Entrada</a:t>
             </a:r>
-            <a:endParaRPr lang="en-US" sz="1050" dirty="0"/>
+            <a:endParaRPr lang="en-US" sz="1600" dirty="0"/>
           </a:p>
         </p:txBody>
       </p:sp>
@@ -10983,11 +10515,11 @@
           <a:bodyPr wrap="square" rtlCol="0" anchor="ctr"/>
           <a:lstStyle/>
           <a:p>
-            <a:pPr indent="0" marL="0">
-              <a:buNone/>
-            </a:pPr>
-            <a:r>
-              <a:rPr lang="en-US" sz="1100" dirty="0">
+            <a:pPr marL="0" indent="0">
+              <a:buNone/>
+            </a:pPr>
+            <a:r>
+              <a:rPr lang="en-US" dirty="0">
                 <a:solidFill>
                   <a:srgbClr val="D6DBEC"/>
                 </a:solidFill>
@@ -10997,7 +10529,7 @@
               </a:rPr>
               <a:t>A mayor cantidad de bostezos, mayor probabilidad de fatiga.</a:t>
             </a:r>
-            <a:endParaRPr lang="en-US" sz="1100" dirty="0"/>
+            <a:endParaRPr lang="en-US" dirty="0"/>
           </a:p>
         </p:txBody>
       </p:sp>
@@ -11064,11 +10596,11 @@
           <a:bodyPr wrap="square" rtlCol="0" anchor="ctr"/>
           <a:lstStyle/>
           <a:p>
-            <a:pPr indent="0" marL="0">
-              <a:buNone/>
-            </a:pPr>
-            <a:r>
-              <a:rPr lang="en-US" sz="2000" b="1" dirty="0">
+            <a:pPr marL="0" indent="0">
+              <a:buNone/>
+            </a:pPr>
+            <a:r>
+              <a:rPr lang="en-US" sz="3600" b="1" dirty="0">
                 <a:solidFill>
                   <a:srgbClr val="FFFFFF"/>
                 </a:solidFill>
@@ -11078,7 +10610,7 @@
               </a:rPr>
               <a:t>tiempo</a:t>
             </a:r>
-            <a:endParaRPr lang="en-US" sz="2000" dirty="0"/>
+            <a:endParaRPr lang="en-US" sz="3600" dirty="0"/>
           </a:p>
         </p:txBody>
       </p:sp>
@@ -11103,11 +10635,11 @@
           <a:bodyPr wrap="square" rtlCol="0" anchor="ctr"/>
           <a:lstStyle/>
           <a:p>
-            <a:pPr indent="0" marL="0">
-              <a:buNone/>
-            </a:pPr>
-            <a:r>
-              <a:rPr lang="en-US" sz="1100" b="1" dirty="0">
+            <a:pPr marL="0" indent="0">
+              <a:buNone/>
+            </a:pPr>
+            <a:r>
+              <a:rPr lang="en-US" b="1" dirty="0">
                 <a:solidFill>
                   <a:srgbClr val="F2A541"/>
                 </a:solidFill>
@@ -11117,7 +10649,7 @@
               </a:rPr>
               <a:t>Numérica continua</a:t>
             </a:r>
-            <a:endParaRPr lang="en-US" sz="1100" dirty="0"/>
+            <a:endParaRPr lang="en-US" dirty="0"/>
           </a:p>
         </p:txBody>
       </p:sp>
@@ -11142,11 +10674,11 @@
           <a:bodyPr wrap="square" rtlCol="0" anchor="ctr"/>
           <a:lstStyle/>
           <a:p>
-            <a:pPr indent="0" marL="0">
-              <a:buNone/>
-            </a:pPr>
-            <a:r>
-              <a:rPr lang="en-US" sz="1050" dirty="0">
+            <a:pPr marL="0" indent="0">
+              <a:buNone/>
+            </a:pPr>
+            <a:r>
+              <a:rPr lang="en-US" sz="1600" dirty="0">
                 <a:solidFill>
                   <a:srgbClr val="9AA5C4"/>
                 </a:solidFill>
@@ -11156,7 +10688,7 @@
               </a:rPr>
               <a:t>Entrada</a:t>
             </a:r>
-            <a:endParaRPr lang="en-US" sz="1050" dirty="0"/>
+            <a:endParaRPr lang="en-US" sz="1600" dirty="0"/>
           </a:p>
         </p:txBody>
       </p:sp>
@@ -11181,11 +10713,11 @@
           <a:bodyPr wrap="square" rtlCol="0" anchor="ctr"/>
           <a:lstStyle/>
           <a:p>
-            <a:pPr indent="0" marL="0">
-              <a:buNone/>
-            </a:pPr>
-            <a:r>
-              <a:rPr lang="en-US" sz="1100" dirty="0">
+            <a:pPr marL="0" indent="0">
+              <a:buNone/>
+            </a:pPr>
+            <a:r>
+              <a:rPr lang="en-US" dirty="0">
                 <a:solidFill>
                   <a:srgbClr val="D6DBEC"/>
                 </a:solidFill>
@@ -11195,7 +10727,7 @@
               </a:rPr>
               <a:t>A mayor tiempo continuo de conducción, mayor riesgo de fatiga.</a:t>
             </a:r>
-            <a:endParaRPr lang="en-US" sz="1100" dirty="0"/>
+            <a:endParaRPr lang="en-US" dirty="0"/>
           </a:p>
         </p:txBody>
       </p:sp>
@@ -11262,11 +10794,11 @@
           <a:bodyPr wrap="square" rtlCol="0" anchor="ctr"/>
           <a:lstStyle/>
           <a:p>
-            <a:pPr indent="0" marL="0">
-              <a:buNone/>
-            </a:pPr>
-            <a:r>
-              <a:rPr lang="en-US" sz="2000" b="1" dirty="0">
+            <a:pPr marL="0" indent="0">
+              <a:buNone/>
+            </a:pPr>
+            <a:r>
+              <a:rPr lang="en-US" sz="3600" b="1" dirty="0">
                 <a:solidFill>
                   <a:srgbClr val="FFFFFF"/>
                 </a:solidFill>
@@ -11276,7 +10808,7 @@
               </a:rPr>
               <a:t>fatiga</a:t>
             </a:r>
-            <a:endParaRPr lang="en-US" sz="2000" dirty="0"/>
+            <a:endParaRPr lang="en-US" sz="3600" dirty="0"/>
           </a:p>
         </p:txBody>
       </p:sp>
@@ -11301,11 +10833,11 @@
           <a:bodyPr wrap="square" rtlCol="0" anchor="ctr"/>
           <a:lstStyle/>
           <a:p>
-            <a:pPr indent="0" marL="0">
-              <a:buNone/>
-            </a:pPr>
-            <a:r>
-              <a:rPr lang="en-US" sz="1100" b="1" dirty="0">
+            <a:pPr marL="0" indent="0">
+              <a:buNone/>
+            </a:pPr>
+            <a:r>
+              <a:rPr lang="en-US" b="1" dirty="0">
                 <a:solidFill>
                   <a:srgbClr val="E8505B"/>
                 </a:solidFill>
@@ -11315,7 +10847,7 @@
               </a:rPr>
               <a:t>Numérica discreta</a:t>
             </a:r>
-            <a:endParaRPr lang="en-US" sz="1100" dirty="0"/>
+            <a:endParaRPr lang="en-US" dirty="0"/>
           </a:p>
         </p:txBody>
       </p:sp>
@@ -11340,11 +10872,11 @@
           <a:bodyPr wrap="square" rtlCol="0" anchor="ctr"/>
           <a:lstStyle/>
           <a:p>
-            <a:pPr indent="0" marL="0">
-              <a:buNone/>
-            </a:pPr>
-            <a:r>
-              <a:rPr lang="en-US" sz="1050" dirty="0">
+            <a:pPr marL="0" indent="0">
+              <a:buNone/>
+            </a:pPr>
+            <a:r>
+              <a:rPr lang="en-US" sz="1600" dirty="0">
                 <a:solidFill>
                   <a:srgbClr val="9AA5C4"/>
                 </a:solidFill>
@@ -11354,7 +10886,7 @@
               </a:rPr>
               <a:t>Objetivo</a:t>
             </a:r>
-            <a:endParaRPr lang="en-US" sz="1050" dirty="0"/>
+            <a:endParaRPr lang="en-US" sz="1600" dirty="0"/>
           </a:p>
         </p:txBody>
       </p:sp>
@@ -11379,11 +10911,11 @@
           <a:bodyPr wrap="square" rtlCol="0" anchor="ctr"/>
           <a:lstStyle/>
           <a:p>
-            <a:pPr indent="0" marL="0">
-              <a:buNone/>
-            </a:pPr>
-            <a:r>
-              <a:rPr lang="en-US" sz="1100" dirty="0">
+            <a:pPr marL="0" indent="0">
+              <a:buNone/>
+            </a:pPr>
+            <a:r>
+              <a:rPr lang="en-US" dirty="0">
                 <a:solidFill>
                   <a:srgbClr val="D6DBEC"/>
                 </a:solidFill>
@@ -11393,7 +10925,7 @@
               </a:rPr>
               <a:t>Nivel estimado por el sistema en una escala de 0 a 100.</a:t>
             </a:r>
-            <a:endParaRPr lang="en-US" sz="1100" dirty="0"/>
+            <a:endParaRPr lang="en-US" dirty="0"/>
           </a:p>
         </p:txBody>
       </p:sp>
@@ -11418,11 +10950,11 @@
           <a:bodyPr wrap="square" rtlCol="0" anchor="ctr"/>
           <a:lstStyle/>
           <a:p>
-            <a:pPr indent="0" marL="0">
-              <a:buNone/>
-            </a:pPr>
-            <a:r>
-              <a:rPr lang="en-US" sz="900" dirty="0">
+            <a:pPr marL="0" indent="0">
+              <a:buNone/>
+            </a:pPr>
+            <a:r>
+              <a:rPr lang="en-US" sz="1200" dirty="0">
                 <a:solidFill>
                   <a:srgbClr val="6B7280"/>
                 </a:solidFill>
@@ -11432,7 +10964,7 @@
               </a:rPr>
               <a:t>DriveSafe AI  |  Detección de somnolencia con Machine Learning</a:t>
             </a:r>
-            <a:endParaRPr lang="en-US" sz="900" dirty="0"/>
+            <a:endParaRPr lang="en-US" sz="1200" dirty="0"/>
           </a:p>
         </p:txBody>
       </p:sp>
@@ -11457,11 +10989,11 @@
           <a:bodyPr wrap="square" rtlCol="0" anchor="ctr"/>
           <a:lstStyle/>
           <a:p>
-            <a:pPr algn="r" indent="0" marL="0">
-              <a:buNone/>
-            </a:pPr>
-            <a:r>
-              <a:rPr lang="en-US" sz="900" dirty="0">
+            <a:pPr marL="0" indent="0" algn="r">
+              <a:buNone/>
+            </a:pPr>
+            <a:r>
+              <a:rPr lang="en-US" sz="1200" dirty="0">
                 <a:solidFill>
                   <a:srgbClr val="6B7280"/>
                 </a:solidFill>
@@ -11471,7 +11003,7 @@
               </a:rPr>
               <a:t>4</a:t>
             </a:r>
-            <a:endParaRPr lang="en-US" sz="900" dirty="0"/>
+            <a:endParaRPr lang="en-US" sz="1200" dirty="0"/>
           </a:p>
         </p:txBody>
       </p:sp>
@@ -11491,6 +11023,7 @@
         <a:solidFill>
           <a:srgbClr val="FFFFFF"/>
         </a:solidFill>
+        <a:effectLst/>
       </p:bgPr>
     </p:bg>
     <p:spTree>
@@ -11528,11 +11061,11 @@
           <a:bodyPr wrap="square" rtlCol="0" anchor="ctr"/>
           <a:lstStyle/>
           <a:p>
-            <a:pPr indent="0" marL="0">
-              <a:buNone/>
-            </a:pPr>
-            <a:r>
-              <a:rPr lang="en-US" sz="1300" b="1" spc="200" kern="0" dirty="0">
+            <a:pPr marL="0" indent="0">
+              <a:buNone/>
+            </a:pPr>
+            <a:r>
+              <a:rPr lang="en-US" sz="1600" b="1" kern="0" spc="200" dirty="0">
                 <a:solidFill>
                   <a:srgbClr val="1C7293"/>
                 </a:solidFill>
@@ -11542,7 +11075,7 @@
               </a:rPr>
               <a:t>02 · ANÁLISIS EXPLORATORIO</a:t>
             </a:r>
-            <a:endParaRPr lang="en-US" sz="1300" dirty="0"/>
+            <a:endParaRPr lang="en-US" sz="1600" dirty="0"/>
           </a:p>
         </p:txBody>
       </p:sp>
@@ -11567,11 +11100,11 @@
           <a:bodyPr wrap="square" rtlCol="0" anchor="ctr"/>
           <a:lstStyle/>
           <a:p>
-            <a:pPr indent="0" marL="0">
-              <a:buNone/>
-            </a:pPr>
-            <a:r>
-              <a:rPr lang="en-US" sz="3000" b="1" dirty="0">
+            <a:pPr marL="0" indent="0">
+              <a:buNone/>
+            </a:pPr>
+            <a:r>
+              <a:rPr lang="en-US" sz="3600" b="1" dirty="0">
                 <a:solidFill>
                   <a:srgbClr val="1A2238"/>
                 </a:solidFill>
@@ -11581,7 +11114,7 @@
               </a:rPr>
               <a:t>Correlación con la fatiga y filtrado de nulos</a:t>
             </a:r>
-            <a:endParaRPr lang="en-US" sz="3000" dirty="0"/>
+            <a:endParaRPr lang="en-US" sz="3600" dirty="0"/>
           </a:p>
         </p:txBody>
       </p:sp>
@@ -11606,11 +11139,11 @@
           <a:bodyPr wrap="square" rtlCol="0" anchor="ctr"/>
           <a:lstStyle/>
           <a:p>
-            <a:pPr indent="0" marL="0">
-              <a:buNone/>
-            </a:pPr>
-            <a:r>
-              <a:rPr lang="en-US" sz="1500" b="1" dirty="0">
+            <a:pPr marL="0" indent="0">
+              <a:buNone/>
+            </a:pPr>
+            <a:r>
+              <a:rPr lang="en-US" b="1" dirty="0">
                 <a:solidFill>
                   <a:srgbClr val="1A2238"/>
                 </a:solidFill>
@@ -11620,7 +11153,7 @@
               </a:rPr>
               <a:t>Relación con la variable objetivo</a:t>
             </a:r>
-            <a:endParaRPr lang="en-US" sz="1500" dirty="0"/>
+            <a:endParaRPr lang="en-US" dirty="0"/>
           </a:p>
         </p:txBody>
       </p:sp>
@@ -11667,11 +11200,11 @@
           <a:bodyPr wrap="square" rtlCol="0" anchor="ctr"/>
           <a:lstStyle/>
           <a:p>
-            <a:pPr indent="0" marL="0">
-              <a:buNone/>
-            </a:pPr>
-            <a:r>
-              <a:rPr lang="en-US" sz="1250" b="1" dirty="0">
+            <a:pPr marL="0" indent="0">
+              <a:buNone/>
+            </a:pPr>
+            <a:r>
+              <a:rPr lang="en-US" sz="1600" b="1" dirty="0">
                 <a:solidFill>
                   <a:srgbClr val="1A2238"/>
                 </a:solidFill>
@@ -11681,7 +11214,7 @@
               </a:rPr>
               <a:t>EAR (ojos) ↓</a:t>
             </a:r>
-            <a:endParaRPr lang="en-US" sz="1250" dirty="0"/>
+            <a:endParaRPr lang="en-US" sz="1600" dirty="0"/>
           </a:p>
         </p:txBody>
       </p:sp>
@@ -11726,11 +11259,11 @@
           <a:bodyPr wrap="square" rtlCol="0" anchor="ctr"/>
           <a:lstStyle/>
           <a:p>
-            <a:pPr indent="0" marL="0">
-              <a:buNone/>
-            </a:pPr>
-            <a:r>
-              <a:rPr lang="en-US" sz="1250" b="1" dirty="0">
+            <a:pPr marL="0" indent="0">
+              <a:buNone/>
+            </a:pPr>
+            <a:r>
+              <a:rPr lang="en-US" sz="1600" b="1" dirty="0">
                 <a:solidFill>
                   <a:srgbClr val="1C7293"/>
                 </a:solidFill>
@@ -11740,7 +11273,7 @@
               </a:rPr>
               <a:t>Fatiga ↑</a:t>
             </a:r>
-            <a:endParaRPr lang="en-US" sz="1250" dirty="0"/>
+            <a:endParaRPr lang="en-US" sz="1600" dirty="0"/>
           </a:p>
         </p:txBody>
       </p:sp>
@@ -11787,11 +11320,11 @@
           <a:bodyPr wrap="square" rtlCol="0" anchor="ctr"/>
           <a:lstStyle/>
           <a:p>
-            <a:pPr indent="0" marL="0">
-              <a:buNone/>
-            </a:pPr>
-            <a:r>
-              <a:rPr lang="en-US" sz="1250" b="1" dirty="0">
+            <a:pPr marL="0" indent="0">
+              <a:buNone/>
+            </a:pPr>
+            <a:r>
+              <a:rPr lang="en-US" sz="1600" b="1" dirty="0">
                 <a:solidFill>
                   <a:srgbClr val="1A2238"/>
                 </a:solidFill>
@@ -11801,7 +11334,7 @@
               </a:rPr>
               <a:t>Bostezos ↑</a:t>
             </a:r>
-            <a:endParaRPr lang="en-US" sz="1250" dirty="0"/>
+            <a:endParaRPr lang="en-US" sz="1600" dirty="0"/>
           </a:p>
         </p:txBody>
       </p:sp>
@@ -11846,11 +11379,11 @@
           <a:bodyPr wrap="square" rtlCol="0" anchor="ctr"/>
           <a:lstStyle/>
           <a:p>
-            <a:pPr indent="0" marL="0">
-              <a:buNone/>
-            </a:pPr>
-            <a:r>
-              <a:rPr lang="en-US" sz="1250" b="1" dirty="0">
+            <a:pPr marL="0" indent="0">
+              <a:buNone/>
+            </a:pPr>
+            <a:r>
+              <a:rPr lang="en-US" sz="1600" b="1" dirty="0">
                 <a:solidFill>
                   <a:srgbClr val="5FBDB0"/>
                 </a:solidFill>
@@ -11860,7 +11393,7 @@
               </a:rPr>
               <a:t>Fatiga ↑</a:t>
             </a:r>
-            <a:endParaRPr lang="en-US" sz="1250" dirty="0"/>
+            <a:endParaRPr lang="en-US" sz="1600" dirty="0"/>
           </a:p>
         </p:txBody>
       </p:sp>
@@ -11907,11 +11440,11 @@
           <a:bodyPr wrap="square" rtlCol="0" anchor="ctr"/>
           <a:lstStyle/>
           <a:p>
-            <a:pPr indent="0" marL="0">
-              <a:buNone/>
-            </a:pPr>
-            <a:r>
-              <a:rPr lang="en-US" sz="1250" b="1" dirty="0">
+            <a:pPr marL="0" indent="0">
+              <a:buNone/>
+            </a:pPr>
+            <a:r>
+              <a:rPr lang="en-US" sz="1600" b="1" dirty="0">
                 <a:solidFill>
                   <a:srgbClr val="1A2238"/>
                 </a:solidFill>
@@ -11921,7 +11454,7 @@
               </a:rPr>
               <a:t>Tiempo de conducción ↑</a:t>
             </a:r>
-            <a:endParaRPr lang="en-US" sz="1250" dirty="0"/>
+            <a:endParaRPr lang="en-US" sz="1600" dirty="0"/>
           </a:p>
         </p:txBody>
       </p:sp>
@@ -11966,11 +11499,11 @@
           <a:bodyPr wrap="square" rtlCol="0" anchor="ctr"/>
           <a:lstStyle/>
           <a:p>
-            <a:pPr indent="0" marL="0">
-              <a:buNone/>
-            </a:pPr>
-            <a:r>
-              <a:rPr lang="en-US" sz="1250" b="1" dirty="0">
+            <a:pPr marL="0" indent="0">
+              <a:buNone/>
+            </a:pPr>
+            <a:r>
+              <a:rPr lang="en-US" sz="1600" b="1" dirty="0">
                 <a:solidFill>
                   <a:srgbClr val="F2A541"/>
                 </a:solidFill>
@@ -11980,7 +11513,7 @@
               </a:rPr>
               <a:t>Fatiga ↑</a:t>
             </a:r>
-            <a:endParaRPr lang="en-US" sz="1250" dirty="0"/>
+            <a:endParaRPr lang="en-US" sz="1600" dirty="0"/>
           </a:p>
         </p:txBody>
       </p:sp>
@@ -12005,11 +11538,11 @@
           <a:bodyPr wrap="square" rtlCol="0" anchor="ctr"/>
           <a:lstStyle/>
           <a:p>
-            <a:pPr indent="0" marL="0">
-              <a:buNone/>
-            </a:pPr>
-            <a:r>
-              <a:rPr lang="en-US" sz="1500" b="1" dirty="0">
+            <a:pPr marL="0" indent="0">
+              <a:buNone/>
+            </a:pPr>
+            <a:r>
+              <a:rPr lang="en-US" b="1" dirty="0">
                 <a:solidFill>
                   <a:srgbClr val="1A2238"/>
                 </a:solidFill>
@@ -12019,7 +11552,7 @@
               </a:rPr>
               <a:t>Registros completos únicamente</a:t>
             </a:r>
-            <a:endParaRPr lang="en-US" sz="1500" dirty="0"/>
+            <a:endParaRPr lang="en-US" dirty="0"/>
           </a:p>
         </p:txBody>
       </p:sp>
@@ -12066,14 +11599,14 @@
           <a:bodyPr wrap="square" rtlCol="0" anchor="ctr"/>
           <a:lstStyle/>
           <a:p>
-            <a:pPr indent="0" marL="0">
+            <a:pPr marL="0" indent="0">
               <a:lnSpc>
                 <a:spcPct val="120000"/>
               </a:lnSpc>
               <a:buNone/>
             </a:pPr>
             <a:r>
-              <a:rPr lang="en-US" sz="1200" dirty="0">
+              <a:rPr lang="en-US" sz="1600" dirty="0">
                 <a:solidFill>
                   <a:srgbClr val="5FBDB0"/>
                 </a:solidFill>
@@ -12084,14 +11617,8 @@
               <a:t>SELECT ojos, bostezos, tiempo, fatiga
 </a:t>
             </a:r>
-            <a:pPr indent="0" marL="0">
-              <a:lnSpc>
-                <a:spcPct val="120000"/>
-              </a:lnSpc>
-              <a:buNone/>
-            </a:pPr>
-            <a:r>
-              <a:rPr lang="en-US" sz="1200" dirty="0">
+            <a:r>
+              <a:rPr lang="en-US" sz="1600" dirty="0">
                 <a:solidFill>
                   <a:srgbClr val="E9D8A6"/>
                 </a:solidFill>
@@ -12102,14 +11629,8 @@
               <a:t>FROM ml_samples
 </a:t>
             </a:r>
-            <a:pPr indent="0" marL="0">
-              <a:lnSpc>
-                <a:spcPct val="120000"/>
-              </a:lnSpc>
-              <a:buNone/>
-            </a:pPr>
-            <a:r>
-              <a:rPr lang="en-US" sz="1200" dirty="0">
+            <a:r>
+              <a:rPr lang="en-US" sz="1600" dirty="0">
                 <a:solidFill>
                   <a:srgbClr val="FFFFFF"/>
                 </a:solidFill>
@@ -12118,62 +11639,11 @@
                 <a:cs typeface="Consolas" pitchFamily="34" charset="-120"/>
               </a:rPr>
               <a:t>WHERE ojos IS NOT NULL
-</a:t>
-            </a:r>
-            <a:pPr indent="0" marL="0">
-              <a:lnSpc>
-                <a:spcPct val="120000"/>
-              </a:lnSpc>
-              <a:buNone/>
-            </a:pPr>
-            <a:r>
-              <a:rPr lang="en-US" sz="1200" dirty="0">
-                <a:solidFill>
-                  <a:srgbClr val="FFFFFF"/>
-                </a:solidFill>
-                <a:latin typeface="Consolas" pitchFamily="34" charset="0"/>
-                <a:ea typeface="Consolas" pitchFamily="34" charset="-122"/>
-                <a:cs typeface="Consolas" pitchFamily="34" charset="-120"/>
-              </a:rPr>
-              <a:t>  AND bostezos IS NOT NULL
-</a:t>
-            </a:r>
-            <a:pPr indent="0" marL="0">
-              <a:lnSpc>
-                <a:spcPct val="120000"/>
-              </a:lnSpc>
-              <a:buNone/>
-            </a:pPr>
-            <a:r>
-              <a:rPr lang="en-US" sz="1200" dirty="0">
-                <a:solidFill>
-                  <a:srgbClr val="FFFFFF"/>
-                </a:solidFill>
-                <a:latin typeface="Consolas" pitchFamily="34" charset="0"/>
-                <a:ea typeface="Consolas" pitchFamily="34" charset="-122"/>
-                <a:cs typeface="Consolas" pitchFamily="34" charset="-120"/>
-              </a:rPr>
-              <a:t>  AND tiempo IS NOT NULL
-</a:t>
-            </a:r>
-            <a:pPr indent="0" marL="0">
-              <a:lnSpc>
-                <a:spcPct val="120000"/>
-              </a:lnSpc>
-              <a:buNone/>
-            </a:pPr>
-            <a:r>
-              <a:rPr lang="en-US" sz="1200" dirty="0">
-                <a:solidFill>
-                  <a:srgbClr val="FFFFFF"/>
-                </a:solidFill>
-                <a:latin typeface="Consolas" pitchFamily="34" charset="0"/>
-                <a:ea typeface="Consolas" pitchFamily="34" charset="-122"/>
-                <a:cs typeface="Consolas" pitchFamily="34" charset="-120"/>
-              </a:rPr>
-              <a:t>  AND fatiga IS NOT NULL;</a:t>
-            </a:r>
-            <a:endParaRPr lang="en-US" sz="1200" dirty="0"/>
+  AND bostezos IS NOT NULL
+  AND tiempo IS NOT NULL
+  AND fatiga IS NOT NULL;</a:t>
+            </a:r>
+            <a:endParaRPr lang="en-US" sz="1600" dirty="0"/>
           </a:p>
         </p:txBody>
       </p:sp>
@@ -12198,11 +11668,11 @@
           <a:bodyPr wrap="square" rtlCol="0" anchor="ctr"/>
           <a:lstStyle/>
           <a:p>
-            <a:pPr indent="0" marL="0">
-              <a:buNone/>
-            </a:pPr>
-            <a:r>
-              <a:rPr lang="en-US" sz="1200" dirty="0">
+            <a:pPr marL="0" indent="0">
+              <a:buNone/>
+            </a:pPr>
+            <a:r>
+              <a:rPr lang="en-US" sz="1600" dirty="0">
                 <a:solidFill>
                   <a:srgbClr val="6B7280"/>
                 </a:solidFill>
@@ -12212,7 +11682,7 @@
               </a:rPr>
               <a:t>En lugar de imputar valores, el sistema descarta automáticamente cualquier muestra incompleta antes de exportar dataset.csv.</a:t>
             </a:r>
-            <a:endParaRPr lang="en-US" sz="1200" dirty="0"/>
+            <a:endParaRPr lang="en-US" sz="1600" dirty="0"/>
           </a:p>
         </p:txBody>
       </p:sp>
@@ -12237,7 +11707,7 @@
           <a:bodyPr wrap="square" rtlCol="0" anchor="ctr"/>
           <a:lstStyle/>
           <a:p>
-            <a:pPr indent="0" marL="0">
+            <a:pPr marL="0" indent="0">
               <a:buNone/>
             </a:pPr>
             <a:r>
@@ -12276,7 +11746,7 @@
           <a:bodyPr wrap="square" rtlCol="0" anchor="ctr"/>
           <a:lstStyle/>
           <a:p>
-            <a:pPr algn="r" indent="0" marL="0">
+            <a:pPr marL="0" indent="0" algn="r">
               <a:buNone/>
             </a:pPr>
             <a:r>
@@ -12310,6 +11780,7 @@
         <a:solidFill>
           <a:srgbClr val="FFFFFF"/>
         </a:solidFill>
+        <a:effectLst/>
       </p:bgPr>
     </p:bg>
     <p:spTree>
@@ -12347,11 +11818,11 @@
           <a:bodyPr wrap="square" rtlCol="0" anchor="ctr"/>
           <a:lstStyle/>
           <a:p>
-            <a:pPr indent="0" marL="0">
-              <a:buNone/>
-            </a:pPr>
-            <a:r>
-              <a:rPr lang="en-US" sz="1300" b="1" spc="200" kern="0" dirty="0">
+            <a:pPr marL="0" indent="0">
+              <a:buNone/>
+            </a:pPr>
+            <a:r>
+              <a:rPr lang="en-US" sz="1300" b="1" kern="0" spc="200" dirty="0">
                 <a:solidFill>
                   <a:srgbClr val="1C7293"/>
                 </a:solidFill>
@@ -12386,11 +11857,11 @@
           <a:bodyPr wrap="square" rtlCol="0" anchor="ctr"/>
           <a:lstStyle/>
           <a:p>
-            <a:pPr indent="0" marL="0">
-              <a:buNone/>
-            </a:pPr>
-            <a:r>
-              <a:rPr lang="en-US" sz="3000" b="1" dirty="0">
+            <a:pPr marL="0" indent="0">
+              <a:buNone/>
+            </a:pPr>
+            <a:r>
+              <a:rPr lang="en-US" sz="4000" b="1" dirty="0">
                 <a:solidFill>
                   <a:srgbClr val="1A2238"/>
                 </a:solidFill>
@@ -12400,7 +11871,7 @@
               </a:rPr>
               <a:t>Sin normalización ni codificación adicional</a:t>
             </a:r>
-            <a:endParaRPr lang="en-US" sz="3000" dirty="0"/>
+            <a:endParaRPr lang="en-US" sz="4000" dirty="0"/>
           </a:p>
         </p:txBody>
       </p:sp>
@@ -12467,11 +11938,11 @@
           <a:bodyPr wrap="square" rtlCol="0" anchor="ctr"/>
           <a:lstStyle/>
           <a:p>
-            <a:pPr algn="ctr" indent="0" marL="0">
-              <a:buNone/>
-            </a:pPr>
-            <a:r>
-              <a:rPr lang="en-US" sz="1800" b="1" dirty="0">
+            <a:pPr marL="0" indent="0" algn="ctr">
+              <a:buNone/>
+            </a:pPr>
+            <a:r>
+              <a:rPr lang="en-US" sz="2800" b="1" dirty="0">
                 <a:solidFill>
                   <a:srgbClr val="FFFFFF"/>
                 </a:solidFill>
@@ -12481,7 +11952,7 @@
               </a:rPr>
               <a:t>✕</a:t>
             </a:r>
-            <a:endParaRPr lang="en-US" sz="1800" dirty="0"/>
+            <a:endParaRPr lang="en-US" sz="2800" dirty="0"/>
           </a:p>
         </p:txBody>
       </p:sp>
@@ -12506,11 +11977,11 @@
           <a:bodyPr wrap="square" rtlCol="0" anchor="ctr"/>
           <a:lstStyle/>
           <a:p>
-            <a:pPr indent="0" marL="0">
-              <a:buNone/>
-            </a:pPr>
-            <a:r>
-              <a:rPr lang="en-US" sz="1400" b="1" dirty="0">
+            <a:pPr marL="0" indent="0">
+              <a:buNone/>
+            </a:pPr>
+            <a:r>
+              <a:rPr lang="en-US" sz="2000" b="1" dirty="0">
                 <a:solidFill>
                   <a:srgbClr val="1A2238"/>
                 </a:solidFill>
@@ -12520,7 +11991,7 @@
               </a:rPr>
               <a:t>Normalización</a:t>
             </a:r>
-            <a:endParaRPr lang="en-US" sz="1400" dirty="0"/>
+            <a:endParaRPr lang="en-US" sz="2000" dirty="0"/>
           </a:p>
         </p:txBody>
       </p:sp>
@@ -12545,11 +12016,11 @@
           <a:bodyPr wrap="square" rtlCol="0" anchor="ctr"/>
           <a:lstStyle/>
           <a:p>
-            <a:pPr indent="0" marL="0">
-              <a:buNone/>
-            </a:pPr>
-            <a:r>
-              <a:rPr lang="en-US" sz="1050" dirty="0">
+            <a:pPr marL="0" indent="0">
+              <a:buNone/>
+            </a:pPr>
+            <a:r>
+              <a:rPr lang="en-US" sz="1400" dirty="0">
                 <a:solidFill>
                   <a:srgbClr val="6B7280"/>
                 </a:solidFill>
@@ -12559,7 +12030,7 @@
               </a:rPr>
               <a:t>No aplica — Random Forest Regressor no requiere variables escaladas para un buen desempeño.</a:t>
             </a:r>
-            <a:endParaRPr lang="en-US" sz="1050" dirty="0"/>
+            <a:endParaRPr lang="en-US" sz="1400" dirty="0"/>
           </a:p>
         </p:txBody>
       </p:sp>
@@ -12626,11 +12097,11 @@
           <a:bodyPr wrap="square" rtlCol="0" anchor="ctr"/>
           <a:lstStyle/>
           <a:p>
-            <a:pPr algn="ctr" indent="0" marL="0">
-              <a:buNone/>
-            </a:pPr>
-            <a:r>
-              <a:rPr lang="en-US" sz="1800" b="1" dirty="0">
+            <a:pPr marL="0" indent="0" algn="ctr">
+              <a:buNone/>
+            </a:pPr>
+            <a:r>
+              <a:rPr lang="en-US" sz="2800" b="1" dirty="0">
                 <a:solidFill>
                   <a:srgbClr val="FFFFFF"/>
                 </a:solidFill>
@@ -12640,7 +12111,7 @@
               </a:rPr>
               <a:t>✕</a:t>
             </a:r>
-            <a:endParaRPr lang="en-US" sz="1800" dirty="0"/>
+            <a:endParaRPr lang="en-US" sz="2800" dirty="0"/>
           </a:p>
         </p:txBody>
       </p:sp>
@@ -12665,11 +12136,11 @@
           <a:bodyPr wrap="square" rtlCol="0" anchor="ctr"/>
           <a:lstStyle/>
           <a:p>
-            <a:pPr indent="0" marL="0">
-              <a:buNone/>
-            </a:pPr>
-            <a:r>
-              <a:rPr lang="en-US" sz="1400" b="1" dirty="0">
+            <a:pPr marL="0" indent="0">
+              <a:buNone/>
+            </a:pPr>
+            <a:r>
+              <a:rPr lang="en-US" sz="2000" b="1" dirty="0">
                 <a:solidFill>
                   <a:srgbClr val="1A2238"/>
                 </a:solidFill>
@@ -12679,7 +12150,7 @@
               </a:rPr>
               <a:t>Codificación</a:t>
             </a:r>
-            <a:endParaRPr lang="en-US" sz="1400" dirty="0"/>
+            <a:endParaRPr lang="en-US" sz="2000" dirty="0"/>
           </a:p>
         </p:txBody>
       </p:sp>
@@ -12704,11 +12175,11 @@
           <a:bodyPr wrap="square" rtlCol="0" anchor="ctr"/>
           <a:lstStyle/>
           <a:p>
-            <a:pPr indent="0" marL="0">
-              <a:buNone/>
-            </a:pPr>
-            <a:r>
-              <a:rPr lang="en-US" sz="1050" dirty="0">
+            <a:pPr marL="0" indent="0">
+              <a:buNone/>
+            </a:pPr>
+            <a:r>
+              <a:rPr lang="en-US" sz="1400" dirty="0">
                 <a:solidFill>
                   <a:srgbClr val="6B7280"/>
                 </a:solidFill>
@@ -12718,7 +12189,7 @@
               </a:rPr>
               <a:t>No aplica — todas las variables (ojos, bostezos, tiempo, fatiga) ya son numéricas.</a:t>
             </a:r>
-            <a:endParaRPr lang="en-US" sz="1050" dirty="0"/>
+            <a:endParaRPr lang="en-US" sz="1400" dirty="0"/>
           </a:p>
         </p:txBody>
       </p:sp>
@@ -12785,11 +12256,11 @@
           <a:bodyPr wrap="square" rtlCol="0" anchor="ctr"/>
           <a:lstStyle/>
           <a:p>
-            <a:pPr algn="ctr" indent="0" marL="0">
-              <a:buNone/>
-            </a:pPr>
-            <a:r>
-              <a:rPr lang="en-US" sz="1800" b="1" dirty="0">
+            <a:pPr marL="0" indent="0" algn="ctr">
+              <a:buNone/>
+            </a:pPr>
+            <a:r>
+              <a:rPr lang="en-US" sz="2800" b="1" dirty="0">
                 <a:solidFill>
                   <a:srgbClr val="FFFFFF"/>
                 </a:solidFill>
@@ -12799,7 +12270,7 @@
               </a:rPr>
               <a:t>✕</a:t>
             </a:r>
-            <a:endParaRPr lang="en-US" sz="1800" dirty="0"/>
+            <a:endParaRPr lang="en-US" sz="2800" dirty="0"/>
           </a:p>
         </p:txBody>
       </p:sp>
@@ -12824,11 +12295,11 @@
           <a:bodyPr wrap="square" rtlCol="0" anchor="ctr"/>
           <a:lstStyle/>
           <a:p>
-            <a:pPr indent="0" marL="0">
-              <a:buNone/>
-            </a:pPr>
-            <a:r>
-              <a:rPr lang="en-US" sz="1400" b="1" dirty="0">
+            <a:pPr marL="0" indent="0">
+              <a:buNone/>
+            </a:pPr>
+            <a:r>
+              <a:rPr lang="en-US" sz="2000" b="1" dirty="0">
                 <a:solidFill>
                   <a:srgbClr val="1A2238"/>
                 </a:solidFill>
@@ -12838,7 +12309,7 @@
               </a:rPr>
               <a:t>Transformación</a:t>
             </a:r>
-            <a:endParaRPr lang="en-US" sz="1400" dirty="0"/>
+            <a:endParaRPr lang="en-US" sz="2000" dirty="0"/>
           </a:p>
         </p:txBody>
       </p:sp>
@@ -12863,11 +12334,11 @@
           <a:bodyPr wrap="square" rtlCol="0" anchor="ctr"/>
           <a:lstStyle/>
           <a:p>
-            <a:pPr indent="0" marL="0">
-              <a:buNone/>
-            </a:pPr>
-            <a:r>
-              <a:rPr lang="en-US" sz="1050" dirty="0">
+            <a:pPr marL="0" indent="0">
+              <a:buNone/>
+            </a:pPr>
+            <a:r>
+              <a:rPr lang="en-US" sz="1400" dirty="0">
                 <a:solidFill>
                   <a:srgbClr val="6B7280"/>
                 </a:solidFill>
@@ -12877,7 +12348,7 @@
               </a:rPr>
               <a:t>No aplica — las variables se usan en el mismo formato capturado por monitor.js.</a:t>
             </a:r>
-            <a:endParaRPr lang="en-US" sz="1050" dirty="0"/>
+            <a:endParaRPr lang="en-US" sz="1400" dirty="0"/>
           </a:p>
         </p:txBody>
       </p:sp>
@@ -12902,11 +12373,11 @@
           <a:bodyPr wrap="square" rtlCol="0" anchor="ctr"/>
           <a:lstStyle/>
           <a:p>
-            <a:pPr indent="0" marL="0">
-              <a:buNone/>
-            </a:pPr>
-            <a:r>
-              <a:rPr lang="en-US" sz="1500" b="1" dirty="0">
+            <a:pPr marL="0" indent="0">
+              <a:buNone/>
+            </a:pPr>
+            <a:r>
+              <a:rPr lang="en-US" sz="2000" b="1" dirty="0">
                 <a:solidFill>
                   <a:srgbClr val="1A2238"/>
                 </a:solidFill>
@@ -12916,7 +12387,7 @@
               </a:rPr>
               <a:t>Características de entrada y variable objetivo</a:t>
             </a:r>
-            <a:endParaRPr lang="en-US" sz="1500" dirty="0"/>
+            <a:endParaRPr lang="en-US" sz="2000" dirty="0"/>
           </a:p>
         </p:txBody>
       </p:sp>
@@ -12963,11 +12434,11 @@
           <a:bodyPr wrap="square" rtlCol="0" anchor="ctr"/>
           <a:lstStyle/>
           <a:p>
-            <a:pPr algn="ctr" indent="0" marL="0">
-              <a:buNone/>
-            </a:pPr>
-            <a:r>
-              <a:rPr lang="en-US" sz="1250" b="1" dirty="0">
+            <a:pPr marL="0" indent="0" algn="ctr">
+              <a:buNone/>
+            </a:pPr>
+            <a:r>
+              <a:rPr lang="en-US" b="1" dirty="0">
                 <a:solidFill>
                   <a:srgbClr val="FFFFFF"/>
                 </a:solidFill>
@@ -12977,7 +12448,7 @@
               </a:rPr>
               <a:t>ojos</a:t>
             </a:r>
-            <a:endParaRPr lang="en-US" sz="1250" dirty="0"/>
+            <a:endParaRPr lang="en-US" dirty="0"/>
           </a:p>
         </p:txBody>
       </p:sp>
@@ -13024,11 +12495,11 @@
           <a:bodyPr wrap="square" rtlCol="0" anchor="ctr"/>
           <a:lstStyle/>
           <a:p>
-            <a:pPr algn="ctr" indent="0" marL="0">
-              <a:buNone/>
-            </a:pPr>
-            <a:r>
-              <a:rPr lang="en-US" sz="1250" b="1" dirty="0">
+            <a:pPr marL="0" indent="0" algn="ctr">
+              <a:buNone/>
+            </a:pPr>
+            <a:r>
+              <a:rPr lang="en-US" b="1" dirty="0">
                 <a:solidFill>
                   <a:srgbClr val="FFFFFF"/>
                 </a:solidFill>
@@ -13038,7 +12509,7 @@
               </a:rPr>
               <a:t>bostezos</a:t>
             </a:r>
-            <a:endParaRPr lang="en-US" sz="1250" dirty="0"/>
+            <a:endParaRPr lang="en-US" dirty="0"/>
           </a:p>
         </p:txBody>
       </p:sp>
@@ -13085,11 +12556,11 @@
           <a:bodyPr wrap="square" rtlCol="0" anchor="ctr"/>
           <a:lstStyle/>
           <a:p>
-            <a:pPr algn="ctr" indent="0" marL="0">
-              <a:buNone/>
-            </a:pPr>
-            <a:r>
-              <a:rPr lang="en-US" sz="1250" b="1" dirty="0">
+            <a:pPr marL="0" indent="0" algn="ctr">
+              <a:buNone/>
+            </a:pPr>
+            <a:r>
+              <a:rPr lang="en-US" b="1" dirty="0">
                 <a:solidFill>
                   <a:srgbClr val="FFFFFF"/>
                 </a:solidFill>
@@ -13099,7 +12570,7 @@
               </a:rPr>
               <a:t>tiempo</a:t>
             </a:r>
-            <a:endParaRPr lang="en-US" sz="1250" dirty="0"/>
+            <a:endParaRPr lang="en-US" dirty="0"/>
           </a:p>
         </p:txBody>
       </p:sp>
@@ -13166,11 +12637,11 @@
           <a:bodyPr wrap="square" rtlCol="0" anchor="ctr"/>
           <a:lstStyle/>
           <a:p>
-            <a:pPr algn="ctr" indent="0" marL="0">
-              <a:buNone/>
-            </a:pPr>
-            <a:r>
-              <a:rPr lang="en-US" sz="1250" b="1" dirty="0">
+            <a:pPr marL="0" indent="0" algn="ctr">
+              <a:buNone/>
+            </a:pPr>
+            <a:r>
+              <a:rPr lang="en-US" b="1" dirty="0">
                 <a:solidFill>
                   <a:srgbClr val="FFFFFF"/>
                 </a:solidFill>
@@ -13180,7 +12651,7 @@
               </a:rPr>
               <a:t>fatiga</a:t>
             </a:r>
-            <a:endParaRPr lang="en-US" sz="1250" dirty="0"/>
+            <a:endParaRPr lang="en-US" dirty="0"/>
           </a:p>
         </p:txBody>
       </p:sp>
@@ -13205,11 +12676,11 @@
           <a:bodyPr wrap="square" rtlCol="0" anchor="ctr"/>
           <a:lstStyle/>
           <a:p>
-            <a:pPr indent="0" marL="0">
-              <a:buNone/>
-            </a:pPr>
-            <a:r>
-              <a:rPr lang="en-US" sz="1150" i="1" dirty="0">
+            <a:pPr marL="0" indent="0">
+              <a:buNone/>
+            </a:pPr>
+            <a:r>
+              <a:rPr lang="en-US" sz="1600" i="1" dirty="0">
                 <a:solidFill>
                   <a:srgbClr val="6B7280"/>
                 </a:solidFill>
@@ -13219,7 +12690,7 @@
               </a:rPr>
               <a:t>El nivel EAR identifica microsueños; los bostezos son un indicador fisiológico de cansancio; el tiempo de conducción incrementa el riesgo progresivamente.</a:t>
             </a:r>
-            <a:endParaRPr lang="en-US" sz="1150" dirty="0"/>
+            <a:endParaRPr lang="en-US" sz="1600" dirty="0"/>
           </a:p>
         </p:txBody>
       </p:sp>
@@ -13244,7 +12715,7 @@
           <a:bodyPr wrap="square" rtlCol="0" anchor="ctr"/>
           <a:lstStyle/>
           <a:p>
-            <a:pPr indent="0" marL="0">
+            <a:pPr marL="0" indent="0">
               <a:buNone/>
             </a:pPr>
             <a:r>
@@ -13283,7 +12754,7 @@
           <a:bodyPr wrap="square" rtlCol="0" anchor="ctr"/>
           <a:lstStyle/>
           <a:p>
-            <a:pPr algn="r" indent="0" marL="0">
+            <a:pPr marL="0" indent="0" algn="r">
               <a:buNone/>
             </a:pPr>
             <a:r>
@@ -13317,6 +12788,7 @@
         <a:solidFill>
           <a:srgbClr val="0F1B3C"/>
         </a:solidFill>
+        <a:effectLst/>
       </p:bgPr>
     </p:bg>
     <p:spTree>
@@ -13354,11 +12826,11 @@
           <a:bodyPr wrap="square" rtlCol="0" anchor="ctr"/>
           <a:lstStyle/>
           <a:p>
-            <a:pPr indent="0" marL="0">
-              <a:buNone/>
-            </a:pPr>
-            <a:r>
-              <a:rPr lang="en-US" sz="1300" b="1" spc="200" kern="0" dirty="0">
+            <a:pPr marL="0" indent="0">
+              <a:buNone/>
+            </a:pPr>
+            <a:r>
+              <a:rPr lang="en-US" b="1" kern="0" spc="200" dirty="0">
                 <a:solidFill>
                   <a:srgbClr val="5FBDB0"/>
                 </a:solidFill>
@@ -13368,7 +12840,7 @@
               </a:rPr>
               <a:t>04 · ENTRENAMIENTO DEL MODELO</a:t>
             </a:r>
-            <a:endParaRPr lang="en-US" sz="1300" dirty="0"/>
+            <a:endParaRPr lang="en-US" dirty="0"/>
           </a:p>
         </p:txBody>
       </p:sp>
@@ -13393,11 +12865,11 @@
           <a:bodyPr wrap="square" rtlCol="0" anchor="ctr"/>
           <a:lstStyle/>
           <a:p>
-            <a:pPr indent="0" marL="0">
-              <a:buNone/>
-            </a:pPr>
-            <a:r>
-              <a:rPr lang="en-US" sz="3000" b="1" dirty="0">
+            <a:pPr marL="0" indent="0">
+              <a:buNone/>
+            </a:pPr>
+            <a:r>
+              <a:rPr lang="en-US" sz="4000" b="1" dirty="0">
                 <a:solidFill>
                   <a:srgbClr val="FFFFFF"/>
                 </a:solidFill>
@@ -13407,7 +12879,7 @@
               </a:rPr>
               <a:t>Random Forest Regressor</a:t>
             </a:r>
-            <a:endParaRPr lang="en-US" sz="3000" dirty="0"/>
+            <a:endParaRPr lang="en-US" sz="4000" dirty="0"/>
           </a:p>
         </p:txBody>
       </p:sp>
@@ -13432,11 +12904,11 @@
           <a:bodyPr wrap="square" rtlCol="0" anchor="ctr"/>
           <a:lstStyle/>
           <a:p>
-            <a:pPr indent="0" marL="0">
-              <a:buNone/>
-            </a:pPr>
-            <a:r>
-              <a:rPr lang="en-US" sz="1300" dirty="0">
+            <a:pPr marL="0" indent="0">
+              <a:buNone/>
+            </a:pPr>
+            <a:r>
+              <a:rPr lang="en-US" dirty="0">
                 <a:solidFill>
                   <a:srgbClr val="C7CEE6"/>
                 </a:solidFill>
@@ -13446,7 +12918,7 @@
               </a:rPr>
               <a:t>Entrenado con Scikit-learn a partir de dataset.csv, mediante el script train_model.py.</a:t>
             </a:r>
-            <a:endParaRPr lang="en-US" sz="1300" dirty="0"/>
+            <a:endParaRPr lang="en-US" dirty="0"/>
           </a:p>
         </p:txBody>
       </p:sp>
@@ -13459,7 +12931,7 @@
         <p:spPr>
           <a:xfrm>
             <a:off x="548640" y="2103120"/>
-            <a:ext cx="5669280" cy="3566160"/>
+            <a:ext cx="5669280" cy="4288802"/>
           </a:xfrm>
           <a:prstGeom prst="roundRect">
             <a:avLst>
@@ -13481,26 +12953,26 @@
         <p:spPr>
           <a:xfrm>
             <a:off x="822960" y="2331720"/>
-            <a:ext cx="5120640" cy="3200400"/>
-          </a:xfrm>
-          <a:prstGeom prst="rect">
-            <a:avLst/>
-          </a:prstGeom>
-          <a:noFill/>
-          <a:ln/>
-        </p:spPr>
-        <p:txBody>
-          <a:bodyPr wrap="square" rtlCol="0" anchor="ctr"/>
-          <a:lstStyle/>
-          <a:p>
-            <a:pPr indent="0" marL="0">
+            <a:ext cx="5120640" cy="3840480"/>
+          </a:xfrm>
+          <a:prstGeom prst="rect">
+            <a:avLst/>
+          </a:prstGeom>
+          <a:noFill/>
+          <a:ln/>
+        </p:spPr>
+        <p:txBody>
+          <a:bodyPr wrap="square" rtlCol="0" anchor="ctr"/>
+          <a:lstStyle/>
+          <a:p>
+            <a:pPr marL="0" indent="0">
               <a:lnSpc>
                 <a:spcPct val="125000"/>
               </a:lnSpc>
               <a:buNone/>
             </a:pPr>
             <a:r>
-              <a:rPr lang="en-US" sz="1150" dirty="0">
+              <a:rPr lang="en-US" sz="1600" dirty="0">
                 <a:solidFill>
                   <a:srgbClr val="9AA5C4"/>
                 </a:solidFill>
@@ -13511,14 +12983,8 @@
               <a:t>import pandas as pd
 </a:t>
             </a:r>
-            <a:pPr indent="0" marL="0">
-              <a:lnSpc>
-                <a:spcPct val="125000"/>
-              </a:lnSpc>
-              <a:buNone/>
-            </a:pPr>
-            <a:r>
-              <a:rPr lang="en-US" sz="1150" dirty="0">
+            <a:r>
+              <a:rPr lang="en-US" sz="1600" dirty="0">
                 <a:solidFill>
                   <a:srgbClr val="5FBDB0"/>
                 </a:solidFill>
@@ -13529,14 +12995,8 @@
               <a:t>from sklearn.ensemble import RandomForestRegressor
 </a:t>
             </a:r>
-            <a:pPr indent="0" marL="0">
-              <a:lnSpc>
-                <a:spcPct val="125000"/>
-              </a:lnSpc>
-              <a:buNone/>
-            </a:pPr>
-            <a:r>
-              <a:rPr lang="en-US" sz="1150" dirty="0">
+            <a:r>
+              <a:rPr lang="en-US" sz="1600" dirty="0">
                 <a:solidFill>
                   <a:srgbClr val="9AA5C4"/>
                 </a:solidFill>
@@ -13547,14 +13007,8 @@
               <a:t>import joblib
 </a:t>
             </a:r>
-            <a:pPr indent="0" marL="0">
-              <a:lnSpc>
-                <a:spcPct val="125000"/>
-              </a:lnSpc>
-              <a:buNone/>
-            </a:pPr>
-            <a:r>
-              <a:rPr lang="en-US" sz="1150" dirty="0">
+            <a:r>
+              <a:rPr lang="en-US" sz="1600" dirty="0">
                 <a:solidFill>
                   <a:srgbClr val="FFFFFF"/>
                 </a:solidFill>
@@ -13563,34 +13017,24 @@
                 <a:cs typeface="Consolas" pitchFamily="34" charset="-120"/>
               </a:rPr>
               <a:t>df = pd.read_csv("dataset.csv")
+X = df[["ojos", "bostezos", "tiempo"]]
+y = df["fatiga"]
 </a:t>
             </a:r>
-            <a:pPr indent="0" marL="0">
-              <a:lnSpc>
-                <a:spcPct val="125000"/>
-              </a:lnSpc>
-              <a:buNone/>
-            </a:pPr>
-            <a:r>
-              <a:rPr lang="en-US" sz="1150" dirty="0">
-                <a:solidFill>
-                  <a:srgbClr val="FFFFFF"/>
+            <a:r>
+              <a:rPr lang="en-US" sz="1600" dirty="0">
+                <a:solidFill>
+                  <a:srgbClr val="F2A541"/>
                 </a:solidFill>
                 <a:latin typeface="Consolas" pitchFamily="34" charset="0"/>
                 <a:ea typeface="Consolas" pitchFamily="34" charset="-122"/>
                 <a:cs typeface="Consolas" pitchFamily="34" charset="-120"/>
               </a:rPr>
-              <a:t>X = df[["ojos", "bostezos", "tiempo"]]
+              <a:t>modelo = RandomForestRegressor()
 </a:t>
             </a:r>
-            <a:pPr indent="0" marL="0">
-              <a:lnSpc>
-                <a:spcPct val="125000"/>
-              </a:lnSpc>
-              <a:buNone/>
-            </a:pPr>
-            <a:r>
-              <a:rPr lang="en-US" sz="1150" dirty="0">
+            <a:r>
+              <a:rPr lang="en-US" sz="1600" dirty="0">
                 <a:solidFill>
                   <a:srgbClr val="FFFFFF"/>
                 </a:solidFill>
@@ -13598,63 +13042,21 @@
                 <a:ea typeface="Consolas" pitchFamily="34" charset="-122"/>
                 <a:cs typeface="Consolas" pitchFamily="34" charset="-120"/>
               </a:rPr>
-              <a:t>y = df["fatiga"]
+              <a:t>modelo.fit(X, y)
 </a:t>
             </a:r>
-            <a:pPr indent="0" marL="0">
-              <a:lnSpc>
-                <a:spcPct val="125000"/>
-              </a:lnSpc>
-              <a:buNone/>
-            </a:pPr>
-            <a:r>
-              <a:rPr lang="en-US" sz="1150" dirty="0">
-                <a:solidFill>
-                  <a:srgbClr val="F2A541"/>
+            <a:r>
+              <a:rPr lang="en-US" sz="1600" dirty="0">
+                <a:solidFill>
+                  <a:srgbClr val="E8505B"/>
                 </a:solidFill>
                 <a:latin typeface="Consolas" pitchFamily="34" charset="0"/>
                 <a:ea typeface="Consolas" pitchFamily="34" charset="-122"/>
                 <a:cs typeface="Consolas" pitchFamily="34" charset="-120"/>
               </a:rPr>
-              <a:t>modelo = RandomForestRegressor()
-</a:t>
-            </a:r>
-            <a:pPr indent="0" marL="0">
-              <a:lnSpc>
-                <a:spcPct val="125000"/>
-              </a:lnSpc>
-              <a:buNone/>
-            </a:pPr>
-            <a:r>
-              <a:rPr lang="en-US" sz="1150" dirty="0">
-                <a:solidFill>
-                  <a:srgbClr val="FFFFFF"/>
-                </a:solidFill>
-                <a:latin typeface="Consolas" pitchFamily="34" charset="0"/>
-                <a:ea typeface="Consolas" pitchFamily="34" charset="-122"/>
-                <a:cs typeface="Consolas" pitchFamily="34" charset="-120"/>
-              </a:rPr>
-              <a:t>modelo.fit(X, y)
-</a:t>
-            </a:r>
-            <a:pPr indent="0" marL="0">
-              <a:lnSpc>
-                <a:spcPct val="125000"/>
-              </a:lnSpc>
-              <a:buNone/>
-            </a:pPr>
-            <a:r>
-              <a:rPr lang="en-US" sz="1150" dirty="0">
-                <a:solidFill>
-                  <a:srgbClr val="E8505B"/>
-                </a:solidFill>
-                <a:latin typeface="Consolas" pitchFamily="34" charset="0"/>
-                <a:ea typeface="Consolas" pitchFamily="34" charset="-122"/>
-                <a:cs typeface="Consolas" pitchFamily="34" charset="-120"/>
-              </a:rPr>
               <a:t>joblib.dump(modelo, "modelo_fatiga.pkl")</a:t>
             </a:r>
-            <a:endParaRPr lang="en-US" sz="1150" dirty="0"/>
+            <a:endParaRPr lang="en-US" sz="1600" dirty="0"/>
           </a:p>
         </p:txBody>
       </p:sp>
@@ -13699,11 +13101,11 @@
           <a:bodyPr wrap="square" rtlCol="0" anchor="ctr"/>
           <a:lstStyle/>
           <a:p>
-            <a:pPr algn="ctr" indent="0" marL="0">
-              <a:buNone/>
-            </a:pPr>
-            <a:r>
-              <a:rPr lang="en-US" sz="1500" b="1" dirty="0">
+            <a:pPr marL="0" indent="0" algn="ctr">
+              <a:buNone/>
+            </a:pPr>
+            <a:r>
+              <a:rPr lang="en-US" sz="2000" b="1" dirty="0">
                 <a:solidFill>
                   <a:srgbClr val="FFFFFF"/>
                 </a:solidFill>
@@ -13713,7 +13115,7 @@
               </a:rPr>
               <a:t>1</a:t>
             </a:r>
-            <a:endParaRPr lang="en-US" sz="1500" dirty="0"/>
+            <a:endParaRPr lang="en-US" sz="2000" dirty="0"/>
           </a:p>
         </p:txBody>
       </p:sp>
@@ -13738,11 +13140,11 @@
           <a:bodyPr wrap="square" rtlCol="0" anchor="ctr"/>
           <a:lstStyle/>
           <a:p>
-            <a:pPr indent="0" marL="0">
-              <a:buNone/>
-            </a:pPr>
-            <a:r>
-              <a:rPr lang="en-US" sz="1350" b="1" dirty="0">
+            <a:pPr marL="0" indent="0">
+              <a:buNone/>
+            </a:pPr>
+            <a:r>
+              <a:rPr lang="en-US" b="1" dirty="0">
                 <a:solidFill>
                   <a:srgbClr val="FFFFFF"/>
                 </a:solidFill>
@@ -13752,7 +13154,7 @@
               </a:rPr>
               <a:t>Carga de datos</a:t>
             </a:r>
-            <a:endParaRPr lang="en-US" sz="1350" dirty="0"/>
+            <a:endParaRPr lang="en-US" dirty="0"/>
           </a:p>
         </p:txBody>
       </p:sp>
@@ -13777,11 +13179,11 @@
           <a:bodyPr wrap="square" rtlCol="0" anchor="ctr"/>
           <a:lstStyle/>
           <a:p>
-            <a:pPr indent="0" marL="0">
-              <a:buNone/>
-            </a:pPr>
-            <a:r>
-              <a:rPr lang="en-US" sz="1100" dirty="0">
+            <a:pPr marL="0" indent="0">
+              <a:buNone/>
+            </a:pPr>
+            <a:r>
+              <a:rPr lang="en-US" sz="1600" dirty="0">
                 <a:solidFill>
                   <a:srgbClr val="9AA5C4"/>
                 </a:solidFill>
@@ -13791,7 +13193,7 @@
               </a:rPr>
               <a:t>Se lee dataset.csv con pandas</a:t>
             </a:r>
-            <a:endParaRPr lang="en-US" sz="1100" dirty="0"/>
+            <a:endParaRPr lang="en-US" sz="1600" dirty="0"/>
           </a:p>
         </p:txBody>
       </p:sp>
@@ -13836,11 +13238,11 @@
           <a:bodyPr wrap="square" rtlCol="0" anchor="ctr"/>
           <a:lstStyle/>
           <a:p>
-            <a:pPr algn="ctr" indent="0" marL="0">
-              <a:buNone/>
-            </a:pPr>
-            <a:r>
-              <a:rPr lang="en-US" sz="1500" b="1" dirty="0">
+            <a:pPr marL="0" indent="0" algn="ctr">
+              <a:buNone/>
+            </a:pPr>
+            <a:r>
+              <a:rPr lang="en-US" sz="2000" b="1" dirty="0">
                 <a:solidFill>
                   <a:srgbClr val="FFFFFF"/>
                 </a:solidFill>
@@ -13850,7 +13252,7 @@
               </a:rPr>
               <a:t>2</a:t>
             </a:r>
-            <a:endParaRPr lang="en-US" sz="1500" dirty="0"/>
+            <a:endParaRPr lang="en-US" sz="2000" dirty="0"/>
           </a:p>
         </p:txBody>
       </p:sp>
@@ -13875,11 +13277,11 @@
           <a:bodyPr wrap="square" rtlCol="0" anchor="ctr"/>
           <a:lstStyle/>
           <a:p>
-            <a:pPr indent="0" marL="0">
-              <a:buNone/>
-            </a:pPr>
-            <a:r>
-              <a:rPr lang="en-US" sz="1350" b="1" dirty="0">
+            <a:pPr marL="0" indent="0">
+              <a:buNone/>
+            </a:pPr>
+            <a:r>
+              <a:rPr lang="en-US" b="1" dirty="0">
                 <a:solidFill>
                   <a:srgbClr val="FFFFFF"/>
                 </a:solidFill>
@@ -13889,7 +13291,7 @@
               </a:rPr>
               <a:t>Selección de variables</a:t>
             </a:r>
-            <a:endParaRPr lang="en-US" sz="1350" dirty="0"/>
+            <a:endParaRPr lang="en-US" dirty="0"/>
           </a:p>
         </p:txBody>
       </p:sp>
@@ -13914,11 +13316,11 @@
           <a:bodyPr wrap="square" rtlCol="0" anchor="ctr"/>
           <a:lstStyle/>
           <a:p>
-            <a:pPr indent="0" marL="0">
-              <a:buNone/>
-            </a:pPr>
-            <a:r>
-              <a:rPr lang="en-US" sz="1100" dirty="0">
+            <a:pPr marL="0" indent="0">
+              <a:buNone/>
+            </a:pPr>
+            <a:r>
+              <a:rPr lang="en-US" sz="1600" dirty="0">
                 <a:solidFill>
                   <a:srgbClr val="9AA5C4"/>
                 </a:solidFill>
@@ -13928,7 +13330,7 @@
               </a:rPr>
               <a:t>X = ojos, bostezos, tiempo · y = fatiga</a:t>
             </a:r>
-            <a:endParaRPr lang="en-US" sz="1100" dirty="0"/>
+            <a:endParaRPr lang="en-US" sz="1600" dirty="0"/>
           </a:p>
         </p:txBody>
       </p:sp>
@@ -13973,11 +13375,11 @@
           <a:bodyPr wrap="square" rtlCol="0" anchor="ctr"/>
           <a:lstStyle/>
           <a:p>
-            <a:pPr algn="ctr" indent="0" marL="0">
-              <a:buNone/>
-            </a:pPr>
-            <a:r>
-              <a:rPr lang="en-US" sz="1500" b="1" dirty="0">
+            <a:pPr marL="0" indent="0" algn="ctr">
+              <a:buNone/>
+            </a:pPr>
+            <a:r>
+              <a:rPr lang="en-US" sz="2000" b="1" dirty="0">
                 <a:solidFill>
                   <a:srgbClr val="FFFFFF"/>
                 </a:solidFill>
@@ -13987,7 +13389,7 @@
               </a:rPr>
               <a:t>3</a:t>
             </a:r>
-            <a:endParaRPr lang="en-US" sz="1500" dirty="0"/>
+            <a:endParaRPr lang="en-US" sz="2000" dirty="0"/>
           </a:p>
         </p:txBody>
       </p:sp>
@@ -14012,11 +13414,11 @@
           <a:bodyPr wrap="square" rtlCol="0" anchor="ctr"/>
           <a:lstStyle/>
           <a:p>
-            <a:pPr indent="0" marL="0">
-              <a:buNone/>
-            </a:pPr>
-            <a:r>
-              <a:rPr lang="en-US" sz="1350" b="1" dirty="0">
+            <a:pPr marL="0" indent="0">
+              <a:buNone/>
+            </a:pPr>
+            <a:r>
+              <a:rPr lang="en-US" b="1" dirty="0">
                 <a:solidFill>
                   <a:srgbClr val="FFFFFF"/>
                 </a:solidFill>
@@ -14026,7 +13428,7 @@
               </a:rPr>
               <a:t>Entrenamiento</a:t>
             </a:r>
-            <a:endParaRPr lang="en-US" sz="1350" dirty="0"/>
+            <a:endParaRPr lang="en-US" dirty="0"/>
           </a:p>
         </p:txBody>
       </p:sp>
@@ -14051,11 +13453,11 @@
           <a:bodyPr wrap="square" rtlCol="0" anchor="ctr"/>
           <a:lstStyle/>
           <a:p>
-            <a:pPr indent="0" marL="0">
-              <a:buNone/>
-            </a:pPr>
-            <a:r>
-              <a:rPr lang="en-US" sz="1100" dirty="0">
+            <a:pPr marL="0" indent="0">
+              <a:buNone/>
+            </a:pPr>
+            <a:r>
+              <a:rPr lang="en-US" sz="1600" dirty="0">
                 <a:solidFill>
                   <a:srgbClr val="9AA5C4"/>
                 </a:solidFill>
@@ -14065,7 +13467,7 @@
               </a:rPr>
               <a:t>Múltiples árboles de decisión (Random Forest)</a:t>
             </a:r>
-            <a:endParaRPr lang="en-US" sz="1100" dirty="0"/>
+            <a:endParaRPr lang="en-US" sz="1600" dirty="0"/>
           </a:p>
         </p:txBody>
       </p:sp>
@@ -14110,11 +13512,11 @@
           <a:bodyPr wrap="square" rtlCol="0" anchor="ctr"/>
           <a:lstStyle/>
           <a:p>
-            <a:pPr algn="ctr" indent="0" marL="0">
-              <a:buNone/>
-            </a:pPr>
-            <a:r>
-              <a:rPr lang="en-US" sz="1500" b="1" dirty="0">
+            <a:pPr marL="0" indent="0" algn="ctr">
+              <a:buNone/>
+            </a:pPr>
+            <a:r>
+              <a:rPr lang="en-US" sz="2000" b="1" dirty="0">
                 <a:solidFill>
                   <a:srgbClr val="FFFFFF"/>
                 </a:solidFill>
@@ -14124,7 +13526,7 @@
               </a:rPr>
               <a:t>4</a:t>
             </a:r>
-            <a:endParaRPr lang="en-US" sz="1500" dirty="0"/>
+            <a:endParaRPr lang="en-US" sz="2000" dirty="0"/>
           </a:p>
         </p:txBody>
       </p:sp>
@@ -14149,11 +13551,11 @@
           <a:bodyPr wrap="square" rtlCol="0" anchor="ctr"/>
           <a:lstStyle/>
           <a:p>
-            <a:pPr indent="0" marL="0">
-              <a:buNone/>
-            </a:pPr>
-            <a:r>
-              <a:rPr lang="en-US" sz="1350" b="1" dirty="0">
+            <a:pPr marL="0" indent="0">
+              <a:buNone/>
+            </a:pPr>
+            <a:r>
+              <a:rPr lang="en-US" b="1" dirty="0">
                 <a:solidFill>
                   <a:srgbClr val="FFFFFF"/>
                 </a:solidFill>
@@ -14163,7 +13565,7 @@
               </a:rPr>
               <a:t>Serialización</a:t>
             </a:r>
-            <a:endParaRPr lang="en-US" sz="1350" dirty="0"/>
+            <a:endParaRPr lang="en-US" dirty="0"/>
           </a:p>
         </p:txBody>
       </p:sp>
@@ -14188,11 +13590,11 @@
           <a:bodyPr wrap="square" rtlCol="0" anchor="ctr"/>
           <a:lstStyle/>
           <a:p>
-            <a:pPr indent="0" marL="0">
-              <a:buNone/>
-            </a:pPr>
-            <a:r>
-              <a:rPr lang="en-US" sz="1100" dirty="0">
+            <a:pPr marL="0" indent="0">
+              <a:buNone/>
+            </a:pPr>
+            <a:r>
+              <a:rPr lang="en-US" sz="1600" dirty="0">
                 <a:solidFill>
                   <a:srgbClr val="9AA5C4"/>
                 </a:solidFill>
@@ -14202,7 +13604,7 @@
               </a:rPr>
               <a:t>joblib.dump → modelo_fatiga.pkl</a:t>
             </a:r>
-            <a:endParaRPr lang="en-US" sz="1100" dirty="0"/>
+            <a:endParaRPr lang="en-US" sz="1600" dirty="0"/>
           </a:p>
         </p:txBody>
       </p:sp>
@@ -14227,11 +13629,11 @@
           <a:bodyPr wrap="square" rtlCol="0" anchor="ctr"/>
           <a:lstStyle/>
           <a:p>
-            <a:pPr indent="0" marL="0">
-              <a:buNone/>
-            </a:pPr>
-            <a:r>
-              <a:rPr lang="en-US" sz="900" dirty="0">
+            <a:pPr marL="0" indent="0">
+              <a:buNone/>
+            </a:pPr>
+            <a:r>
+              <a:rPr lang="en-US" sz="1100" dirty="0">
                 <a:solidFill>
                   <a:srgbClr val="9AA5C4"/>
                 </a:solidFill>
@@ -14241,7 +13643,7 @@
               </a:rPr>
               <a:t>DriveSafe AI  |  Detección de somnolencia con Machine Learning</a:t>
             </a:r>
-            <a:endParaRPr lang="en-US" sz="900" dirty="0"/>
+            <a:endParaRPr lang="en-US" sz="1100" dirty="0"/>
           </a:p>
         </p:txBody>
       </p:sp>
@@ -14266,11 +13668,11 @@
           <a:bodyPr wrap="square" rtlCol="0" anchor="ctr"/>
           <a:lstStyle/>
           <a:p>
-            <a:pPr algn="r" indent="0" marL="0">
-              <a:buNone/>
-            </a:pPr>
-            <a:r>
-              <a:rPr lang="en-US" sz="900" dirty="0">
+            <a:pPr marL="0" indent="0" algn="r">
+              <a:buNone/>
+            </a:pPr>
+            <a:r>
+              <a:rPr lang="en-US" sz="1100" dirty="0">
                 <a:solidFill>
                   <a:srgbClr val="9AA5C4"/>
                 </a:solidFill>
@@ -14280,7 +13682,7 @@
               </a:rPr>
               <a:t>7</a:t>
             </a:r>
-            <a:endParaRPr lang="en-US" sz="900" dirty="0"/>
+            <a:endParaRPr lang="en-US" sz="1100" dirty="0"/>
           </a:p>
         </p:txBody>
       </p:sp>
@@ -14300,6 +13702,7 @@
         <a:solidFill>
           <a:srgbClr val="FFFFFF"/>
         </a:solidFill>
+        <a:effectLst/>
       </p:bgPr>
     </p:bg>
     <p:spTree>
@@ -14337,11 +13740,11 @@
           <a:bodyPr wrap="square" rtlCol="0" anchor="ctr"/>
           <a:lstStyle/>
           <a:p>
-            <a:pPr indent="0" marL="0">
-              <a:buNone/>
-            </a:pPr>
-            <a:r>
-              <a:rPr lang="en-US" sz="1300" b="1" spc="200" kern="0" dirty="0">
+            <a:pPr marL="0" indent="0">
+              <a:buNone/>
+            </a:pPr>
+            <a:r>
+              <a:rPr lang="en-US" sz="2000" b="1" kern="0" spc="200" dirty="0">
                 <a:solidFill>
                   <a:srgbClr val="1C7293"/>
                 </a:solidFill>
@@ -14351,7 +13754,7 @@
               </a:rPr>
               <a:t>04 · ENTRENAMIENTO DEL MODELO</a:t>
             </a:r>
-            <a:endParaRPr lang="en-US" sz="1300" dirty="0"/>
+            <a:endParaRPr lang="en-US" sz="2000" dirty="0"/>
           </a:p>
         </p:txBody>
       </p:sp>
@@ -14376,11 +13779,11 @@
           <a:bodyPr wrap="square" rtlCol="0" anchor="ctr"/>
           <a:lstStyle/>
           <a:p>
-            <a:pPr indent="0" marL="0">
-              <a:buNone/>
-            </a:pPr>
-            <a:r>
-              <a:rPr lang="en-US" sz="3000" b="1" dirty="0">
+            <a:pPr marL="0" indent="0">
+              <a:buNone/>
+            </a:pPr>
+            <a:r>
+              <a:rPr lang="en-US" sz="4400" b="1" dirty="0">
                 <a:solidFill>
                   <a:srgbClr val="1A2238"/>
                 </a:solidFill>
@@ -14390,7 +13793,7 @@
               </a:rPr>
               <a:t>¿Por qué Random Forest Regressor?</a:t>
             </a:r>
-            <a:endParaRPr lang="en-US" sz="3000" dirty="0"/>
+            <a:endParaRPr lang="en-US" sz="4400" dirty="0"/>
           </a:p>
         </p:txBody>
       </p:sp>
@@ -14459,11 +13862,11 @@
           <a:bodyPr wrap="square" rtlCol="0" anchor="ctr"/>
           <a:lstStyle/>
           <a:p>
-            <a:pPr algn="ctr" indent="0" marL="0">
-              <a:buNone/>
-            </a:pPr>
-            <a:r>
-              <a:rPr lang="en-US" sz="1050" b="1" dirty="0">
+            <a:pPr marL="0" indent="0" algn="ctr">
+              <a:buNone/>
+            </a:pPr>
+            <a:r>
+              <a:rPr lang="en-US" sz="1600" b="1" dirty="0">
                 <a:solidFill>
                   <a:srgbClr val="FFFFFF"/>
                 </a:solidFill>
@@ -14473,7 +13876,7 @@
               </a:rPr>
               <a:t>Seleccionado</a:t>
             </a:r>
-            <a:endParaRPr lang="en-US" sz="1050" dirty="0"/>
+            <a:endParaRPr lang="en-US" sz="1600" dirty="0"/>
           </a:p>
         </p:txBody>
       </p:sp>
@@ -14498,11 +13901,11 @@
           <a:bodyPr wrap="square" rtlCol="0" anchor="ctr"/>
           <a:lstStyle/>
           <a:p>
-            <a:pPr indent="0" marL="0">
-              <a:buNone/>
-            </a:pPr>
-            <a:r>
-              <a:rPr lang="en-US" sz="1900" b="1" dirty="0">
+            <a:pPr marL="0" indent="0">
+              <a:buNone/>
+            </a:pPr>
+            <a:r>
+              <a:rPr lang="en-US" sz="3200" b="1" dirty="0">
                 <a:solidFill>
                   <a:srgbClr val="FFFFFF"/>
                 </a:solidFill>
@@ -14512,7 +13915,7 @@
               </a:rPr>
               <a:t>Random Forest Regressor</a:t>
             </a:r>
-            <a:endParaRPr lang="en-US" sz="1900" dirty="0"/>
+            <a:endParaRPr lang="en-US" sz="3200" dirty="0"/>
           </a:p>
         </p:txBody>
       </p:sp>
@@ -14537,11 +13940,11 @@
           <a:bodyPr wrap="square" rtlCol="0" anchor="ctr"/>
           <a:lstStyle/>
           <a:p>
-            <a:pPr indent="0" marL="0">
-              <a:buNone/>
-            </a:pPr>
-            <a:r>
-              <a:rPr lang="en-US" sz="1200" b="1" dirty="0">
+            <a:pPr marL="0" indent="0">
+              <a:buNone/>
+            </a:pPr>
+            <a:r>
+              <a:rPr lang="en-US" sz="2000" b="1" dirty="0">
                 <a:solidFill>
                   <a:srgbClr val="5FBDB0"/>
                 </a:solidFill>
@@ -14551,7 +13954,7 @@
               </a:rPr>
               <a:t>Ventajas</a:t>
             </a:r>
-            <a:endParaRPr lang="en-US" sz="1200" dirty="0"/>
+            <a:endParaRPr lang="en-US" sz="2000" dirty="0"/>
           </a:p>
         </p:txBody>
       </p:sp>
@@ -14576,11 +13979,11 @@
           <a:bodyPr wrap="square" rtlCol="0" anchor="ctr"/>
           <a:lstStyle/>
           <a:p>
-            <a:pPr indent="0" marL="0">
-              <a:buNone/>
-            </a:pPr>
-            <a:r>
-              <a:rPr lang="en-US" sz="1150" dirty="0">
+            <a:pPr marL="0" indent="0">
+              <a:buNone/>
+            </a:pPr>
+            <a:r>
+              <a:rPr lang="en-US" dirty="0">
                 <a:solidFill>
                   <a:srgbClr val="D6DBEC"/>
                 </a:solidFill>
@@ -14590,7 +13993,7 @@
               </a:rPr>
               <a:t>•  Buena precisión y tolerancia al ruido</a:t>
             </a:r>
-            <a:endParaRPr lang="en-US" sz="1150" dirty="0"/>
+            <a:endParaRPr lang="en-US" dirty="0"/>
           </a:p>
         </p:txBody>
       </p:sp>
@@ -14615,11 +14018,11 @@
           <a:bodyPr wrap="square" rtlCol="0" anchor="ctr"/>
           <a:lstStyle/>
           <a:p>
-            <a:pPr indent="0" marL="0">
-              <a:buNone/>
-            </a:pPr>
-            <a:r>
-              <a:rPr lang="en-US" sz="1150" dirty="0">
+            <a:pPr marL="0" indent="0">
+              <a:buNone/>
+            </a:pPr>
+            <a:r>
+              <a:rPr lang="en-US" dirty="0">
                 <a:solidFill>
                   <a:srgbClr val="D6DBEC"/>
                 </a:solidFill>
@@ -14629,7 +14032,7 @@
               </a:rPr>
               <a:t>•  Reduce el sobreajuste con múltiples árboles</a:t>
             </a:r>
-            <a:endParaRPr lang="en-US" sz="1150" dirty="0"/>
+            <a:endParaRPr lang="en-US" dirty="0"/>
           </a:p>
         </p:txBody>
       </p:sp>
@@ -14654,11 +14057,11 @@
           <a:bodyPr wrap="square" rtlCol="0" anchor="ctr"/>
           <a:lstStyle/>
           <a:p>
-            <a:pPr indent="0" marL="0">
-              <a:buNone/>
-            </a:pPr>
-            <a:r>
-              <a:rPr lang="en-US" sz="1150" dirty="0">
+            <a:pPr marL="0" indent="0">
+              <a:buNone/>
+            </a:pPr>
+            <a:r>
+              <a:rPr lang="en-US" dirty="0">
                 <a:solidFill>
                   <a:srgbClr val="D6DBEC"/>
                 </a:solidFill>
@@ -14668,7 +14071,7 @@
               </a:rPr>
               <a:t>•  Modela relaciones no lineales</a:t>
             </a:r>
-            <a:endParaRPr lang="en-US" sz="1150" dirty="0"/>
+            <a:endParaRPr lang="en-US" dirty="0"/>
           </a:p>
         </p:txBody>
       </p:sp>
@@ -14693,11 +14096,11 @@
           <a:bodyPr wrap="square" rtlCol="0" anchor="ctr"/>
           <a:lstStyle/>
           <a:p>
-            <a:pPr indent="0" marL="0">
-              <a:buNone/>
-            </a:pPr>
-            <a:r>
-              <a:rPr lang="en-US" sz="1200" b="1" dirty="0">
+            <a:pPr marL="0" indent="0">
+              <a:buNone/>
+            </a:pPr>
+            <a:r>
+              <a:rPr lang="en-US" sz="2000" b="1" dirty="0">
                 <a:solidFill>
                   <a:srgbClr val="E8505B"/>
                 </a:solidFill>
@@ -14707,7 +14110,7 @@
               </a:rPr>
               <a:t>Desventajas</a:t>
             </a:r>
-            <a:endParaRPr lang="en-US" sz="1200" dirty="0"/>
+            <a:endParaRPr lang="en-US" sz="2000" dirty="0"/>
           </a:p>
         </p:txBody>
       </p:sp>
@@ -14732,11 +14135,11 @@
           <a:bodyPr wrap="square" rtlCol="0" anchor="ctr"/>
           <a:lstStyle/>
           <a:p>
-            <a:pPr indent="0" marL="0">
-              <a:buNone/>
-            </a:pPr>
-            <a:r>
-              <a:rPr lang="en-US" sz="1150" dirty="0">
+            <a:pPr marL="0" indent="0">
+              <a:buNone/>
+            </a:pPr>
+            <a:r>
+              <a:rPr lang="en-US" dirty="0">
                 <a:solidFill>
                   <a:srgbClr val="D6DBEC"/>
                 </a:solidFill>
@@ -14746,7 +14149,7 @@
               </a:rPr>
               <a:t>•  Mayor tiempo de entrenamiento</a:t>
             </a:r>
-            <a:endParaRPr lang="en-US" sz="1150" dirty="0"/>
+            <a:endParaRPr lang="en-US" dirty="0"/>
           </a:p>
         </p:txBody>
       </p:sp>
@@ -14771,11 +14174,11 @@
           <a:bodyPr wrap="square" rtlCol="0" anchor="ctr"/>
           <a:lstStyle/>
           <a:p>
-            <a:pPr indent="0" marL="0">
-              <a:buNone/>
-            </a:pPr>
-            <a:r>
-              <a:rPr lang="en-US" sz="1150" dirty="0">
+            <a:pPr marL="0" indent="0">
+              <a:buNone/>
+            </a:pPr>
+            <a:r>
+              <a:rPr lang="en-US" dirty="0">
                 <a:solidFill>
                   <a:srgbClr val="D6DBEC"/>
                 </a:solidFill>
@@ -14785,7 +14188,7 @@
               </a:rPr>
               <a:t>•  Mayor consumo de memoria</a:t>
             </a:r>
-            <a:endParaRPr lang="en-US" sz="1150" dirty="0"/>
+            <a:endParaRPr lang="en-US" dirty="0"/>
           </a:p>
         </p:txBody>
       </p:sp>
@@ -14854,11 +14257,11 @@
           <a:bodyPr wrap="square" rtlCol="0" anchor="ctr"/>
           <a:lstStyle/>
           <a:p>
-            <a:pPr algn="ctr" indent="0" marL="0">
-              <a:buNone/>
-            </a:pPr>
-            <a:r>
-              <a:rPr lang="en-US" sz="1050" b="1" dirty="0">
+            <a:pPr marL="0" indent="0" algn="ctr">
+              <a:buNone/>
+            </a:pPr>
+            <a:r>
+              <a:rPr lang="en-US" sz="1600" b="1" dirty="0">
                 <a:solidFill>
                   <a:srgbClr val="FFFFFF"/>
                 </a:solidFill>
@@ -14868,7 +14271,7 @@
               </a:rPr>
               <a:t>Considerado</a:t>
             </a:r>
-            <a:endParaRPr lang="en-US" sz="1050" dirty="0"/>
+            <a:endParaRPr lang="en-US" sz="1600" dirty="0"/>
           </a:p>
         </p:txBody>
       </p:sp>
@@ -14893,11 +14296,11 @@
           <a:bodyPr wrap="square" rtlCol="0" anchor="ctr"/>
           <a:lstStyle/>
           <a:p>
-            <a:pPr indent="0" marL="0">
-              <a:buNone/>
-            </a:pPr>
-            <a:r>
-              <a:rPr lang="en-US" sz="1900" b="1" dirty="0">
+            <a:pPr marL="0" indent="0">
+              <a:buNone/>
+            </a:pPr>
+            <a:r>
+              <a:rPr lang="en-US" sz="3200" b="1" dirty="0">
                 <a:solidFill>
                   <a:srgbClr val="1A2238"/>
                 </a:solidFill>
@@ -14907,7 +14310,7 @@
               </a:rPr>
               <a:t>Regresión Lineal</a:t>
             </a:r>
-            <a:endParaRPr lang="en-US" sz="1900" dirty="0"/>
+            <a:endParaRPr lang="en-US" sz="3200" dirty="0"/>
           </a:p>
         </p:txBody>
       </p:sp>
@@ -14932,11 +14335,11 @@
           <a:bodyPr wrap="square" rtlCol="0" anchor="ctr"/>
           <a:lstStyle/>
           <a:p>
-            <a:pPr indent="0" marL="0">
-              <a:buNone/>
-            </a:pPr>
-            <a:r>
-              <a:rPr lang="en-US" sz="1200" b="1" dirty="0">
+            <a:pPr marL="0" indent="0">
+              <a:buNone/>
+            </a:pPr>
+            <a:r>
+              <a:rPr lang="en-US" sz="2000" b="1" dirty="0">
                 <a:solidFill>
                   <a:srgbClr val="1C7293"/>
                 </a:solidFill>
@@ -14946,7 +14349,7 @@
               </a:rPr>
               <a:t>Ventajas</a:t>
             </a:r>
-            <a:endParaRPr lang="en-US" sz="1200" dirty="0"/>
+            <a:endParaRPr lang="en-US" sz="2000" dirty="0"/>
           </a:p>
         </p:txBody>
       </p:sp>
@@ -14971,11 +14374,11 @@
           <a:bodyPr wrap="square" rtlCol="0" anchor="ctr"/>
           <a:lstStyle/>
           <a:p>
-            <a:pPr indent="0" marL="0">
-              <a:buNone/>
-            </a:pPr>
-            <a:r>
-              <a:rPr lang="en-US" sz="1150" dirty="0">
+            <a:pPr marL="0" indent="0">
+              <a:buNone/>
+            </a:pPr>
+            <a:r>
+              <a:rPr lang="en-US" dirty="0">
                 <a:solidFill>
                   <a:srgbClr val="1A2238"/>
                 </a:solidFill>
@@ -14985,7 +14388,7 @@
               </a:rPr>
               <a:t>•  Implementación sencilla</a:t>
             </a:r>
-            <a:endParaRPr lang="en-US" sz="1150" dirty="0"/>
+            <a:endParaRPr lang="en-US" dirty="0"/>
           </a:p>
         </p:txBody>
       </p:sp>
@@ -15010,11 +14413,11 @@
           <a:bodyPr wrap="square" rtlCol="0" anchor="ctr"/>
           <a:lstStyle/>
           <a:p>
-            <a:pPr indent="0" marL="0">
-              <a:buNone/>
-            </a:pPr>
-            <a:r>
-              <a:rPr lang="en-US" sz="1150" dirty="0">
+            <a:pPr marL="0" indent="0">
+              <a:buNone/>
+            </a:pPr>
+            <a:r>
+              <a:rPr lang="en-US" dirty="0">
                 <a:solidFill>
                   <a:srgbClr val="1A2238"/>
                 </a:solidFill>
@@ -15024,7 +14427,7 @@
               </a:rPr>
               <a:t>•  Entrenamiento rápido</a:t>
             </a:r>
-            <a:endParaRPr lang="en-US" sz="1150" dirty="0"/>
+            <a:endParaRPr lang="en-US" dirty="0"/>
           </a:p>
         </p:txBody>
       </p:sp>
@@ -15049,11 +14452,11 @@
           <a:bodyPr wrap="square" rtlCol="0" anchor="ctr"/>
           <a:lstStyle/>
           <a:p>
-            <a:pPr indent="0" marL="0">
-              <a:buNone/>
-            </a:pPr>
-            <a:r>
-              <a:rPr lang="en-US" sz="1150" dirty="0">
+            <a:pPr marL="0" indent="0">
+              <a:buNone/>
+            </a:pPr>
+            <a:r>
+              <a:rPr lang="en-US" dirty="0">
                 <a:solidFill>
                   <a:srgbClr val="1A2238"/>
                 </a:solidFill>
@@ -15063,7 +14466,7 @@
               </a:rPr>
               <a:t>•  Fácil interpretación</a:t>
             </a:r>
-            <a:endParaRPr lang="en-US" sz="1150" dirty="0"/>
+            <a:endParaRPr lang="en-US" dirty="0"/>
           </a:p>
         </p:txBody>
       </p:sp>
@@ -15088,11 +14491,11 @@
           <a:bodyPr wrap="square" rtlCol="0" anchor="ctr"/>
           <a:lstStyle/>
           <a:p>
-            <a:pPr indent="0" marL="0">
-              <a:buNone/>
-            </a:pPr>
-            <a:r>
-              <a:rPr lang="en-US" sz="1200" b="1" dirty="0">
+            <a:pPr marL="0" indent="0">
+              <a:buNone/>
+            </a:pPr>
+            <a:r>
+              <a:rPr lang="en-US" sz="2000" b="1" dirty="0">
                 <a:solidFill>
                   <a:srgbClr val="E8505B"/>
                 </a:solidFill>
@@ -15102,7 +14505,7 @@
               </a:rPr>
               <a:t>Desventajas</a:t>
             </a:r>
-            <a:endParaRPr lang="en-US" sz="1200" dirty="0"/>
+            <a:endParaRPr lang="en-US" sz="2000" dirty="0"/>
           </a:p>
         </p:txBody>
       </p:sp>
@@ -15127,11 +14530,11 @@
           <a:bodyPr wrap="square" rtlCol="0" anchor="ctr"/>
           <a:lstStyle/>
           <a:p>
-            <a:pPr indent="0" marL="0">
-              <a:buNone/>
-            </a:pPr>
-            <a:r>
-              <a:rPr lang="en-US" sz="1150" dirty="0">
+            <a:pPr marL="0" indent="0">
+              <a:buNone/>
+            </a:pPr>
+            <a:r>
+              <a:rPr lang="en-US" dirty="0">
                 <a:solidFill>
                   <a:srgbClr val="1A2238"/>
                 </a:solidFill>
@@ -15141,7 +14544,7 @@
               </a:rPr>
               <a:t>•  Menor capacidad para relaciones no lineales</a:t>
             </a:r>
-            <a:endParaRPr lang="en-US" sz="1150" dirty="0"/>
+            <a:endParaRPr lang="en-US" dirty="0"/>
           </a:p>
         </p:txBody>
       </p:sp>
@@ -15166,11 +14569,11 @@
           <a:bodyPr wrap="square" rtlCol="0" anchor="ctr"/>
           <a:lstStyle/>
           <a:p>
-            <a:pPr indent="0" marL="0">
-              <a:buNone/>
-            </a:pPr>
-            <a:r>
-              <a:rPr lang="en-US" sz="900" dirty="0">
+            <a:pPr marL="0" indent="0">
+              <a:buNone/>
+            </a:pPr>
+            <a:r>
+              <a:rPr lang="en-US" sz="1200" dirty="0">
                 <a:solidFill>
                   <a:srgbClr val="6B7280"/>
                 </a:solidFill>
@@ -15180,7 +14583,7 @@
               </a:rPr>
               <a:t>DriveSafe AI  |  Detección de somnolencia con Machine Learning</a:t>
             </a:r>
-            <a:endParaRPr lang="en-US" sz="900" dirty="0"/>
+            <a:endParaRPr lang="en-US" sz="1200" dirty="0"/>
           </a:p>
         </p:txBody>
       </p:sp>
@@ -15205,11 +14608,11 @@
           <a:bodyPr wrap="square" rtlCol="0" anchor="ctr"/>
           <a:lstStyle/>
           <a:p>
-            <a:pPr algn="r" indent="0" marL="0">
-              <a:buNone/>
-            </a:pPr>
-            <a:r>
-              <a:rPr lang="en-US" sz="900" dirty="0">
+            <a:pPr marL="0" indent="0" algn="r">
+              <a:buNone/>
+            </a:pPr>
+            <a:r>
+              <a:rPr lang="en-US" sz="1200" dirty="0">
                 <a:solidFill>
                   <a:srgbClr val="6B7280"/>
                 </a:solidFill>
@@ -15219,7 +14622,7 @@
               </a:rPr>
               <a:t>8</a:t>
             </a:r>
-            <a:endParaRPr lang="en-US" sz="900" dirty="0"/>
+            <a:endParaRPr lang="en-US" sz="1200" dirty="0"/>
           </a:p>
         </p:txBody>
       </p:sp>
@@ -15239,6 +14642,7 @@
         <a:solidFill>
           <a:srgbClr val="FFFFFF"/>
         </a:solidFill>
+        <a:effectLst/>
       </p:bgPr>
     </p:bg>
     <p:spTree>
@@ -15263,24 +14667,24 @@
         </p:nvSpPr>
         <p:spPr>
           <a:xfrm>
-            <a:off x="548640" y="384048"/>
-            <a:ext cx="7315200" cy="365760"/>
-          </a:xfrm>
-          <a:prstGeom prst="rect">
-            <a:avLst/>
-          </a:prstGeom>
-          <a:noFill/>
-          <a:ln/>
-        </p:spPr>
-        <p:txBody>
-          <a:bodyPr wrap="square" rtlCol="0" anchor="ctr"/>
-          <a:lstStyle/>
-          <a:p>
-            <a:pPr indent="0" marL="0">
-              <a:buNone/>
-            </a:pPr>
-            <a:r>
-              <a:rPr lang="en-US" sz="1300" b="1" spc="200" kern="0" dirty="0">
+            <a:off x="489656" y="384048"/>
+            <a:ext cx="7374184" cy="365760"/>
+          </a:xfrm>
+          <a:prstGeom prst="rect">
+            <a:avLst/>
+          </a:prstGeom>
+          <a:noFill/>
+          <a:ln/>
+        </p:spPr>
+        <p:txBody>
+          <a:bodyPr wrap="square" rtlCol="0" anchor="ctr"/>
+          <a:lstStyle/>
+          <a:p>
+            <a:pPr marL="0" indent="0">
+              <a:buNone/>
+            </a:pPr>
+            <a:r>
+              <a:rPr lang="en-US" sz="2000" b="1" kern="0" spc="200" dirty="0">
                 <a:solidFill>
                   <a:srgbClr val="1C7293"/>
                 </a:solidFill>
@@ -15290,7 +14694,7 @@
               </a:rPr>
               <a:t>04 · ENTRENAMIENTO DEL MODELO</a:t>
             </a:r>
-            <a:endParaRPr lang="en-US" sz="1300" dirty="0"/>
+            <a:endParaRPr lang="en-US" sz="2000" dirty="0"/>
           </a:p>
         </p:txBody>
       </p:sp>
@@ -15302,24 +14706,24 @@
         </p:nvSpPr>
         <p:spPr>
           <a:xfrm>
-            <a:off x="548640" y="685800"/>
-            <a:ext cx="10789920" cy="731520"/>
-          </a:xfrm>
-          <a:prstGeom prst="rect">
-            <a:avLst/>
-          </a:prstGeom>
-          <a:noFill/>
-          <a:ln/>
-        </p:spPr>
-        <p:txBody>
-          <a:bodyPr wrap="square" rtlCol="0" anchor="ctr"/>
-          <a:lstStyle/>
-          <a:p>
-            <a:pPr indent="0" marL="0">
-              <a:buNone/>
-            </a:pPr>
-            <a:r>
-              <a:rPr lang="en-US" sz="3000" b="1" dirty="0">
+            <a:off x="449139" y="842713"/>
+            <a:ext cx="10876921" cy="731520"/>
+          </a:xfrm>
+          <a:prstGeom prst="rect">
+            <a:avLst/>
+          </a:prstGeom>
+          <a:noFill/>
+          <a:ln/>
+        </p:spPr>
+        <p:txBody>
+          <a:bodyPr wrap="square" rtlCol="0" anchor="ctr"/>
+          <a:lstStyle/>
+          <a:p>
+            <a:pPr marL="0" indent="0">
+              <a:buNone/>
+            </a:pPr>
+            <a:r>
+              <a:rPr lang="en-US" sz="4400" b="1" dirty="0">
                 <a:solidFill>
                   <a:srgbClr val="1A2238"/>
                 </a:solidFill>
@@ -15329,7 +14733,7 @@
               </a:rPr>
               <a:t>Resultado del entrenamiento y evaluación funcional</a:t>
             </a:r>
-            <a:endParaRPr lang="en-US" sz="3000" dirty="0"/>
+            <a:endParaRPr lang="en-US" sz="4400" dirty="0"/>
           </a:p>
         </p:txBody>
       </p:sp>
@@ -15341,24 +14745,24 @@
         </p:nvSpPr>
         <p:spPr>
           <a:xfrm>
-            <a:off x="548640" y="1508760"/>
-            <a:ext cx="10789920" cy="548640"/>
-          </a:xfrm>
-          <a:prstGeom prst="rect">
-            <a:avLst/>
-          </a:prstGeom>
-          <a:noFill/>
-          <a:ln/>
-        </p:spPr>
-        <p:txBody>
-          <a:bodyPr wrap="square" rtlCol="0" anchor="ctr"/>
-          <a:lstStyle/>
-          <a:p>
-            <a:pPr indent="0" marL="0">
-              <a:buNone/>
-            </a:pPr>
-            <a:r>
-              <a:rPr lang="en-US" sz="1250" dirty="0">
+            <a:off x="434343" y="1921572"/>
+            <a:ext cx="10876921" cy="548640"/>
+          </a:xfrm>
+          <a:prstGeom prst="rect">
+            <a:avLst/>
+          </a:prstGeom>
+          <a:noFill/>
+          <a:ln/>
+        </p:spPr>
+        <p:txBody>
+          <a:bodyPr wrap="square" rtlCol="0" anchor="ctr"/>
+          <a:lstStyle/>
+          <a:p>
+            <a:pPr marL="0" indent="0">
+              <a:buNone/>
+            </a:pPr>
+            <a:r>
+              <a:rPr lang="en-US" sz="2000" dirty="0">
                 <a:solidFill>
                   <a:srgbClr val="6B7280"/>
                 </a:solidFill>
@@ -15368,7 +14772,7 @@
               </a:rPr>
               <a:t>El modelo fue validado mediante pruebas funcionales: dados ojos, bostezos y tiempo, devuelve un nivel de fatiga entre 0 y 100, usado de inmediato para clasificar el riesgo del conductor.</a:t>
             </a:r>
-            <a:endParaRPr lang="en-US" sz="1250" dirty="0"/>
+            <a:endParaRPr lang="en-US" sz="2000" dirty="0"/>
           </a:p>
         </p:txBody>
       </p:sp>
@@ -15380,8 +14784,8 @@
         </p:nvSpPr>
         <p:spPr>
           <a:xfrm>
-            <a:off x="548640" y="2286000"/>
-            <a:ext cx="3520440" cy="1554480"/>
+            <a:off x="449458" y="2721006"/>
+            <a:ext cx="3548826" cy="1554480"/>
           </a:xfrm>
           <a:prstGeom prst="roundRect">
             <a:avLst>
@@ -15402,8 +14806,8 @@
         </p:nvSpPr>
         <p:spPr>
           <a:xfrm>
-            <a:off x="777240" y="2514600"/>
-            <a:ext cx="109728" cy="1097280"/>
+            <a:off x="705559" y="2949606"/>
+            <a:ext cx="110613" cy="1097280"/>
           </a:xfrm>
           <a:prstGeom prst="roundRect">
             <a:avLst/>
@@ -15422,24 +14826,24 @@
         </p:nvSpPr>
         <p:spPr>
           <a:xfrm>
-            <a:off x="1005840" y="2514600"/>
-            <a:ext cx="2926080" cy="457200"/>
-          </a:xfrm>
-          <a:prstGeom prst="rect">
-            <a:avLst/>
-          </a:prstGeom>
-          <a:noFill/>
-          <a:ln/>
-        </p:spPr>
-        <p:txBody>
-          <a:bodyPr wrap="square" rtlCol="0" anchor="ctr"/>
-          <a:lstStyle/>
-          <a:p>
-            <a:pPr indent="0" marL="0">
-              <a:buNone/>
-            </a:pPr>
-            <a:r>
-              <a:rPr lang="en-US" sz="1500" b="1" dirty="0">
+            <a:off x="911451" y="2949606"/>
+            <a:ext cx="2949673" cy="457200"/>
+          </a:xfrm>
+          <a:prstGeom prst="rect">
+            <a:avLst/>
+          </a:prstGeom>
+          <a:noFill/>
+          <a:ln/>
+        </p:spPr>
+        <p:txBody>
+          <a:bodyPr wrap="square" rtlCol="0" anchor="ctr"/>
+          <a:lstStyle/>
+          <a:p>
+            <a:pPr marL="0" indent="0">
+              <a:buNone/>
+            </a:pPr>
+            <a:r>
+              <a:rPr lang="en-US" sz="2400" b="1" dirty="0">
                 <a:solidFill>
                   <a:srgbClr val="1A2238"/>
                 </a:solidFill>
@@ -15449,7 +14853,7 @@
               </a:rPr>
               <a:t>dataset.csv</a:t>
             </a:r>
-            <a:endParaRPr lang="en-US" sz="1500" dirty="0"/>
+            <a:endParaRPr lang="en-US" sz="2400" dirty="0"/>
           </a:p>
         </p:txBody>
       </p:sp>
@@ -15461,24 +14865,24 @@
         </p:nvSpPr>
         <p:spPr>
           <a:xfrm>
-            <a:off x="1005840" y="2971800"/>
-            <a:ext cx="2926080" cy="777240"/>
-          </a:xfrm>
-          <a:prstGeom prst="rect">
-            <a:avLst/>
-          </a:prstGeom>
-          <a:noFill/>
-          <a:ln/>
-        </p:spPr>
-        <p:txBody>
-          <a:bodyPr wrap="square" rtlCol="0" anchor="ctr"/>
-          <a:lstStyle/>
-          <a:p>
-            <a:pPr indent="0" marL="0">
-              <a:buNone/>
-            </a:pPr>
-            <a:r>
-              <a:rPr lang="en-US" sz="1100" dirty="0">
+            <a:off x="911451" y="3406806"/>
+            <a:ext cx="2949673" cy="777240"/>
+          </a:xfrm>
+          <a:prstGeom prst="rect">
+            <a:avLst/>
+          </a:prstGeom>
+          <a:noFill/>
+          <a:ln/>
+        </p:spPr>
+        <p:txBody>
+          <a:bodyPr wrap="square" rtlCol="0" anchor="ctr"/>
+          <a:lstStyle/>
+          <a:p>
+            <a:pPr marL="0" indent="0">
+              <a:buNone/>
+            </a:pPr>
+            <a:r>
+              <a:rPr lang="en-US" dirty="0">
                 <a:solidFill>
                   <a:srgbClr val="6B7280"/>
                 </a:solidFill>
@@ -15488,7 +14892,7 @@
               </a:rPr>
               <a:t>Muestras utilizadas para el entrenamiento</a:t>
             </a:r>
-            <a:endParaRPr lang="en-US" sz="1100" dirty="0"/>
+            <a:endParaRPr lang="en-US" dirty="0"/>
           </a:p>
         </p:txBody>
       </p:sp>
@@ -15500,8 +14904,8 @@
         </p:nvSpPr>
         <p:spPr>
           <a:xfrm>
-            <a:off x="4297680" y="2286000"/>
-            <a:ext cx="3520440" cy="1554480"/>
+            <a:off x="4198498" y="2721006"/>
+            <a:ext cx="3548826" cy="1554480"/>
           </a:xfrm>
           <a:prstGeom prst="roundRect">
             <a:avLst>
@@ -15522,8 +14926,8 @@
         </p:nvSpPr>
         <p:spPr>
           <a:xfrm>
-            <a:off x="4526280" y="2514600"/>
-            <a:ext cx="109728" cy="1097280"/>
+            <a:off x="4454599" y="2949606"/>
+            <a:ext cx="110613" cy="1097280"/>
           </a:xfrm>
           <a:prstGeom prst="roundRect">
             <a:avLst/>
@@ -15542,24 +14946,24 @@
         </p:nvSpPr>
         <p:spPr>
           <a:xfrm>
-            <a:off x="4754880" y="2514600"/>
-            <a:ext cx="2926080" cy="457200"/>
-          </a:xfrm>
-          <a:prstGeom prst="rect">
-            <a:avLst/>
-          </a:prstGeom>
-          <a:noFill/>
-          <a:ln/>
-        </p:spPr>
-        <p:txBody>
-          <a:bodyPr wrap="square" rtlCol="0" anchor="ctr"/>
-          <a:lstStyle/>
-          <a:p>
-            <a:pPr indent="0" marL="0">
-              <a:buNone/>
-            </a:pPr>
-            <a:r>
-              <a:rPr lang="en-US" sz="1500" b="1" dirty="0">
+            <a:off x="4660491" y="2949606"/>
+            <a:ext cx="2949673" cy="457200"/>
+          </a:xfrm>
+          <a:prstGeom prst="rect">
+            <a:avLst/>
+          </a:prstGeom>
+          <a:noFill/>
+          <a:ln/>
+        </p:spPr>
+        <p:txBody>
+          <a:bodyPr wrap="square" rtlCol="0" anchor="ctr"/>
+          <a:lstStyle/>
+          <a:p>
+            <a:pPr marL="0" indent="0">
+              <a:buNone/>
+            </a:pPr>
+            <a:r>
+              <a:rPr lang="en-US" sz="2400" b="1" dirty="0">
                 <a:solidFill>
                   <a:srgbClr val="1A2238"/>
                 </a:solidFill>
@@ -15569,7 +14973,7 @@
               </a:rPr>
               <a:t>modelo_fatiga.pkl</a:t>
             </a:r>
-            <a:endParaRPr lang="en-US" sz="1500" dirty="0"/>
+            <a:endParaRPr lang="en-US" sz="2400" dirty="0"/>
           </a:p>
         </p:txBody>
       </p:sp>
@@ -15581,24 +14985,24 @@
         </p:nvSpPr>
         <p:spPr>
           <a:xfrm>
-            <a:off x="4754880" y="2971800"/>
-            <a:ext cx="2926080" cy="777240"/>
-          </a:xfrm>
-          <a:prstGeom prst="rect">
-            <a:avLst/>
-          </a:prstGeom>
-          <a:noFill/>
-          <a:ln/>
-        </p:spPr>
-        <p:txBody>
-          <a:bodyPr wrap="square" rtlCol="0" anchor="ctr"/>
-          <a:lstStyle/>
-          <a:p>
-            <a:pPr indent="0" marL="0">
-              <a:buNone/>
-            </a:pPr>
-            <a:r>
-              <a:rPr lang="en-US" sz="1100" dirty="0">
+            <a:off x="4660491" y="3406806"/>
+            <a:ext cx="2949673" cy="777240"/>
+          </a:xfrm>
+          <a:prstGeom prst="rect">
+            <a:avLst/>
+          </a:prstGeom>
+          <a:noFill/>
+          <a:ln/>
+        </p:spPr>
+        <p:txBody>
+          <a:bodyPr wrap="square" rtlCol="0" anchor="ctr"/>
+          <a:lstStyle/>
+          <a:p>
+            <a:pPr marL="0" indent="0">
+              <a:buNone/>
+            </a:pPr>
+            <a:r>
+              <a:rPr lang="en-US" dirty="0">
                 <a:solidFill>
                   <a:srgbClr val="6B7280"/>
                 </a:solidFill>
@@ -15608,7 +15012,7 @@
               </a:rPr>
               <a:t>Modelo Random Forest entrenado y serializado</a:t>
             </a:r>
-            <a:endParaRPr lang="en-US" sz="1100" dirty="0"/>
+            <a:endParaRPr lang="en-US" dirty="0"/>
           </a:p>
         </p:txBody>
       </p:sp>
@@ -15620,8 +15024,8 @@
         </p:nvSpPr>
         <p:spPr>
           <a:xfrm>
-            <a:off x="8046720" y="2286000"/>
-            <a:ext cx="3520440" cy="1554480"/>
+            <a:off x="7947538" y="2721006"/>
+            <a:ext cx="3548826" cy="1554480"/>
           </a:xfrm>
           <a:prstGeom prst="roundRect">
             <a:avLst>
@@ -15642,8 +15046,8 @@
         </p:nvSpPr>
         <p:spPr>
           <a:xfrm>
-            <a:off x="8275320" y="2514600"/>
-            <a:ext cx="109728" cy="1097280"/>
+            <a:off x="8203639" y="2949606"/>
+            <a:ext cx="110613" cy="1097280"/>
           </a:xfrm>
           <a:prstGeom prst="roundRect">
             <a:avLst/>
@@ -15662,24 +15066,24 @@
         </p:nvSpPr>
         <p:spPr>
           <a:xfrm>
-            <a:off x="8503920" y="2514600"/>
-            <a:ext cx="2926080" cy="457200"/>
-          </a:xfrm>
-          <a:prstGeom prst="rect">
-            <a:avLst/>
-          </a:prstGeom>
-          <a:noFill/>
-          <a:ln/>
-        </p:spPr>
-        <p:txBody>
-          <a:bodyPr wrap="square" rtlCol="0" anchor="ctr"/>
-          <a:lstStyle/>
-          <a:p>
-            <a:pPr indent="0" marL="0">
-              <a:buNone/>
-            </a:pPr>
-            <a:r>
-              <a:rPr lang="en-US" sz="1500" b="1" dirty="0">
+            <a:off x="8409531" y="2949606"/>
+            <a:ext cx="2949673" cy="457200"/>
+          </a:xfrm>
+          <a:prstGeom prst="rect">
+            <a:avLst/>
+          </a:prstGeom>
+          <a:noFill/>
+          <a:ln/>
+        </p:spPr>
+        <p:txBody>
+          <a:bodyPr wrap="square" rtlCol="0" anchor="ctr"/>
+          <a:lstStyle/>
+          <a:p>
+            <a:pPr marL="0" indent="0">
+              <a:buNone/>
+            </a:pPr>
+            <a:r>
+              <a:rPr lang="en-US" sz="2400" b="1" dirty="0">
                 <a:solidFill>
                   <a:srgbClr val="1A2238"/>
                 </a:solidFill>
@@ -15689,7 +15093,7 @@
               </a:rPr>
               <a:t>model_version.txt</a:t>
             </a:r>
-            <a:endParaRPr lang="en-US" sz="1500" dirty="0"/>
+            <a:endParaRPr lang="en-US" sz="2400" dirty="0"/>
           </a:p>
         </p:txBody>
       </p:sp>
@@ -15701,24 +15105,24 @@
         </p:nvSpPr>
         <p:spPr>
           <a:xfrm>
-            <a:off x="8503920" y="2971800"/>
-            <a:ext cx="2926080" cy="777240"/>
-          </a:xfrm>
-          <a:prstGeom prst="rect">
-            <a:avLst/>
-          </a:prstGeom>
-          <a:noFill/>
-          <a:ln/>
-        </p:spPr>
-        <p:txBody>
-          <a:bodyPr wrap="square" rtlCol="0" anchor="ctr"/>
-          <a:lstStyle/>
-          <a:p>
-            <a:pPr indent="0" marL="0">
-              <a:buNone/>
-            </a:pPr>
-            <a:r>
-              <a:rPr lang="en-US" sz="1100" dirty="0">
+            <a:off x="8409531" y="3406806"/>
+            <a:ext cx="2949673" cy="777240"/>
+          </a:xfrm>
+          <a:prstGeom prst="rect">
+            <a:avLst/>
+          </a:prstGeom>
+          <a:noFill/>
+          <a:ln/>
+        </p:spPr>
+        <p:txBody>
+          <a:bodyPr wrap="square" rtlCol="0" anchor="ctr"/>
+          <a:lstStyle/>
+          <a:p>
+            <a:pPr marL="0" indent="0">
+              <a:buNone/>
+            </a:pPr>
+            <a:r>
+              <a:rPr lang="en-US" dirty="0">
                 <a:solidFill>
                   <a:srgbClr val="6B7280"/>
                 </a:solidFill>
@@ -15728,7 +15132,7 @@
               </a:rPr>
               <a:t>Historial de versiones del modelo</a:t>
             </a:r>
-            <a:endParaRPr lang="en-US" sz="1100" dirty="0"/>
+            <a:endParaRPr lang="en-US" dirty="0"/>
           </a:p>
         </p:txBody>
       </p:sp>
@@ -15740,24 +15144,24 @@
         </p:nvSpPr>
         <p:spPr>
           <a:xfrm>
-            <a:off x="548640" y="4114800"/>
-            <a:ext cx="10789920" cy="457200"/>
-          </a:xfrm>
-          <a:prstGeom prst="rect">
-            <a:avLst/>
-          </a:prstGeom>
-          <a:noFill/>
-          <a:ln/>
-        </p:spPr>
-        <p:txBody>
-          <a:bodyPr wrap="square" rtlCol="0" anchor="ctr"/>
-          <a:lstStyle/>
-          <a:p>
-            <a:pPr indent="0" marL="0">
-              <a:buNone/>
-            </a:pPr>
-            <a:r>
-              <a:rPr lang="en-US" sz="1150" i="1" dirty="0">
+            <a:off x="390843" y="4549806"/>
+            <a:ext cx="10876921" cy="457200"/>
+          </a:xfrm>
+          <a:prstGeom prst="rect">
+            <a:avLst/>
+          </a:prstGeom>
+          <a:noFill/>
+          <a:ln/>
+        </p:spPr>
+        <p:txBody>
+          <a:bodyPr wrap="square" rtlCol="0" anchor="ctr"/>
+          <a:lstStyle/>
+          <a:p>
+            <a:pPr marL="0" indent="0">
+              <a:buNone/>
+            </a:pPr>
+            <a:r>
+              <a:rPr lang="en-US" i="1" dirty="0">
                 <a:solidFill>
                   <a:srgbClr val="6B7280"/>
                 </a:solidFill>
@@ -15767,7 +15171,7 @@
               </a:rPr>
               <a:t>Nota: el proyecto se enfocó en la integración en tiempo real; no se implementó un módulo de métricas automáticas (Accuracy, F1, MSE).</a:t>
             </a:r>
-            <a:endParaRPr lang="en-US" sz="1150" dirty="0"/>
+            <a:endParaRPr lang="en-US" dirty="0"/>
           </a:p>
         </p:txBody>
       </p:sp>
@@ -15779,24 +15183,24 @@
         </p:nvSpPr>
         <p:spPr>
           <a:xfrm>
-            <a:off x="548640" y="4709160"/>
-            <a:ext cx="7315200" cy="365760"/>
-          </a:xfrm>
-          <a:prstGeom prst="rect">
-            <a:avLst/>
-          </a:prstGeom>
-          <a:noFill/>
-          <a:ln/>
-        </p:spPr>
-        <p:txBody>
-          <a:bodyPr wrap="square" rtlCol="0" anchor="ctr"/>
-          <a:lstStyle/>
-          <a:p>
-            <a:pPr indent="0" marL="0">
-              <a:buNone/>
-            </a:pPr>
-            <a:r>
-              <a:rPr lang="en-US" sz="1500" b="1" dirty="0">
+            <a:off x="418860" y="5144166"/>
+            <a:ext cx="7374184" cy="365760"/>
+          </a:xfrm>
+          <a:prstGeom prst="rect">
+            <a:avLst/>
+          </a:prstGeom>
+          <a:noFill/>
+          <a:ln/>
+        </p:spPr>
+        <p:txBody>
+          <a:bodyPr wrap="square" rtlCol="0" anchor="ctr"/>
+          <a:lstStyle/>
+          <a:p>
+            <a:pPr marL="0" indent="0">
+              <a:buNone/>
+            </a:pPr>
+            <a:r>
+              <a:rPr lang="en-US" sz="2400" b="1" dirty="0">
                 <a:solidFill>
                   <a:srgbClr val="1A2238"/>
                 </a:solidFill>
@@ -15806,7 +15210,7 @@
               </a:rPr>
               <a:t>Versionado automático del modelo</a:t>
             </a:r>
-            <a:endParaRPr lang="en-US" sz="1500" dirty="0"/>
+            <a:endParaRPr lang="en-US" sz="2400" dirty="0"/>
           </a:p>
         </p:txBody>
       </p:sp>
@@ -15818,8 +15222,8 @@
         </p:nvSpPr>
         <p:spPr>
           <a:xfrm>
-            <a:off x="548640" y="5166360"/>
-            <a:ext cx="2514600" cy="640080"/>
+            <a:off x="457568" y="5601366"/>
+            <a:ext cx="2534876" cy="640080"/>
           </a:xfrm>
           <a:prstGeom prst="rect">
             <a:avLst/>
@@ -15833,11 +15237,11 @@
           <a:bodyPr wrap="square" rtlCol="0" anchor="ctr"/>
           <a:lstStyle/>
           <a:p>
-            <a:pPr algn="ctr" indent="0" marL="0">
-              <a:buNone/>
-            </a:pPr>
-            <a:r>
-              <a:rPr lang="en-US" sz="1050" dirty="0">
+            <a:pPr marL="0" indent="0" algn="ctr">
+              <a:buNone/>
+            </a:pPr>
+            <a:r>
+              <a:rPr lang="en-US" sz="1600" dirty="0">
                 <a:solidFill>
                   <a:srgbClr val="FFFFFF"/>
                 </a:solidFill>
@@ -15847,7 +15251,7 @@
               </a:rPr>
               <a:t>Exporta muestras → dataset.csv</a:t>
             </a:r>
-            <a:endParaRPr lang="en-US" sz="1050" dirty="0"/>
+            <a:endParaRPr lang="en-US" sz="1600" dirty="0"/>
           </a:p>
         </p:txBody>
       </p:sp>
@@ -15859,8 +15263,8 @@
         </p:nvSpPr>
         <p:spPr>
           <a:xfrm>
-            <a:off x="3108960" y="5394960"/>
-            <a:ext cx="137160" cy="182880"/>
+            <a:off x="3037058" y="5829966"/>
+            <a:ext cx="138266" cy="182880"/>
           </a:xfrm>
           <a:prstGeom prst="rightArrow">
             <a:avLst/>
@@ -15879,8 +15283,8 @@
         </p:nvSpPr>
         <p:spPr>
           <a:xfrm>
-            <a:off x="3246120" y="5166360"/>
-            <a:ext cx="2514600" cy="640080"/>
+            <a:off x="3155048" y="5601366"/>
+            <a:ext cx="2534876" cy="640080"/>
           </a:xfrm>
           <a:prstGeom prst="rect">
             <a:avLst/>
@@ -15894,11 +15298,11 @@
           <a:bodyPr wrap="square" rtlCol="0" anchor="ctr"/>
           <a:lstStyle/>
           <a:p>
-            <a:pPr algn="ctr" indent="0" marL="0">
-              <a:buNone/>
-            </a:pPr>
-            <a:r>
-              <a:rPr lang="en-US" sz="1050" dirty="0">
+            <a:pPr marL="0" indent="0" algn="ctr">
+              <a:buNone/>
+            </a:pPr>
+            <a:r>
+              <a:rPr lang="en-US" sz="1600" dirty="0">
                 <a:solidFill>
                   <a:srgbClr val="FFFFFF"/>
                 </a:solidFill>
@@ -15908,7 +15312,7 @@
               </a:rPr>
               <a:t>Reentrena Random Forest</a:t>
             </a:r>
-            <a:endParaRPr lang="en-US" sz="1050" dirty="0"/>
+            <a:endParaRPr lang="en-US" sz="1600" dirty="0"/>
           </a:p>
         </p:txBody>
       </p:sp>
@@ -15920,8 +15324,8 @@
         </p:nvSpPr>
         <p:spPr>
           <a:xfrm>
-            <a:off x="5806440" y="5394960"/>
-            <a:ext cx="137160" cy="182880"/>
+            <a:off x="5734538" y="5829966"/>
+            <a:ext cx="138266" cy="182880"/>
           </a:xfrm>
           <a:prstGeom prst="rightArrow">
             <a:avLst/>
@@ -15940,8 +15344,8 @@
         </p:nvSpPr>
         <p:spPr>
           <a:xfrm>
-            <a:off x="5943600" y="5166360"/>
-            <a:ext cx="2514600" cy="640080"/>
+            <a:off x="5852528" y="5601366"/>
+            <a:ext cx="2534876" cy="640080"/>
           </a:xfrm>
           <a:prstGeom prst="rect">
             <a:avLst/>
@@ -15955,11 +15359,11 @@
           <a:bodyPr wrap="square" rtlCol="0" anchor="ctr"/>
           <a:lstStyle/>
           <a:p>
-            <a:pPr algn="ctr" indent="0" marL="0">
-              <a:buNone/>
-            </a:pPr>
-            <a:r>
-              <a:rPr lang="en-US" sz="1050" dirty="0">
+            <a:pPr marL="0" indent="0" algn="ctr">
+              <a:buNone/>
+            </a:pPr>
+            <a:r>
+              <a:rPr lang="en-US" sz="1600" dirty="0">
                 <a:solidFill>
                   <a:srgbClr val="FFFFFF"/>
                 </a:solidFill>
@@ -15969,7 +15373,7 @@
               </a:rPr>
               <a:t>Genera nueva versión de modelo_fatiga.pkl</a:t>
             </a:r>
-            <a:endParaRPr lang="en-US" sz="1050" dirty="0"/>
+            <a:endParaRPr lang="en-US" sz="1600" dirty="0"/>
           </a:p>
         </p:txBody>
       </p:sp>
@@ -15981,8 +15385,8 @@
         </p:nvSpPr>
         <p:spPr>
           <a:xfrm>
-            <a:off x="8503920" y="5394960"/>
-            <a:ext cx="137160" cy="182880"/>
+            <a:off x="8432018" y="5829966"/>
+            <a:ext cx="138266" cy="182880"/>
           </a:xfrm>
           <a:prstGeom prst="rightArrow">
             <a:avLst/>
@@ -16001,8 +15405,8 @@
         </p:nvSpPr>
         <p:spPr>
           <a:xfrm>
-            <a:off x="8641080" y="5166360"/>
-            <a:ext cx="2514600" cy="640080"/>
+            <a:off x="8550008" y="5601366"/>
+            <a:ext cx="2534876" cy="640080"/>
           </a:xfrm>
           <a:prstGeom prst="rect">
             <a:avLst/>
@@ -16016,11 +15420,11 @@
           <a:bodyPr wrap="square" rtlCol="0" anchor="ctr"/>
           <a:lstStyle/>
           <a:p>
-            <a:pPr algn="ctr" indent="0" marL="0">
-              <a:buNone/>
-            </a:pPr>
-            <a:r>
-              <a:rPr lang="en-US" sz="1050" dirty="0">
+            <a:pPr marL="0" indent="0" algn="ctr">
+              <a:buNone/>
+            </a:pPr>
+            <a:r>
+              <a:rPr lang="en-US" sz="1600" dirty="0">
                 <a:solidFill>
                   <a:srgbClr val="FFFFFF"/>
                 </a:solidFill>
@@ -16030,7 +15434,7 @@
               </a:rPr>
               <a:t>Crea backup del modelo anterior</a:t>
             </a:r>
-            <a:endParaRPr lang="en-US" sz="1050" dirty="0"/>
+            <a:endParaRPr lang="en-US" sz="1600" dirty="0"/>
           </a:p>
         </p:txBody>
       </p:sp>
@@ -16042,24 +15446,24 @@
         </p:nvSpPr>
         <p:spPr>
           <a:xfrm>
-            <a:off x="457200" y="6537960"/>
-            <a:ext cx="8229600" cy="274320"/>
-          </a:xfrm>
-          <a:prstGeom prst="rect">
-            <a:avLst/>
-          </a:prstGeom>
-          <a:noFill/>
-          <a:ln/>
-        </p:spPr>
-        <p:txBody>
-          <a:bodyPr wrap="square" rtlCol="0" anchor="ctr"/>
-          <a:lstStyle/>
-          <a:p>
-            <a:pPr indent="0" marL="0">
-              <a:buNone/>
-            </a:pPr>
-            <a:r>
-              <a:rPr lang="en-US" sz="900" dirty="0">
+            <a:off x="390843" y="6537960"/>
+            <a:ext cx="8295957" cy="274320"/>
+          </a:xfrm>
+          <a:prstGeom prst="rect">
+            <a:avLst/>
+          </a:prstGeom>
+          <a:noFill/>
+          <a:ln/>
+        </p:spPr>
+        <p:txBody>
+          <a:bodyPr wrap="square" rtlCol="0" anchor="ctr"/>
+          <a:lstStyle/>
+          <a:p>
+            <a:pPr marL="0" indent="0">
+              <a:buNone/>
+            </a:pPr>
+            <a:r>
+              <a:rPr lang="en-US" sz="1200" dirty="0">
                 <a:solidFill>
                   <a:srgbClr val="6B7280"/>
                 </a:solidFill>
@@ -16069,7 +15473,7 @@
               </a:rPr>
               <a:t>DriveSafe AI  |  Detección de somnolencia con Machine Learning</a:t>
             </a:r>
-            <a:endParaRPr lang="en-US" sz="900" dirty="0"/>
+            <a:endParaRPr lang="en-US" sz="1200" dirty="0"/>
           </a:p>
         </p:txBody>
       </p:sp>
@@ -16081,24 +15485,24 @@
         </p:nvSpPr>
         <p:spPr>
           <a:xfrm>
-            <a:off x="11521440" y="6537960"/>
-            <a:ext cx="457200" cy="274320"/>
-          </a:xfrm>
-          <a:prstGeom prst="rect">
-            <a:avLst/>
-          </a:prstGeom>
-          <a:noFill/>
-          <a:ln/>
-        </p:spPr>
-        <p:txBody>
-          <a:bodyPr wrap="square" rtlCol="0" anchor="ctr"/>
-          <a:lstStyle/>
-          <a:p>
-            <a:pPr algn="r" indent="0" marL="0">
-              <a:buNone/>
-            </a:pPr>
-            <a:r>
-              <a:rPr lang="en-US" sz="900" dirty="0">
+            <a:off x="11517754" y="6537960"/>
+            <a:ext cx="460886" cy="274320"/>
+          </a:xfrm>
+          <a:prstGeom prst="rect">
+            <a:avLst/>
+          </a:prstGeom>
+          <a:noFill/>
+          <a:ln/>
+        </p:spPr>
+        <p:txBody>
+          <a:bodyPr wrap="square" rtlCol="0" anchor="ctr"/>
+          <a:lstStyle/>
+          <a:p>
+            <a:pPr marL="0" indent="0" algn="r">
+              <a:buNone/>
+            </a:pPr>
+            <a:r>
+              <a:rPr lang="en-US" sz="1200" dirty="0">
                 <a:solidFill>
                   <a:srgbClr val="6B7280"/>
                 </a:solidFill>
@@ -16108,7 +15512,7 @@
               </a:rPr>
               <a:t>9</a:t>
             </a:r>
-            <a:endParaRPr lang="en-US" sz="900" dirty="0"/>
+            <a:endParaRPr lang="en-US" sz="1200" dirty="0"/>
           </a:p>
         </p:txBody>
       </p:sp>
@@ -16413,4 +15817,299 @@
     </a:ext>
   </a:extLst>
 </a:theme>
+</file>
+
+<file path=ppt/theme/theme2.xml><?xml version="1.0" encoding="utf-8"?>
+<a:theme xmlns:a="http://schemas.openxmlformats.org/drawingml/2006/main" name="Tema de Office">
+  <a:themeElements>
+    <a:clrScheme name="Office">
+      <a:dk1>
+        <a:sysClr val="windowText" lastClr="000000"/>
+      </a:dk1>
+      <a:lt1>
+        <a:sysClr val="window" lastClr="FFFFFF"/>
+      </a:lt1>
+      <a:dk2>
+        <a:srgbClr val="44546A"/>
+      </a:dk2>
+      <a:lt2>
+        <a:srgbClr val="E7E6E6"/>
+      </a:lt2>
+      <a:accent1>
+        <a:srgbClr val="4472C4"/>
+      </a:accent1>
+      <a:accent2>
+        <a:srgbClr val="ED7D31"/>
+      </a:accent2>
+      <a:accent3>
+        <a:srgbClr val="A5A5A5"/>
+      </a:accent3>
+      <a:accent4>
+        <a:srgbClr val="FFC000"/>
+      </a:accent4>
+      <a:accent5>
+        <a:srgbClr val="5B9BD5"/>
+      </a:accent5>
+      <a:accent6>
+        <a:srgbClr val="70AD47"/>
+      </a:accent6>
+      <a:hlink>
+        <a:srgbClr val="0563C1"/>
+      </a:hlink>
+      <a:folHlink>
+        <a:srgbClr val="954F72"/>
+      </a:folHlink>
+    </a:clrScheme>
+    <a:fontScheme name="Office">
+      <a:majorFont>
+        <a:latin typeface="Calibri Light" panose="020F0302020204030204"/>
+        <a:ea typeface=""/>
+        <a:cs typeface=""/>
+        <a:font script="Jpan" typeface="游ゴシック Light"/>
+        <a:font script="Hang" typeface="맑은 고딕"/>
+        <a:font script="Hans" typeface="等线 Light"/>
+        <a:font script="Hant" typeface="新細明體"/>
+        <a:font script="Arab" typeface="Times New Roman"/>
+        <a:font script="Hebr" typeface="Times New Roman"/>
+        <a:font script="Thai" typeface="Angsana New"/>
+        <a:font script="Ethi" typeface="Nyala"/>
+        <a:font script="Beng" typeface="Vrinda"/>
+        <a:font script="Gujr" typeface="Shruti"/>
+        <a:font script="Khmr" typeface="MoolBoran"/>
+        <a:font script="Knda" typeface="Tunga"/>
+        <a:font script="Guru" typeface="Raavi"/>
+        <a:font script="Cans" typeface="Euphemia"/>
+        <a:font script="Cher" typeface="Plantagenet Cherokee"/>
+        <a:font script="Yiii" typeface="Microsoft Yi Baiti"/>
+        <a:font script="Tibt" typeface="Microsoft Himalaya"/>
+        <a:font script="Thaa" typeface="MV Boli"/>
+        <a:font script="Deva" typeface="Mangal"/>
+        <a:font script="Telu" typeface="Gautami"/>
+        <a:font script="Taml" typeface="Latha"/>
+        <a:font script="Syrc" typeface="Estrangelo Edessa"/>
+        <a:font script="Orya" typeface="Kalinga"/>
+        <a:font script="Mlym" typeface="Kartika"/>
+        <a:font script="Laoo" typeface="DokChampa"/>
+        <a:font script="Sinh" typeface="Iskoola Pota"/>
+        <a:font script="Mong" typeface="Mongolian Baiti"/>
+        <a:font script="Viet" typeface="Times New Roman"/>
+        <a:font script="Uigh" typeface="Microsoft Uighur"/>
+        <a:font script="Geor" typeface="Sylfaen"/>
+        <a:font script="Armn" typeface="Arial"/>
+        <a:font script="Bugi" typeface="Leelawadee UI"/>
+        <a:font script="Bopo" typeface="Microsoft JhengHei"/>
+        <a:font script="Java" typeface="Javanese Text"/>
+        <a:font script="Lisu" typeface="Segoe UI"/>
+        <a:font script="Mymr" typeface="Myanmar Text"/>
+        <a:font script="Nkoo" typeface="Ebrima"/>
+        <a:font script="Olck" typeface="Nirmala UI"/>
+        <a:font script="Osma" typeface="Ebrima"/>
+        <a:font script="Phag" typeface="Phagspa"/>
+        <a:font script="Syrn" typeface="Estrangelo Edessa"/>
+        <a:font script="Syrj" typeface="Estrangelo Edessa"/>
+        <a:font script="Syre" typeface="Estrangelo Edessa"/>
+        <a:font script="Sora" typeface="Nirmala UI"/>
+        <a:font script="Tale" typeface="Microsoft Tai Le"/>
+        <a:font script="Talu" typeface="Microsoft New Tai Lue"/>
+        <a:font script="Tfng" typeface="Ebrima"/>
+      </a:majorFont>
+      <a:minorFont>
+        <a:latin typeface="Calibri" panose="020F0502020204030204"/>
+        <a:ea typeface=""/>
+        <a:cs typeface=""/>
+        <a:font script="Jpan" typeface="游ゴシック"/>
+        <a:font script="Hang" typeface="맑은 고딕"/>
+        <a:font script="Hans" typeface="等线"/>
+        <a:font script="Hant" typeface="新細明體"/>
+        <a:font script="Arab" typeface="Arial"/>
+        <a:font script="Hebr" typeface="Arial"/>
+        <a:font script="Thai" typeface="Cordia New"/>
+        <a:font script="Ethi" typeface="Nyala"/>
+        <a:font script="Beng" typeface="Vrinda"/>
+        <a:font script="Gujr" typeface="Shruti"/>
+        <a:font script="Khmr" typeface="DaunPenh"/>
+        <a:font script="Knda" typeface="Tunga"/>
+        <a:font script="Guru" typeface="Raavi"/>
+        <a:font script="Cans" typeface="Euphemia"/>
+        <a:font script="Cher" typeface="Plantagenet Cherokee"/>
+        <a:font script="Yiii" typeface="Microsoft Yi Baiti"/>
+        <a:font script="Tibt" typeface="Microsoft Himalaya"/>
+        <a:font script="Thaa" typeface="MV Boli"/>
+        <a:font script="Deva" typeface="Mangal"/>
+        <a:font script="Telu" typeface="Gautami"/>
+        <a:font script="Taml" typeface="Latha"/>
+        <a:font script="Syrc" typeface="Estrangelo Edessa"/>
+        <a:font script="Orya" typeface="Kalinga"/>
+        <a:font script="Mlym" typeface="Kartika"/>
+        <a:font script="Laoo" typeface="DokChampa"/>
+        <a:font script="Sinh" typeface="Iskoola Pota"/>
+        <a:font script="Mong" typeface="Mongolian Baiti"/>
+        <a:font script="Viet" typeface="Arial"/>
+        <a:font script="Uigh" typeface="Microsoft Uighur"/>
+        <a:font script="Geor" typeface="Sylfaen"/>
+        <a:font script="Armn" typeface="Arial"/>
+        <a:font script="Bugi" typeface="Leelawadee UI"/>
+        <a:font script="Bopo" typeface="Microsoft JhengHei"/>
+        <a:font script="Java" typeface="Javanese Text"/>
+        <a:font script="Lisu" typeface="Segoe UI"/>
+        <a:font script="Mymr" typeface="Myanmar Text"/>
+        <a:font script="Nkoo" typeface="Ebrima"/>
+        <a:font script="Olck" typeface="Nirmala UI"/>
+        <a:font script="Osma" typeface="Ebrima"/>
+        <a:font script="Phag" typeface="Phagspa"/>
+        <a:font script="Syrn" typeface="Estrangelo Edessa"/>
+        <a:font script="Syrj" typeface="Estrangelo Edessa"/>
+        <a:font script="Syre" typeface="Estrangelo Edessa"/>
+        <a:font script="Sora" typeface="Nirmala UI"/>
+        <a:font script="Tale" typeface="Microsoft Tai Le"/>
+        <a:font script="Talu" typeface="Microsoft New Tai Lue"/>
+        <a:font script="Tfng" typeface="Ebrima"/>
+      </a:minorFont>
+    </a:fontScheme>
+    <a:fmtScheme name="Office">
+      <a:fillStyleLst>
+        <a:solidFill>
+          <a:schemeClr val="phClr"/>
+        </a:solidFill>
+        <a:gradFill rotWithShape="1">
+          <a:gsLst>
+            <a:gs pos="0">
+              <a:schemeClr val="phClr">
+                <a:lumMod val="110000"/>
+                <a:satMod val="105000"/>
+                <a:tint val="67000"/>
+              </a:schemeClr>
+            </a:gs>
+            <a:gs pos="50000">
+              <a:schemeClr val="phClr">
+                <a:lumMod val="105000"/>
+                <a:satMod val="103000"/>
+                <a:tint val="73000"/>
+              </a:schemeClr>
+            </a:gs>
+            <a:gs pos="100000">
+              <a:schemeClr val="phClr">
+                <a:lumMod val="105000"/>
+                <a:satMod val="109000"/>
+                <a:tint val="81000"/>
+              </a:schemeClr>
+            </a:gs>
+          </a:gsLst>
+          <a:lin ang="5400000" scaled="0"/>
+        </a:gradFill>
+        <a:gradFill rotWithShape="1">
+          <a:gsLst>
+            <a:gs pos="0">
+              <a:schemeClr val="phClr">
+                <a:satMod val="103000"/>
+                <a:lumMod val="102000"/>
+                <a:tint val="94000"/>
+              </a:schemeClr>
+            </a:gs>
+            <a:gs pos="50000">
+              <a:schemeClr val="phClr">
+                <a:satMod val="110000"/>
+                <a:lumMod val="100000"/>
+                <a:shade val="100000"/>
+              </a:schemeClr>
+            </a:gs>
+            <a:gs pos="100000">
+              <a:schemeClr val="phClr">
+                <a:lumMod val="99000"/>
+                <a:satMod val="120000"/>
+                <a:shade val="78000"/>
+              </a:schemeClr>
+            </a:gs>
+          </a:gsLst>
+          <a:lin ang="5400000" scaled="0"/>
+        </a:gradFill>
+      </a:fillStyleLst>
+      <a:lnStyleLst>
+        <a:ln w="6350" cap="flat" cmpd="sng" algn="ctr">
+          <a:solidFill>
+            <a:schemeClr val="phClr"/>
+          </a:solidFill>
+          <a:prstDash val="solid"/>
+          <a:miter lim="800000"/>
+        </a:ln>
+        <a:ln w="12700" cap="flat" cmpd="sng" algn="ctr">
+          <a:solidFill>
+            <a:schemeClr val="phClr"/>
+          </a:solidFill>
+          <a:prstDash val="solid"/>
+          <a:miter lim="800000"/>
+        </a:ln>
+        <a:ln w="19050" cap="flat" cmpd="sng" algn="ctr">
+          <a:solidFill>
+            <a:schemeClr val="phClr"/>
+          </a:solidFill>
+          <a:prstDash val="solid"/>
+          <a:miter lim="800000"/>
+        </a:ln>
+      </a:lnStyleLst>
+      <a:effectStyleLst>
+        <a:effectStyle>
+          <a:effectLst/>
+        </a:effectStyle>
+        <a:effectStyle>
+          <a:effectLst/>
+        </a:effectStyle>
+        <a:effectStyle>
+          <a:effectLst>
+            <a:outerShdw blurRad="57150" dist="19050" dir="5400000" algn="ctr" rotWithShape="0">
+              <a:srgbClr val="000000">
+                <a:alpha val="63000"/>
+              </a:srgbClr>
+            </a:outerShdw>
+          </a:effectLst>
+        </a:effectStyle>
+      </a:effectStyleLst>
+      <a:bgFillStyleLst>
+        <a:solidFill>
+          <a:schemeClr val="phClr"/>
+        </a:solidFill>
+        <a:solidFill>
+          <a:schemeClr val="phClr">
+            <a:tint val="95000"/>
+            <a:satMod val="170000"/>
+          </a:schemeClr>
+        </a:solidFill>
+        <a:gradFill rotWithShape="1">
+          <a:gsLst>
+            <a:gs pos="0">
+              <a:schemeClr val="phClr">
+                <a:tint val="93000"/>
+                <a:satMod val="150000"/>
+                <a:shade val="98000"/>
+                <a:lumMod val="102000"/>
+              </a:schemeClr>
+            </a:gs>
+            <a:gs pos="50000">
+              <a:schemeClr val="phClr">
+                <a:tint val="98000"/>
+                <a:satMod val="130000"/>
+                <a:shade val="90000"/>
+                <a:lumMod val="103000"/>
+              </a:schemeClr>
+            </a:gs>
+            <a:gs pos="100000">
+              <a:schemeClr val="phClr">
+                <a:shade val="63000"/>
+                <a:satMod val="120000"/>
+              </a:schemeClr>
+            </a:gs>
+          </a:gsLst>
+          <a:lin ang="5400000" scaled="0"/>
+        </a:gradFill>
+      </a:bgFillStyleLst>
+    </a:fmtScheme>
+  </a:themeElements>
+  <a:objectDefaults/>
+  <a:extraClrSchemeLst/>
+  <a:extLst>
+    <a:ext uri="{05A4C25C-085E-4340-85A3-A5531E510DB2}">
+      <thm15:themeFamily xmlns:thm15="http://schemas.microsoft.com/office/thememl/2012/main" name="Office Theme" id="{62F939B6-93AF-4DB8-9C6B-D6C7DFDC589F}" vid="{4A3C46E8-61CC-4603-A589-7422A47A8E4A}"/>
+    </a:ext>
+  </a:extLst>
+</a:theme>
 </file>